--- a/presentation/PingIt_SDK.pptx
+++ b/presentation/PingIt_SDK.pptx
@@ -4,34 +4,31 @@
   <p:sldMasterIdLst>
     <p:sldMasterId id="2147483648" r:id="rId1"/>
   </p:sldMasterIdLst>
-  <p:notesMasterIdLst>
-    <p:notesMasterId r:id="rId24"/>
-  </p:notesMasterIdLst>
   <p:sldIdLst>
-    <p:sldId id="256" r:id="rId2"/>
-    <p:sldId id="257" r:id="rId3"/>
-    <p:sldId id="258" r:id="rId4"/>
-    <p:sldId id="259" r:id="rId5"/>
-    <p:sldId id="260" r:id="rId6"/>
-    <p:sldId id="261" r:id="rId7"/>
-    <p:sldId id="262" r:id="rId8"/>
-    <p:sldId id="263" r:id="rId9"/>
-    <p:sldId id="264" r:id="rId10"/>
-    <p:sldId id="265" r:id="rId11"/>
-    <p:sldId id="266" r:id="rId12"/>
-    <p:sldId id="267" r:id="rId13"/>
-    <p:sldId id="268" r:id="rId14"/>
-    <p:sldId id="269" r:id="rId15"/>
-    <p:sldId id="270" r:id="rId16"/>
-    <p:sldId id="271" r:id="rId17"/>
-    <p:sldId id="272" r:id="rId18"/>
-    <p:sldId id="273" r:id="rId19"/>
-    <p:sldId id="274" r:id="rId20"/>
-    <p:sldId id="275" r:id="rId21"/>
-    <p:sldId id="276" r:id="rId22"/>
-    <p:sldId id="277" r:id="rId23"/>
+    <p:sldId id="256" r:id="rId7"/>
+    <p:sldId id="257" r:id="rId8"/>
+    <p:sldId id="258" r:id="rId9"/>
+    <p:sldId id="259" r:id="rId10"/>
+    <p:sldId id="260" r:id="rId11"/>
+    <p:sldId id="261" r:id="rId12"/>
+    <p:sldId id="262" r:id="rId13"/>
+    <p:sldId id="263" r:id="rId14"/>
+    <p:sldId id="264" r:id="rId15"/>
+    <p:sldId id="265" r:id="rId16"/>
+    <p:sldId id="266" r:id="rId17"/>
+    <p:sldId id="267" r:id="rId18"/>
+    <p:sldId id="268" r:id="rId19"/>
+    <p:sldId id="269" r:id="rId20"/>
+    <p:sldId id="270" r:id="rId21"/>
+    <p:sldId id="271" r:id="rId22"/>
+    <p:sldId id="272" r:id="rId23"/>
+    <p:sldId id="273" r:id="rId24"/>
+    <p:sldId id="274" r:id="rId25"/>
+    <p:sldId id="275" r:id="rId26"/>
+    <p:sldId id="276" r:id="rId27"/>
+    <p:sldId id="277" r:id="rId28"/>
   </p:sldIdLst>
-  <p:sldSz cx="12192000" cy="6858000"/>
+  <p:sldSz cx="12191695" cy="6858000" type="screen4x3"/>
   <p:notesSz cx="6858000" cy="9144000"/>
   <p:defaultTextStyle>
     <a:defPPr>
@@ -128,458 +125,7 @@
       </a:defRPr>
     </a:lvl9pPr>
   </p:defaultTextStyle>
-  <p:extLst>
-    <p:ext uri="{EFAFB233-063F-42B5-8137-9DF3F51BA10A}">
-      <p15:sldGuideLst xmlns:p15="http://schemas.microsoft.com/office/powerpoint/2012/main">
-        <p15:guide id="1" orient="horz" pos="2160">
-          <p15:clr>
-            <a:srgbClr val="A4A3A4"/>
-          </p15:clr>
-        </p15:guide>
-        <p15:guide id="2" pos="2880">
-          <p15:clr>
-            <a:srgbClr val="A4A3A4"/>
-          </p15:clr>
-        </p15:guide>
-      </p15:sldGuideLst>
-    </p:ext>
-  </p:extLst>
 </p:presentation>
-</file>
-
-<file path=ppt/notesMasters/notesMaster1.xml><?xml version="1.0" encoding="utf-8"?>
-<p:notesMaster xmlns:a="http://schemas.openxmlformats.org/drawingml/2006/main" xmlns:r="http://schemas.openxmlformats.org/officeDocument/2006/relationships" xmlns:p="http://schemas.openxmlformats.org/presentationml/2006/main">
-  <p:cSld>
-    <p:bg>
-      <p:bgRef idx="1001">
-        <a:schemeClr val="bg1"/>
-      </p:bgRef>
-    </p:bg>
-    <p:spTree>
-      <p:nvGrpSpPr>
-        <p:cNvPr id="1" name=""/>
-        <p:cNvGrpSpPr/>
-        <p:nvPr/>
-      </p:nvGrpSpPr>
-      <p:grpSpPr>
-        <a:xfrm>
-          <a:off x="0" y="0"/>
-          <a:ext cx="0" cy="0"/>
-          <a:chOff x="0" y="0"/>
-          <a:chExt cx="0" cy="0"/>
-        </a:xfrm>
-      </p:grpSpPr>
-      <p:sp>
-        <p:nvSpPr>
-          <p:cNvPr id="2" name="Header Placeholder 1"/>
-          <p:cNvSpPr>
-            <a:spLocks noGrp="1"/>
-          </p:cNvSpPr>
-          <p:nvPr>
-            <p:ph type="hdr" sz="quarter"/>
-          </p:nvPr>
-        </p:nvSpPr>
-        <p:spPr>
-          <a:xfrm>
-            <a:off x="0" y="0"/>
-            <a:ext cx="2971800" cy="458788"/>
-          </a:xfrm>
-          <a:prstGeom prst="rect">
-            <a:avLst/>
-          </a:prstGeom>
-        </p:spPr>
-        <p:txBody>
-          <a:bodyPr vert="horz" lIns="91440" tIns="45720" rIns="91440" bIns="45720" rtlCol="0"/>
-          <a:lstStyle>
-            <a:lvl1pPr algn="l">
-              <a:defRPr sz="1200"/>
-            </a:lvl1pPr>
-          </a:lstStyle>
-          <a:p>
-            <a:endParaRPr lang="en-IL"/>
-          </a:p>
-        </p:txBody>
-      </p:sp>
-      <p:sp>
-        <p:nvSpPr>
-          <p:cNvPr id="3" name="Date Placeholder 2"/>
-          <p:cNvSpPr>
-            <a:spLocks noGrp="1"/>
-          </p:cNvSpPr>
-          <p:nvPr>
-            <p:ph type="dt" idx="1"/>
-          </p:nvPr>
-        </p:nvSpPr>
-        <p:spPr>
-          <a:xfrm>
-            <a:off x="3884613" y="0"/>
-            <a:ext cx="2971800" cy="458788"/>
-          </a:xfrm>
-          <a:prstGeom prst="rect">
-            <a:avLst/>
-          </a:prstGeom>
-        </p:spPr>
-        <p:txBody>
-          <a:bodyPr vert="horz" lIns="91440" tIns="45720" rIns="91440" bIns="45720" rtlCol="0"/>
-          <a:lstStyle>
-            <a:lvl1pPr algn="r">
-              <a:defRPr sz="1200"/>
-            </a:lvl1pPr>
-          </a:lstStyle>
-          <a:p>
-            <a:fld id="{D232E83C-E684-5247-B383-DA2C7BCF0CAE}" type="datetimeFigureOut">
-              <a:rPr lang="en-IL" smtClean="0"/>
-              <a:t>16/06/2026</a:t>
-            </a:fld>
-            <a:endParaRPr lang="en-IL"/>
-          </a:p>
-        </p:txBody>
-      </p:sp>
-      <p:sp>
-        <p:nvSpPr>
-          <p:cNvPr id="4" name="Slide Image Placeholder 3"/>
-          <p:cNvSpPr>
-            <a:spLocks noGrp="1" noRot="1" noChangeAspect="1"/>
-          </p:cNvSpPr>
-          <p:nvPr>
-            <p:ph type="sldImg" idx="2"/>
-          </p:nvPr>
-        </p:nvSpPr>
-        <p:spPr>
-          <a:xfrm>
-            <a:off x="685800" y="1143000"/>
-            <a:ext cx="5486400" cy="3086100"/>
-          </a:xfrm>
-          <a:prstGeom prst="rect">
-            <a:avLst/>
-          </a:prstGeom>
-          <a:noFill/>
-          <a:ln w="12700">
-            <a:solidFill>
-              <a:prstClr val="black"/>
-            </a:solidFill>
-          </a:ln>
-        </p:spPr>
-        <p:txBody>
-          <a:bodyPr vert="horz" lIns="91440" tIns="45720" rIns="91440" bIns="45720" rtlCol="0" anchor="ctr"/>
-          <a:lstStyle/>
-          <a:p>
-            <a:endParaRPr lang="en-IL"/>
-          </a:p>
-        </p:txBody>
-      </p:sp>
-      <p:sp>
-        <p:nvSpPr>
-          <p:cNvPr id="5" name="Notes Placeholder 4"/>
-          <p:cNvSpPr>
-            <a:spLocks noGrp="1"/>
-          </p:cNvSpPr>
-          <p:nvPr>
-            <p:ph type="body" sz="quarter" idx="3"/>
-          </p:nvPr>
-        </p:nvSpPr>
-        <p:spPr>
-          <a:xfrm>
-            <a:off x="685800" y="4400550"/>
-            <a:ext cx="5486400" cy="3600450"/>
-          </a:xfrm>
-          <a:prstGeom prst="rect">
-            <a:avLst/>
-          </a:prstGeom>
-        </p:spPr>
-        <p:txBody>
-          <a:bodyPr vert="horz" lIns="91440" tIns="45720" rIns="91440" bIns="45720" rtlCol="0"/>
-          <a:lstStyle/>
-          <a:p>
-            <a:pPr lvl="0"/>
-            <a:r>
-              <a:rPr lang="en-US"/>
-              <a:t>Click to edit Master text styles</a:t>
-            </a:r>
-          </a:p>
-          <a:p>
-            <a:pPr lvl="1"/>
-            <a:r>
-              <a:rPr lang="en-US"/>
-              <a:t>Second level</a:t>
-            </a:r>
-          </a:p>
-          <a:p>
-            <a:pPr lvl="2"/>
-            <a:r>
-              <a:rPr lang="en-US"/>
-              <a:t>Third level</a:t>
-            </a:r>
-          </a:p>
-          <a:p>
-            <a:pPr lvl="3"/>
-            <a:r>
-              <a:rPr lang="en-US"/>
-              <a:t>Fourth level</a:t>
-            </a:r>
-          </a:p>
-          <a:p>
-            <a:pPr lvl="4"/>
-            <a:r>
-              <a:rPr lang="en-US"/>
-              <a:t>Fifth level</a:t>
-            </a:r>
-            <a:endParaRPr lang="en-IL"/>
-          </a:p>
-        </p:txBody>
-      </p:sp>
-      <p:sp>
-        <p:nvSpPr>
-          <p:cNvPr id="6" name="Footer Placeholder 5"/>
-          <p:cNvSpPr>
-            <a:spLocks noGrp="1"/>
-          </p:cNvSpPr>
-          <p:nvPr>
-            <p:ph type="ftr" sz="quarter" idx="4"/>
-          </p:nvPr>
-        </p:nvSpPr>
-        <p:spPr>
-          <a:xfrm>
-            <a:off x="0" y="8685213"/>
-            <a:ext cx="2971800" cy="458787"/>
-          </a:xfrm>
-          <a:prstGeom prst="rect">
-            <a:avLst/>
-          </a:prstGeom>
-        </p:spPr>
-        <p:txBody>
-          <a:bodyPr vert="horz" lIns="91440" tIns="45720" rIns="91440" bIns="45720" rtlCol="0" anchor="b"/>
-          <a:lstStyle>
-            <a:lvl1pPr algn="l">
-              <a:defRPr sz="1200"/>
-            </a:lvl1pPr>
-          </a:lstStyle>
-          <a:p>
-            <a:endParaRPr lang="en-IL"/>
-          </a:p>
-        </p:txBody>
-      </p:sp>
-      <p:sp>
-        <p:nvSpPr>
-          <p:cNvPr id="7" name="Slide Number Placeholder 6"/>
-          <p:cNvSpPr>
-            <a:spLocks noGrp="1"/>
-          </p:cNvSpPr>
-          <p:nvPr>
-            <p:ph type="sldNum" sz="quarter" idx="5"/>
-          </p:nvPr>
-        </p:nvSpPr>
-        <p:spPr>
-          <a:xfrm>
-            <a:off x="3884613" y="8685213"/>
-            <a:ext cx="2971800" cy="458787"/>
-          </a:xfrm>
-          <a:prstGeom prst="rect">
-            <a:avLst/>
-          </a:prstGeom>
-        </p:spPr>
-        <p:txBody>
-          <a:bodyPr vert="horz" lIns="91440" tIns="45720" rIns="91440" bIns="45720" rtlCol="0" anchor="b"/>
-          <a:lstStyle>
-            <a:lvl1pPr algn="r">
-              <a:defRPr sz="1200"/>
-            </a:lvl1pPr>
-          </a:lstStyle>
-          <a:p>
-            <a:fld id="{D08EF543-AFBA-2B41-81AE-A22FD1AAF87E}" type="slidenum">
-              <a:rPr lang="en-IL" smtClean="0"/>
-              <a:t>‹#›</a:t>
-            </a:fld>
-            <a:endParaRPr lang="en-IL"/>
-          </a:p>
-        </p:txBody>
-      </p:sp>
-    </p:spTree>
-    <p:extLst>
-      <p:ext uri="{BB962C8B-B14F-4D97-AF65-F5344CB8AC3E}">
-        <p14:creationId xmlns:p14="http://schemas.microsoft.com/office/powerpoint/2010/main" val="794265647"/>
-      </p:ext>
-    </p:extLst>
-  </p:cSld>
-  <p:clrMap bg1="lt1" tx1="dk1" bg2="lt2" tx2="dk2" accent1="accent1" accent2="accent2" accent3="accent3" accent4="accent4" accent5="accent5" accent6="accent6" hlink="hlink" folHlink="folHlink"/>
-  <p:notesStyle>
-    <a:lvl1pPr marL="0" algn="l" defTabSz="914400" rtl="0" eaLnBrk="1" latinLnBrk="0" hangingPunct="1">
-      <a:defRPr sz="1200" kern="1200">
-        <a:solidFill>
-          <a:schemeClr val="tx1"/>
-        </a:solidFill>
-        <a:latin typeface="+mn-lt"/>
-        <a:ea typeface="+mn-ea"/>
-        <a:cs typeface="+mn-cs"/>
-      </a:defRPr>
-    </a:lvl1pPr>
-    <a:lvl2pPr marL="457200" algn="l" defTabSz="914400" rtl="0" eaLnBrk="1" latinLnBrk="0" hangingPunct="1">
-      <a:defRPr sz="1200" kern="1200">
-        <a:solidFill>
-          <a:schemeClr val="tx1"/>
-        </a:solidFill>
-        <a:latin typeface="+mn-lt"/>
-        <a:ea typeface="+mn-ea"/>
-        <a:cs typeface="+mn-cs"/>
-      </a:defRPr>
-    </a:lvl2pPr>
-    <a:lvl3pPr marL="914400" algn="l" defTabSz="914400" rtl="0" eaLnBrk="1" latinLnBrk="0" hangingPunct="1">
-      <a:defRPr sz="1200" kern="1200">
-        <a:solidFill>
-          <a:schemeClr val="tx1"/>
-        </a:solidFill>
-        <a:latin typeface="+mn-lt"/>
-        <a:ea typeface="+mn-ea"/>
-        <a:cs typeface="+mn-cs"/>
-      </a:defRPr>
-    </a:lvl3pPr>
-    <a:lvl4pPr marL="1371600" algn="l" defTabSz="914400" rtl="0" eaLnBrk="1" latinLnBrk="0" hangingPunct="1">
-      <a:defRPr sz="1200" kern="1200">
-        <a:solidFill>
-          <a:schemeClr val="tx1"/>
-        </a:solidFill>
-        <a:latin typeface="+mn-lt"/>
-        <a:ea typeface="+mn-ea"/>
-        <a:cs typeface="+mn-cs"/>
-      </a:defRPr>
-    </a:lvl4pPr>
-    <a:lvl5pPr marL="1828800" algn="l" defTabSz="914400" rtl="0" eaLnBrk="1" latinLnBrk="0" hangingPunct="1">
-      <a:defRPr sz="1200" kern="1200">
-        <a:solidFill>
-          <a:schemeClr val="tx1"/>
-        </a:solidFill>
-        <a:latin typeface="+mn-lt"/>
-        <a:ea typeface="+mn-ea"/>
-        <a:cs typeface="+mn-cs"/>
-      </a:defRPr>
-    </a:lvl5pPr>
-    <a:lvl6pPr marL="2286000" algn="l" defTabSz="914400" rtl="0" eaLnBrk="1" latinLnBrk="0" hangingPunct="1">
-      <a:defRPr sz="1200" kern="1200">
-        <a:solidFill>
-          <a:schemeClr val="tx1"/>
-        </a:solidFill>
-        <a:latin typeface="+mn-lt"/>
-        <a:ea typeface="+mn-ea"/>
-        <a:cs typeface="+mn-cs"/>
-      </a:defRPr>
-    </a:lvl6pPr>
-    <a:lvl7pPr marL="2743200" algn="l" defTabSz="914400" rtl="0" eaLnBrk="1" latinLnBrk="0" hangingPunct="1">
-      <a:defRPr sz="1200" kern="1200">
-        <a:solidFill>
-          <a:schemeClr val="tx1"/>
-        </a:solidFill>
-        <a:latin typeface="+mn-lt"/>
-        <a:ea typeface="+mn-ea"/>
-        <a:cs typeface="+mn-cs"/>
-      </a:defRPr>
-    </a:lvl7pPr>
-    <a:lvl8pPr marL="3200400" algn="l" defTabSz="914400" rtl="0" eaLnBrk="1" latinLnBrk="0" hangingPunct="1">
-      <a:defRPr sz="1200" kern="1200">
-        <a:solidFill>
-          <a:schemeClr val="tx1"/>
-        </a:solidFill>
-        <a:latin typeface="+mn-lt"/>
-        <a:ea typeface="+mn-ea"/>
-        <a:cs typeface="+mn-cs"/>
-      </a:defRPr>
-    </a:lvl8pPr>
-    <a:lvl9pPr marL="3657600" algn="l" defTabSz="914400" rtl="0" eaLnBrk="1" latinLnBrk="0" hangingPunct="1">
-      <a:defRPr sz="1200" kern="1200">
-        <a:solidFill>
-          <a:schemeClr val="tx1"/>
-        </a:solidFill>
-        <a:latin typeface="+mn-lt"/>
-        <a:ea typeface="+mn-ea"/>
-        <a:cs typeface="+mn-cs"/>
-      </a:defRPr>
-    </a:lvl9pPr>
-  </p:notesStyle>
-</p:notesMaster>
-</file>
-
-<file path=ppt/notesSlides/notesSlide1.xml><?xml version="1.0" encoding="utf-8"?>
-<p:notes xmlns:a="http://schemas.openxmlformats.org/drawingml/2006/main" xmlns:r="http://schemas.openxmlformats.org/officeDocument/2006/relationships" xmlns:p="http://schemas.openxmlformats.org/presentationml/2006/main">
-  <p:cSld>
-    <p:spTree>
-      <p:nvGrpSpPr>
-        <p:cNvPr id="1" name=""/>
-        <p:cNvGrpSpPr/>
-        <p:nvPr/>
-      </p:nvGrpSpPr>
-      <p:grpSpPr>
-        <a:xfrm>
-          <a:off x="0" y="0"/>
-          <a:ext cx="0" cy="0"/>
-          <a:chOff x="0" y="0"/>
-          <a:chExt cx="0" cy="0"/>
-        </a:xfrm>
-      </p:grpSpPr>
-      <p:sp>
-        <p:nvSpPr>
-          <p:cNvPr id="2" name="Slide Image Placeholder 1"/>
-          <p:cNvSpPr>
-            <a:spLocks noGrp="1" noRot="1" noChangeAspect="1"/>
-          </p:cNvSpPr>
-          <p:nvPr>
-            <p:ph type="sldImg"/>
-          </p:nvPr>
-        </p:nvSpPr>
-        <p:spPr/>
-      </p:sp>
-      <p:sp>
-        <p:nvSpPr>
-          <p:cNvPr id="3" name="Notes Placeholder 2"/>
-          <p:cNvSpPr>
-            <a:spLocks noGrp="1"/>
-          </p:cNvSpPr>
-          <p:nvPr>
-            <p:ph type="body" idx="1"/>
-          </p:nvPr>
-        </p:nvSpPr>
-        <p:spPr/>
-        <p:txBody>
-          <a:bodyPr/>
-          <a:lstStyle/>
-          <a:p>
-            <a:pPr marL="0" algn="r" defTabSz="914400" rtl="1" eaLnBrk="1" latinLnBrk="0" hangingPunct="1"/>
-            <a:endParaRPr lang="en-IL" dirty="0"/>
-          </a:p>
-        </p:txBody>
-      </p:sp>
-      <p:sp>
-        <p:nvSpPr>
-          <p:cNvPr id="4" name="Slide Number Placeholder 3"/>
-          <p:cNvSpPr>
-            <a:spLocks noGrp="1"/>
-          </p:cNvSpPr>
-          <p:nvPr>
-            <p:ph type="sldNum" sz="quarter" idx="5"/>
-          </p:nvPr>
-        </p:nvSpPr>
-        <p:spPr/>
-        <p:txBody>
-          <a:bodyPr/>
-          <a:lstStyle/>
-          <a:p>
-            <a:fld id="{D08EF543-AFBA-2B41-81AE-A22FD1AAF87E}" type="slidenum">
-              <a:rPr lang="en-IL" smtClean="0"/>
-              <a:t>1</a:t>
-            </a:fld>
-            <a:endParaRPr lang="en-IL"/>
-          </a:p>
-        </p:txBody>
-      </p:sp>
-    </p:spTree>
-    <p:extLst>
-      <p:ext uri="{BB962C8B-B14F-4D97-AF65-F5344CB8AC3E}">
-        <p14:creationId xmlns:p14="http://schemas.microsoft.com/office/powerpoint/2010/main" val="65507250"/>
-      </p:ext>
-    </p:extLst>
-  </p:cSld>
-  <p:clrMapOvr>
-    <a:masterClrMapping/>
-  </p:clrMapOvr>
-</p:notes>
 </file>
 
 <file path=ppt/slideLayouts/slideLayout1.xml><?xml version="1.0" encoding="utf-8"?>
@@ -620,9 +166,10 @@
           <a:lstStyle/>
           <a:p>
             <a:r>
-              <a:rPr lang="en-US"/>
+              <a:rPr lang="en-US" smtClean="0"/>
               <a:t>Click to edit Master title style</a:t>
             </a:r>
+            <a:endParaRPr lang="en-US"/>
           </a:p>
         </p:txBody>
       </p:sp>
@@ -738,9 +285,10 @@
           </a:lstStyle>
           <a:p>
             <a:r>
-              <a:rPr lang="en-US"/>
+              <a:rPr lang="en-US" smtClean="0"/>
               <a:t>Click to edit Master subtitle style</a:t>
             </a:r>
+            <a:endParaRPr lang="en-US"/>
           </a:p>
         </p:txBody>
       </p:sp>
@@ -761,7 +309,7 @@
           <a:p>
             <a:fld id="{5BCAD085-E8A6-8845-BD4E-CB4CCA059FC4}" type="datetimeFigureOut">
               <a:rPr lang="en-US" smtClean="0"/>
-              <a:t>6/16/26</a:t>
+              <a:t>1/27/13</a:t>
             </a:fld>
             <a:endParaRPr lang="en-US"/>
           </a:p>
@@ -855,9 +403,10 @@
           <a:lstStyle/>
           <a:p>
             <a:r>
-              <a:rPr lang="en-US"/>
+              <a:rPr lang="en-US" smtClean="0"/>
               <a:t>Click to edit Master title style</a:t>
             </a:r>
+            <a:endParaRPr lang="en-US"/>
           </a:p>
         </p:txBody>
       </p:sp>
@@ -878,37 +427,38 @@
           <a:p>
             <a:pPr lvl="0"/>
             <a:r>
-              <a:rPr lang="en-US"/>
+              <a:rPr lang="en-US" smtClean="0"/>
               <a:t>Click to edit Master text styles</a:t>
             </a:r>
           </a:p>
           <a:p>
             <a:pPr lvl="1"/>
             <a:r>
-              <a:rPr lang="en-US"/>
+              <a:rPr lang="en-US" smtClean="0"/>
               <a:t>Second level</a:t>
             </a:r>
           </a:p>
           <a:p>
             <a:pPr lvl="2"/>
             <a:r>
-              <a:rPr lang="en-US"/>
+              <a:rPr lang="en-US" smtClean="0"/>
               <a:t>Third level</a:t>
             </a:r>
           </a:p>
           <a:p>
             <a:pPr lvl="3"/>
             <a:r>
-              <a:rPr lang="en-US"/>
+              <a:rPr lang="en-US" smtClean="0"/>
               <a:t>Fourth level</a:t>
             </a:r>
           </a:p>
           <a:p>
             <a:pPr lvl="4"/>
             <a:r>
-              <a:rPr lang="en-US"/>
+              <a:rPr lang="en-US" smtClean="0"/>
               <a:t>Fifth level</a:t>
             </a:r>
+            <a:endParaRPr lang="en-US"/>
           </a:p>
         </p:txBody>
       </p:sp>
@@ -929,7 +479,7 @@
           <a:p>
             <a:fld id="{5BCAD085-E8A6-8845-BD4E-CB4CCA059FC4}" type="datetimeFigureOut">
               <a:rPr lang="en-US" smtClean="0"/>
-              <a:t>6/16/26</a:t>
+              <a:t>1/27/13</a:t>
             </a:fld>
             <a:endParaRPr lang="en-US"/>
           </a:p>
@@ -1028,9 +578,10 @@
           <a:lstStyle/>
           <a:p>
             <a:r>
-              <a:rPr lang="en-US"/>
+              <a:rPr lang="en-US" smtClean="0"/>
               <a:t>Click to edit Master title style</a:t>
             </a:r>
+            <a:endParaRPr lang="en-US"/>
           </a:p>
         </p:txBody>
       </p:sp>
@@ -1056,37 +607,38 @@
           <a:p>
             <a:pPr lvl="0"/>
             <a:r>
-              <a:rPr lang="en-US"/>
+              <a:rPr lang="en-US" smtClean="0"/>
               <a:t>Click to edit Master text styles</a:t>
             </a:r>
           </a:p>
           <a:p>
             <a:pPr lvl="1"/>
             <a:r>
-              <a:rPr lang="en-US"/>
+              <a:rPr lang="en-US" smtClean="0"/>
               <a:t>Second level</a:t>
             </a:r>
           </a:p>
           <a:p>
             <a:pPr lvl="2"/>
             <a:r>
-              <a:rPr lang="en-US"/>
+              <a:rPr lang="en-US" smtClean="0"/>
               <a:t>Third level</a:t>
             </a:r>
           </a:p>
           <a:p>
             <a:pPr lvl="3"/>
             <a:r>
-              <a:rPr lang="en-US"/>
+              <a:rPr lang="en-US" smtClean="0"/>
               <a:t>Fourth level</a:t>
             </a:r>
           </a:p>
           <a:p>
             <a:pPr lvl="4"/>
             <a:r>
-              <a:rPr lang="en-US"/>
+              <a:rPr lang="en-US" smtClean="0"/>
               <a:t>Fifth level</a:t>
             </a:r>
+            <a:endParaRPr lang="en-US"/>
           </a:p>
         </p:txBody>
       </p:sp>
@@ -1107,7 +659,7 @@
           <a:p>
             <a:fld id="{5BCAD085-E8A6-8845-BD4E-CB4CCA059FC4}" type="datetimeFigureOut">
               <a:rPr lang="en-US" smtClean="0"/>
-              <a:t>6/16/26</a:t>
+              <a:t>1/27/13</a:t>
             </a:fld>
             <a:endParaRPr lang="en-US"/>
           </a:p>
@@ -1201,9 +753,10 @@
           <a:lstStyle/>
           <a:p>
             <a:r>
-              <a:rPr lang="en-US"/>
+              <a:rPr lang="en-US" smtClean="0"/>
               <a:t>Click to edit Master title style</a:t>
             </a:r>
+            <a:endParaRPr lang="en-US"/>
           </a:p>
         </p:txBody>
       </p:sp>
@@ -1224,37 +777,38 @@
           <a:p>
             <a:pPr lvl="0"/>
             <a:r>
-              <a:rPr lang="en-US"/>
+              <a:rPr lang="en-US" smtClean="0"/>
               <a:t>Click to edit Master text styles</a:t>
             </a:r>
           </a:p>
           <a:p>
             <a:pPr lvl="1"/>
             <a:r>
-              <a:rPr lang="en-US"/>
+              <a:rPr lang="en-US" smtClean="0"/>
               <a:t>Second level</a:t>
             </a:r>
           </a:p>
           <a:p>
             <a:pPr lvl="2"/>
             <a:r>
-              <a:rPr lang="en-US"/>
+              <a:rPr lang="en-US" smtClean="0"/>
               <a:t>Third level</a:t>
             </a:r>
           </a:p>
           <a:p>
             <a:pPr lvl="3"/>
             <a:r>
-              <a:rPr lang="en-US"/>
+              <a:rPr lang="en-US" smtClean="0"/>
               <a:t>Fourth level</a:t>
             </a:r>
           </a:p>
           <a:p>
             <a:pPr lvl="4"/>
             <a:r>
-              <a:rPr lang="en-US"/>
+              <a:rPr lang="en-US" smtClean="0"/>
               <a:t>Fifth level</a:t>
             </a:r>
+            <a:endParaRPr lang="en-US"/>
           </a:p>
         </p:txBody>
       </p:sp>
@@ -1275,7 +829,7 @@
           <a:p>
             <a:fld id="{5BCAD085-E8A6-8845-BD4E-CB4CCA059FC4}" type="datetimeFigureOut">
               <a:rPr lang="en-US" smtClean="0"/>
-              <a:t>6/16/26</a:t>
+              <a:t>1/27/13</a:t>
             </a:fld>
             <a:endParaRPr lang="en-US"/>
           </a:p>
@@ -1378,9 +932,10 @@
           </a:lstStyle>
           <a:p>
             <a:r>
-              <a:rPr lang="en-US"/>
+              <a:rPr lang="en-US" smtClean="0"/>
               <a:t>Click to edit Master title style</a:t>
             </a:r>
+            <a:endParaRPr lang="en-US"/>
           </a:p>
         </p:txBody>
       </p:sp>
@@ -1497,7 +1052,7 @@
           <a:p>
             <a:pPr lvl="0"/>
             <a:r>
-              <a:rPr lang="en-US"/>
+              <a:rPr lang="en-US" smtClean="0"/>
               <a:t>Click to edit Master text styles</a:t>
             </a:r>
           </a:p>
@@ -1520,7 +1075,7 @@
           <a:p>
             <a:fld id="{5BCAD085-E8A6-8845-BD4E-CB4CCA059FC4}" type="datetimeFigureOut">
               <a:rPr lang="en-US" smtClean="0"/>
-              <a:t>6/16/26</a:t>
+              <a:t>1/27/13</a:t>
             </a:fld>
             <a:endParaRPr lang="en-US"/>
           </a:p>
@@ -1614,9 +1169,10 @@
           <a:lstStyle/>
           <a:p>
             <a:r>
-              <a:rPr lang="en-US"/>
+              <a:rPr lang="en-US" smtClean="0"/>
               <a:t>Click to edit Master title style</a:t>
             </a:r>
+            <a:endParaRPr lang="en-US"/>
           </a:p>
         </p:txBody>
       </p:sp>
@@ -1670,37 +1226,38 @@
           <a:p>
             <a:pPr lvl="0"/>
             <a:r>
-              <a:rPr lang="en-US"/>
+              <a:rPr lang="en-US" smtClean="0"/>
               <a:t>Click to edit Master text styles</a:t>
             </a:r>
           </a:p>
           <a:p>
             <a:pPr lvl="1"/>
             <a:r>
-              <a:rPr lang="en-US"/>
+              <a:rPr lang="en-US" smtClean="0"/>
               <a:t>Second level</a:t>
             </a:r>
           </a:p>
           <a:p>
             <a:pPr lvl="2"/>
             <a:r>
-              <a:rPr lang="en-US"/>
+              <a:rPr lang="en-US" smtClean="0"/>
               <a:t>Third level</a:t>
             </a:r>
           </a:p>
           <a:p>
             <a:pPr lvl="3"/>
             <a:r>
-              <a:rPr lang="en-US"/>
+              <a:rPr lang="en-US" smtClean="0"/>
               <a:t>Fourth level</a:t>
             </a:r>
           </a:p>
           <a:p>
             <a:pPr lvl="4"/>
             <a:r>
-              <a:rPr lang="en-US"/>
+              <a:rPr lang="en-US" smtClean="0"/>
               <a:t>Fifth level</a:t>
             </a:r>
+            <a:endParaRPr lang="en-US"/>
           </a:p>
         </p:txBody>
       </p:sp>
@@ -1754,37 +1311,38 @@
           <a:p>
             <a:pPr lvl="0"/>
             <a:r>
-              <a:rPr lang="en-US"/>
+              <a:rPr lang="en-US" smtClean="0"/>
               <a:t>Click to edit Master text styles</a:t>
             </a:r>
           </a:p>
           <a:p>
             <a:pPr lvl="1"/>
             <a:r>
-              <a:rPr lang="en-US"/>
+              <a:rPr lang="en-US" smtClean="0"/>
               <a:t>Second level</a:t>
             </a:r>
           </a:p>
           <a:p>
             <a:pPr lvl="2"/>
             <a:r>
-              <a:rPr lang="en-US"/>
+              <a:rPr lang="en-US" smtClean="0"/>
               <a:t>Third level</a:t>
             </a:r>
           </a:p>
           <a:p>
             <a:pPr lvl="3"/>
             <a:r>
-              <a:rPr lang="en-US"/>
+              <a:rPr lang="en-US" smtClean="0"/>
               <a:t>Fourth level</a:t>
             </a:r>
           </a:p>
           <a:p>
             <a:pPr lvl="4"/>
             <a:r>
-              <a:rPr lang="en-US"/>
+              <a:rPr lang="en-US" smtClean="0"/>
               <a:t>Fifth level</a:t>
             </a:r>
+            <a:endParaRPr lang="en-US"/>
           </a:p>
         </p:txBody>
       </p:sp>
@@ -1805,7 +1363,7 @@
           <a:p>
             <a:fld id="{5BCAD085-E8A6-8845-BD4E-CB4CCA059FC4}" type="datetimeFigureOut">
               <a:rPr lang="en-US" smtClean="0"/>
-              <a:t>6/16/26</a:t>
+              <a:t>1/27/13</a:t>
             </a:fld>
             <a:endParaRPr lang="en-US"/>
           </a:p>
@@ -1903,9 +1461,10 @@
           </a:lstStyle>
           <a:p>
             <a:r>
-              <a:rPr lang="en-US"/>
+              <a:rPr lang="en-US" smtClean="0"/>
               <a:t>Click to edit Master title style</a:t>
             </a:r>
+            <a:endParaRPr lang="en-US"/>
           </a:p>
         </p:txBody>
       </p:sp>
@@ -1968,7 +1527,7 @@
           <a:p>
             <a:pPr lvl="0"/>
             <a:r>
-              <a:rPr lang="en-US"/>
+              <a:rPr lang="en-US" smtClean="0"/>
               <a:t>Click to edit Master text styles</a:t>
             </a:r>
           </a:p>
@@ -2024,37 +1583,38 @@
           <a:p>
             <a:pPr lvl="0"/>
             <a:r>
-              <a:rPr lang="en-US"/>
+              <a:rPr lang="en-US" smtClean="0"/>
               <a:t>Click to edit Master text styles</a:t>
             </a:r>
           </a:p>
           <a:p>
             <a:pPr lvl="1"/>
             <a:r>
-              <a:rPr lang="en-US"/>
+              <a:rPr lang="en-US" smtClean="0"/>
               <a:t>Second level</a:t>
             </a:r>
           </a:p>
           <a:p>
             <a:pPr lvl="2"/>
             <a:r>
-              <a:rPr lang="en-US"/>
+              <a:rPr lang="en-US" smtClean="0"/>
               <a:t>Third level</a:t>
             </a:r>
           </a:p>
           <a:p>
             <a:pPr lvl="3"/>
             <a:r>
-              <a:rPr lang="en-US"/>
+              <a:rPr lang="en-US" smtClean="0"/>
               <a:t>Fourth level</a:t>
             </a:r>
           </a:p>
           <a:p>
             <a:pPr lvl="4"/>
             <a:r>
-              <a:rPr lang="en-US"/>
+              <a:rPr lang="en-US" smtClean="0"/>
               <a:t>Fifth level</a:t>
             </a:r>
+            <a:endParaRPr lang="en-US"/>
           </a:p>
         </p:txBody>
       </p:sp>
@@ -2117,7 +1677,7 @@
           <a:p>
             <a:pPr lvl="0"/>
             <a:r>
-              <a:rPr lang="en-US"/>
+              <a:rPr lang="en-US" smtClean="0"/>
               <a:t>Click to edit Master text styles</a:t>
             </a:r>
           </a:p>
@@ -2173,37 +1733,38 @@
           <a:p>
             <a:pPr lvl="0"/>
             <a:r>
-              <a:rPr lang="en-US"/>
+              <a:rPr lang="en-US" smtClean="0"/>
               <a:t>Click to edit Master text styles</a:t>
             </a:r>
           </a:p>
           <a:p>
             <a:pPr lvl="1"/>
             <a:r>
-              <a:rPr lang="en-US"/>
+              <a:rPr lang="en-US" smtClean="0"/>
               <a:t>Second level</a:t>
             </a:r>
           </a:p>
           <a:p>
             <a:pPr lvl="2"/>
             <a:r>
-              <a:rPr lang="en-US"/>
+              <a:rPr lang="en-US" smtClean="0"/>
               <a:t>Third level</a:t>
             </a:r>
           </a:p>
           <a:p>
             <a:pPr lvl="3"/>
             <a:r>
-              <a:rPr lang="en-US"/>
+              <a:rPr lang="en-US" smtClean="0"/>
               <a:t>Fourth level</a:t>
             </a:r>
           </a:p>
           <a:p>
             <a:pPr lvl="4"/>
             <a:r>
-              <a:rPr lang="en-US"/>
+              <a:rPr lang="en-US" smtClean="0"/>
               <a:t>Fifth level</a:t>
             </a:r>
+            <a:endParaRPr lang="en-US"/>
           </a:p>
         </p:txBody>
       </p:sp>
@@ -2224,7 +1785,7 @@
           <a:p>
             <a:fld id="{5BCAD085-E8A6-8845-BD4E-CB4CCA059FC4}" type="datetimeFigureOut">
               <a:rPr lang="en-US" smtClean="0"/>
-              <a:t>6/16/26</a:t>
+              <a:t>1/27/13</a:t>
             </a:fld>
             <a:endParaRPr lang="en-US"/>
           </a:p>
@@ -2318,9 +1879,10 @@
           <a:lstStyle/>
           <a:p>
             <a:r>
-              <a:rPr lang="en-US"/>
+              <a:rPr lang="en-US" smtClean="0"/>
               <a:t>Click to edit Master title style</a:t>
             </a:r>
+            <a:endParaRPr lang="en-US"/>
           </a:p>
         </p:txBody>
       </p:sp>
@@ -2341,7 +1903,7 @@
           <a:p>
             <a:fld id="{5BCAD085-E8A6-8845-BD4E-CB4CCA059FC4}" type="datetimeFigureOut">
               <a:rPr lang="en-US" smtClean="0"/>
-              <a:t>6/16/26</a:t>
+              <a:t>1/27/13</a:t>
             </a:fld>
             <a:endParaRPr lang="en-US"/>
           </a:p>
@@ -2436,7 +1998,7 @@
           <a:p>
             <a:fld id="{5BCAD085-E8A6-8845-BD4E-CB4CCA059FC4}" type="datetimeFigureOut">
               <a:rPr lang="en-US" smtClean="0"/>
-              <a:t>6/16/26</a:t>
+              <a:t>1/27/13</a:t>
             </a:fld>
             <a:endParaRPr lang="en-US"/>
           </a:p>
@@ -2539,9 +2101,10 @@
           </a:lstStyle>
           <a:p>
             <a:r>
-              <a:rPr lang="en-US"/>
+              <a:rPr lang="en-US" smtClean="0"/>
               <a:t>Click to edit Master title style</a:t>
             </a:r>
+            <a:endParaRPr lang="en-US"/>
           </a:p>
         </p:txBody>
       </p:sp>
@@ -2595,37 +2158,38 @@
           <a:p>
             <a:pPr lvl="0"/>
             <a:r>
-              <a:rPr lang="en-US"/>
+              <a:rPr lang="en-US" smtClean="0"/>
               <a:t>Click to edit Master text styles</a:t>
             </a:r>
           </a:p>
           <a:p>
             <a:pPr lvl="1"/>
             <a:r>
-              <a:rPr lang="en-US"/>
+              <a:rPr lang="en-US" smtClean="0"/>
               <a:t>Second level</a:t>
             </a:r>
           </a:p>
           <a:p>
             <a:pPr lvl="2"/>
             <a:r>
-              <a:rPr lang="en-US"/>
+              <a:rPr lang="en-US" smtClean="0"/>
               <a:t>Third level</a:t>
             </a:r>
           </a:p>
           <a:p>
             <a:pPr lvl="3"/>
             <a:r>
-              <a:rPr lang="en-US"/>
+              <a:rPr lang="en-US" smtClean="0"/>
               <a:t>Fourth level</a:t>
             </a:r>
           </a:p>
           <a:p>
             <a:pPr lvl="4"/>
             <a:r>
-              <a:rPr lang="en-US"/>
+              <a:rPr lang="en-US" smtClean="0"/>
               <a:t>Fifth level</a:t>
             </a:r>
+            <a:endParaRPr lang="en-US"/>
           </a:p>
         </p:txBody>
       </p:sp>
@@ -2688,7 +2252,7 @@
           <a:p>
             <a:pPr lvl="0"/>
             <a:r>
-              <a:rPr lang="en-US"/>
+              <a:rPr lang="en-US" smtClean="0"/>
               <a:t>Click to edit Master text styles</a:t>
             </a:r>
           </a:p>
@@ -2711,7 +2275,7 @@
           <a:p>
             <a:fld id="{5BCAD085-E8A6-8845-BD4E-CB4CCA059FC4}" type="datetimeFigureOut">
               <a:rPr lang="en-US" smtClean="0"/>
-              <a:t>6/16/26</a:t>
+              <a:t>1/27/13</a:t>
             </a:fld>
             <a:endParaRPr lang="en-US"/>
           </a:p>
@@ -2814,9 +2378,10 @@
           </a:lstStyle>
           <a:p>
             <a:r>
-              <a:rPr lang="en-US"/>
+              <a:rPr lang="en-US" smtClean="0"/>
               <a:t>Click to edit Master title style</a:t>
             </a:r>
+            <a:endParaRPr lang="en-US"/>
           </a:p>
         </p:txBody>
       </p:sp>
@@ -2940,7 +2505,7 @@
           <a:p>
             <a:pPr lvl="0"/>
             <a:r>
-              <a:rPr lang="en-US"/>
+              <a:rPr lang="en-US" smtClean="0"/>
               <a:t>Click to edit Master text styles</a:t>
             </a:r>
           </a:p>
@@ -2963,7 +2528,7 @@
           <a:p>
             <a:fld id="{5BCAD085-E8A6-8845-BD4E-CB4CCA059FC4}" type="datetimeFigureOut">
               <a:rPr lang="en-US" smtClean="0"/>
-              <a:t>6/16/26</a:t>
+              <a:t>1/27/13</a:t>
             </a:fld>
             <a:endParaRPr lang="en-US"/>
           </a:p>
@@ -3072,9 +2637,10 @@
           <a:lstStyle/>
           <a:p>
             <a:r>
-              <a:rPr lang="en-US"/>
+              <a:rPr lang="en-US" smtClean="0"/>
               <a:t>Click to edit Master title style</a:t>
             </a:r>
+            <a:endParaRPr lang="en-US"/>
           </a:p>
         </p:txBody>
       </p:sp>
@@ -3105,37 +2671,38 @@
           <a:p>
             <a:pPr lvl="0"/>
             <a:r>
-              <a:rPr lang="en-US"/>
+              <a:rPr lang="en-US" smtClean="0"/>
               <a:t>Click to edit Master text styles</a:t>
             </a:r>
           </a:p>
           <a:p>
             <a:pPr lvl="1"/>
             <a:r>
-              <a:rPr lang="en-US"/>
+              <a:rPr lang="en-US" smtClean="0"/>
               <a:t>Second level</a:t>
             </a:r>
           </a:p>
           <a:p>
             <a:pPr lvl="2"/>
             <a:r>
-              <a:rPr lang="en-US"/>
+              <a:rPr lang="en-US" smtClean="0"/>
               <a:t>Third level</a:t>
             </a:r>
           </a:p>
           <a:p>
             <a:pPr lvl="3"/>
             <a:r>
-              <a:rPr lang="en-US"/>
+              <a:rPr lang="en-US" smtClean="0"/>
               <a:t>Fourth level</a:t>
             </a:r>
           </a:p>
           <a:p>
             <a:pPr lvl="4"/>
             <a:r>
-              <a:rPr lang="en-US"/>
+              <a:rPr lang="en-US" smtClean="0"/>
               <a:t>Fifth level</a:t>
             </a:r>
+            <a:endParaRPr lang="en-US"/>
           </a:p>
         </p:txBody>
       </p:sp>
@@ -3174,7 +2741,7 @@
           <a:p>
             <a:fld id="{5BCAD085-E8A6-8845-BD4E-CB4CCA059FC4}" type="datetimeFigureOut">
               <a:rPr lang="en-US" smtClean="0"/>
-              <a:t>6/16/26</a:t>
+              <a:t>1/27/13</a:t>
             </a:fld>
             <a:endParaRPr lang="en-US"/>
           </a:p>
@@ -3533,7 +3100,7 @@
 </file>
 
 <file path=ppt/slides/slide1.xml><?xml version="1.0" encoding="utf-8"?>
-<p:sld xmlns:a="http://schemas.openxmlformats.org/drawingml/2006/main" xmlns:r="http://schemas.openxmlformats.org/officeDocument/2006/relationships" xmlns:p="http://schemas.openxmlformats.org/presentationml/2006/main">
+<p:sld xmlns:a="http://schemas.openxmlformats.org/drawingml/2006/main" xmlns:p="http://schemas.openxmlformats.org/presentationml/2006/main" xmlns:r="http://schemas.openxmlformats.org/officeDocument/2006/relationships">
   <p:cSld>
     <p:spTree>
       <p:nvGrpSpPr>
@@ -3541,14 +3108,7 @@
         <p:cNvGrpSpPr/>
         <p:nvPr/>
       </p:nvGrpSpPr>
-      <p:grpSpPr>
-        <a:xfrm>
-          <a:off x="0" y="0"/>
-          <a:ext cx="0" cy="0"/>
-          <a:chOff x="0" y="0"/>
-          <a:chExt cx="0" cy="0"/>
-        </a:xfrm>
-      </p:grpSpPr>
+      <p:grpSpPr/>
       <p:sp>
         <p:nvSpPr>
           <p:cNvPr id="2" name="Rectangle 1"/>
@@ -3588,8 +3148,7 @@
           <a:bodyPr rtlCol="0" anchor="ctr"/>
           <a:lstStyle/>
           <a:p>
-            <a:pPr marL="0" algn="ctr" defTabSz="457200" rtl="1" eaLnBrk="1" latinLnBrk="0" hangingPunct="1"/>
-            <a:endParaRPr/>
+            <a:pPr algn="ctr"/>
           </a:p>
         </p:txBody>
       </p:sp>
@@ -3633,7 +3192,6 @@
           <a:lstStyle/>
           <a:p>
             <a:pPr algn="ctr"/>
-            <a:endParaRPr/>
           </a:p>
         </p:txBody>
       </p:sp>
@@ -3654,7 +3212,7 @@
           <a:noFill/>
         </p:spPr>
         <p:txBody>
-          <a:bodyPr wrap="square" lIns="25400" tIns="25400" rIns="25400" bIns="25400" anchor="t">
+          <a:bodyPr wrap="square" anchor="t" lIns="25400" rIns="25400" tIns="25400" bIns="25400">
             <a:spAutoFit/>
           </a:bodyPr>
           <a:lstStyle/>
@@ -3665,7 +3223,7 @@
               </a:spcBef>
             </a:pPr>
             <a:r>
-              <a:rPr sz="1500" b="1" i="0" dirty="0">
+              <a:rPr sz="1500" b="1" i="0">
                 <a:solidFill>
                   <a:srgbClr val="1FA8C9"/>
                 </a:solidFill>
@@ -3693,7 +3251,7 @@
           <a:noFill/>
         </p:spPr>
         <p:txBody>
-          <a:bodyPr wrap="square" lIns="25400" tIns="25400" rIns="25400" bIns="25400" anchor="t">
+          <a:bodyPr wrap="square" anchor="t" lIns="25400" rIns="25400" tIns="25400" bIns="25400">
             <a:spAutoFit/>
           </a:bodyPr>
           <a:lstStyle/>
@@ -3732,7 +3290,7 @@
           <a:noFill/>
         </p:spPr>
         <p:txBody>
-          <a:bodyPr wrap="square" lIns="25400" tIns="25400" rIns="25400" bIns="25400" anchor="t">
+          <a:bodyPr wrap="square" anchor="t" lIns="25400" rIns="25400" tIns="25400" bIns="25400">
             <a:spAutoFit/>
           </a:bodyPr>
           <a:lstStyle/>
@@ -3782,7 +3340,7 @@
         <p:spPr>
           <a:xfrm>
             <a:off x="822960" y="4983480"/>
-            <a:ext cx="10058400" cy="582211"/>
+            <a:ext cx="10058400" cy="1005840"/>
           </a:xfrm>
           <a:prstGeom prst="rect">
             <a:avLst/>
@@ -3790,7 +3348,7 @@
           <a:noFill/>
         </p:spPr>
         <p:txBody>
-          <a:bodyPr wrap="square" lIns="25400" tIns="25400" rIns="25400" bIns="25400" anchor="t">
+          <a:bodyPr wrap="square" anchor="t" lIns="25400" rIns="25400" tIns="25400" bIns="25400">
             <a:spAutoFit/>
           </a:bodyPr>
           <a:lstStyle/>
@@ -3804,7 +3362,7 @@
               </a:spcAft>
             </a:pPr>
             <a:r>
-              <a:rPr sz="1800" b="1" i="0" dirty="0">
+              <a:rPr sz="1800" b="1" i="0">
                 <a:solidFill>
                   <a:srgbClr val="FFFFFF"/>
                 </a:solidFill>
@@ -3812,12 +3370,6 @@
               </a:rPr>
               <a:t>Tom Bitran</a:t>
             </a:r>
-            <a:endParaRPr lang="en-US" sz="1800" b="1" i="0" dirty="0">
-              <a:solidFill>
-                <a:srgbClr val="FFFFFF"/>
-              </a:solidFill>
-              <a:latin typeface="Calibri"/>
-            </a:endParaRPr>
           </a:p>
           <a:p>
             <a:pPr algn="l">
@@ -3825,12 +3377,15 @@
                 <a:spcPts val="0"/>
               </a:spcBef>
             </a:pPr>
-            <a:endParaRPr lang="en-US" sz="1400" b="0" i="0" dirty="0">
-              <a:solidFill>
-                <a:srgbClr val="A9C0CE"/>
-              </a:solidFill>
-              <a:latin typeface="Calibri"/>
-            </a:endParaRPr>
+            <a:r>
+              <a:rPr sz="1400" b="0" i="0">
+                <a:solidFill>
+                  <a:srgbClr val="A9C0CE"/>
+                </a:solidFill>
+                <a:latin typeface="Calibri"/>
+              </a:rPr>
+              <a:t>Mobile Development / SDK Class</a:t>
+            </a:r>
           </a:p>
         </p:txBody>
       </p:sp>
@@ -3874,7 +3429,6 @@
           <a:lstStyle/>
           <a:p>
             <a:pPr algn="ctr"/>
-            <a:endParaRPr/>
           </a:p>
         </p:txBody>
       </p:sp>
@@ -3918,7 +3472,6 @@
           <a:lstStyle/>
           <a:p>
             <a:pPr algn="ctr"/>
-            <a:endParaRPr/>
           </a:p>
         </p:txBody>
       </p:sp>
@@ -3962,7 +3515,6 @@
           <a:lstStyle/>
           <a:p>
             <a:pPr algn="ctr"/>
-            <a:endParaRPr/>
           </a:p>
         </p:txBody>
       </p:sp>
@@ -4006,7 +3558,6 @@
           <a:lstStyle/>
           <a:p>
             <a:pPr algn="ctr"/>
-            <a:endParaRPr/>
           </a:p>
         </p:txBody>
       </p:sp>
@@ -4019,7 +3570,7 @@
 </file>
 
 <file path=ppt/slides/slide10.xml><?xml version="1.0" encoding="utf-8"?>
-<p:sld xmlns:a="http://schemas.openxmlformats.org/drawingml/2006/main" xmlns:r="http://schemas.openxmlformats.org/officeDocument/2006/relationships" xmlns:p="http://schemas.openxmlformats.org/presentationml/2006/main">
+<p:sld xmlns:a="http://schemas.openxmlformats.org/drawingml/2006/main" xmlns:p="http://schemas.openxmlformats.org/presentationml/2006/main" xmlns:r="http://schemas.openxmlformats.org/officeDocument/2006/relationships">
   <p:cSld>
     <p:spTree>
       <p:nvGrpSpPr>
@@ -4027,14 +3578,7 @@
         <p:cNvGrpSpPr/>
         <p:nvPr/>
       </p:nvGrpSpPr>
-      <p:grpSpPr>
-        <a:xfrm>
-          <a:off x="0" y="0"/>
-          <a:ext cx="0" cy="0"/>
-          <a:chOff x="0" y="0"/>
-          <a:chExt cx="0" cy="0"/>
-        </a:xfrm>
-      </p:grpSpPr>
+      <p:grpSpPr/>
       <p:sp>
         <p:nvSpPr>
           <p:cNvPr id="2" name="Rectangle 1"/>
@@ -4075,7 +3619,6 @@
           <a:lstStyle/>
           <a:p>
             <a:pPr algn="ctr"/>
-            <a:endParaRPr/>
           </a:p>
         </p:txBody>
       </p:sp>
@@ -4096,7 +3639,7 @@
           <a:noFill/>
         </p:spPr>
         <p:txBody>
-          <a:bodyPr wrap="square" lIns="25400" tIns="25400" rIns="25400" bIns="25400" anchor="t">
+          <a:bodyPr wrap="square" anchor="t" lIns="25400" rIns="25400" tIns="25400" bIns="25400">
             <a:spAutoFit/>
           </a:bodyPr>
           <a:lstStyle/>
@@ -4135,7 +3678,7 @@
           <a:noFill/>
         </p:spPr>
         <p:txBody>
-          <a:bodyPr wrap="square" lIns="25400" tIns="25400" rIns="25400" bIns="25400" anchor="t">
+          <a:bodyPr wrap="square" anchor="t" lIns="25400" rIns="25400" tIns="25400" bIns="25400">
             <a:spAutoFit/>
           </a:bodyPr>
           <a:lstStyle/>
@@ -4197,7 +3740,6 @@
           <a:lstStyle/>
           <a:p>
             <a:pPr algn="ctr"/>
-            <a:endParaRPr/>
           </a:p>
         </p:txBody>
       </p:sp>
@@ -4218,7 +3760,7 @@
           <a:noFill/>
         </p:spPr>
         <p:txBody>
-          <a:bodyPr wrap="square" lIns="25400" tIns="25400" rIns="25400" bIns="25400" anchor="t">
+          <a:bodyPr wrap="square" anchor="t" lIns="25400" rIns="25400" tIns="25400" bIns="25400">
             <a:spAutoFit/>
           </a:bodyPr>
           <a:lstStyle/>
@@ -4280,11 +3822,10 @@
           </a:fontRef>
         </p:style>
         <p:txBody>
-          <a:bodyPr wrap="square" rtlCol="0" anchor="ctr"/>
+          <a:bodyPr rtlCol="0" anchor="ctr" wrap="square"/>
           <a:lstStyle/>
           <a:p>
             <a:pPr algn="ctr"/>
-            <a:endParaRPr/>
           </a:p>
         </p:txBody>
       </p:sp>
@@ -4305,7 +3846,7 @@
           <a:noFill/>
         </p:spPr>
         <p:txBody>
-          <a:bodyPr wrap="square" lIns="25400" tIns="25400" rIns="25400" bIns="25400" anchor="t">
+          <a:bodyPr wrap="square" anchor="t" lIns="25400" rIns="25400" tIns="25400" bIns="25400">
             <a:spAutoFit/>
           </a:bodyPr>
           <a:lstStyle/>
@@ -4363,7 +3904,7 @@
           <a:noFill/>
         </p:spPr>
         <p:txBody>
-          <a:bodyPr wrap="square" lIns="25400" tIns="25400" rIns="25400" bIns="25400" anchor="t">
+          <a:bodyPr wrap="square" anchor="t" lIns="25400" rIns="25400" tIns="25400" bIns="25400">
             <a:spAutoFit/>
           </a:bodyPr>
           <a:lstStyle/>
@@ -4387,7 +3928,7 @@
             </a:r>
           </a:p>
           <a:p>
-            <a:pPr lvl="1" algn="l">
+            <a:pPr algn="l" lvl="1">
               <a:spcBef>
                 <a:spcPts val="0"/>
               </a:spcBef>
@@ -4425,7 +3966,7 @@
             </a:r>
           </a:p>
           <a:p>
-            <a:pPr lvl="1" algn="l">
+            <a:pPr algn="l" lvl="1">
               <a:spcBef>
                 <a:spcPts val="0"/>
               </a:spcBef>
@@ -4463,7 +4004,7 @@
             </a:r>
           </a:p>
           <a:p>
-            <a:pPr lvl="1" algn="l">
+            <a:pPr algn="l" lvl="1">
               <a:spcBef>
                 <a:spcPts val="0"/>
               </a:spcBef>
@@ -4501,7 +4042,7 @@
             </a:r>
           </a:p>
           <a:p>
-            <a:pPr lvl="1" algn="l">
+            <a:pPr algn="l" lvl="1">
               <a:spcBef>
                 <a:spcPts val="0"/>
               </a:spcBef>
@@ -4558,11 +4099,10 @@
           </a:fontRef>
         </p:style>
         <p:txBody>
-          <a:bodyPr wrap="square" rtlCol="0" anchor="ctr"/>
+          <a:bodyPr rtlCol="0" anchor="ctr" wrap="square"/>
           <a:lstStyle/>
           <a:p>
             <a:pPr algn="ctr"/>
-            <a:endParaRPr/>
           </a:p>
         </p:txBody>
       </p:sp>
@@ -4583,7 +4123,7 @@
           <a:noFill/>
         </p:spPr>
         <p:txBody>
-          <a:bodyPr wrap="square" lIns="25400" tIns="25400" rIns="25400" bIns="25400" anchor="t">
+          <a:bodyPr wrap="square" anchor="t" lIns="25400" rIns="25400" tIns="25400" bIns="25400">
             <a:spAutoFit/>
           </a:bodyPr>
           <a:lstStyle/>
@@ -4641,7 +4181,7 @@
           <a:noFill/>
         </p:spPr>
         <p:txBody>
-          <a:bodyPr wrap="square" lIns="25400" tIns="25400" rIns="25400" bIns="25400" anchor="t">
+          <a:bodyPr wrap="square" anchor="t" lIns="25400" rIns="25400" tIns="25400" bIns="25400">
             <a:spAutoFit/>
           </a:bodyPr>
           <a:lstStyle/>
@@ -4665,7 +4205,7 @@
             </a:r>
           </a:p>
           <a:p>
-            <a:pPr lvl="1" algn="l">
+            <a:pPr algn="l" lvl="1">
               <a:spcBef>
                 <a:spcPts val="0"/>
               </a:spcBef>
@@ -4703,7 +4243,7 @@
             </a:r>
           </a:p>
           <a:p>
-            <a:pPr lvl="1" algn="l">
+            <a:pPr algn="l" lvl="1">
               <a:spcBef>
                 <a:spcPts val="0"/>
               </a:spcBef>
@@ -4741,7 +4281,7 @@
             </a:r>
           </a:p>
           <a:p>
-            <a:pPr lvl="1" algn="l">
+            <a:pPr algn="l" lvl="1">
               <a:spcBef>
                 <a:spcPts val="0"/>
               </a:spcBef>
@@ -4779,7 +4319,7 @@
             </a:r>
           </a:p>
           <a:p>
-            <a:pPr lvl="1" algn="l">
+            <a:pPr algn="l" lvl="1">
               <a:spcBef>
                 <a:spcPts val="0"/>
               </a:spcBef>
@@ -4813,7 +4353,7 @@
           <a:noFill/>
         </p:spPr>
         <p:txBody>
-          <a:bodyPr wrap="square" lIns="25400" tIns="25400" rIns="25400" bIns="25400" anchor="t">
+          <a:bodyPr wrap="square" anchor="t" lIns="25400" rIns="25400" tIns="25400" bIns="25400">
             <a:spAutoFit/>
           </a:bodyPr>
           <a:lstStyle/>
@@ -4844,7 +4384,7 @@
 </file>
 
 <file path=ppt/slides/slide11.xml><?xml version="1.0" encoding="utf-8"?>
-<p:sld xmlns:a="http://schemas.openxmlformats.org/drawingml/2006/main" xmlns:r="http://schemas.openxmlformats.org/officeDocument/2006/relationships" xmlns:p="http://schemas.openxmlformats.org/presentationml/2006/main">
+<p:sld xmlns:a="http://schemas.openxmlformats.org/drawingml/2006/main" xmlns:p="http://schemas.openxmlformats.org/presentationml/2006/main" xmlns:r="http://schemas.openxmlformats.org/officeDocument/2006/relationships">
   <p:cSld>
     <p:spTree>
       <p:nvGrpSpPr>
@@ -4852,14 +4392,7 @@
         <p:cNvGrpSpPr/>
         <p:nvPr/>
       </p:nvGrpSpPr>
-      <p:grpSpPr>
-        <a:xfrm>
-          <a:off x="0" y="0"/>
-          <a:ext cx="0" cy="0"/>
-          <a:chOff x="0" y="0"/>
-          <a:chExt cx="0" cy="0"/>
-        </a:xfrm>
-      </p:grpSpPr>
+      <p:grpSpPr/>
       <p:sp>
         <p:nvSpPr>
           <p:cNvPr id="2" name="Rectangle 1"/>
@@ -4900,7 +4433,6 @@
           <a:lstStyle/>
           <a:p>
             <a:pPr algn="ctr"/>
-            <a:endParaRPr/>
           </a:p>
         </p:txBody>
       </p:sp>
@@ -4921,7 +4453,7 @@
           <a:noFill/>
         </p:spPr>
         <p:txBody>
-          <a:bodyPr wrap="square" lIns="25400" tIns="25400" rIns="25400" bIns="25400" anchor="t">
+          <a:bodyPr wrap="square" anchor="t" lIns="25400" rIns="25400" tIns="25400" bIns="25400">
             <a:spAutoFit/>
           </a:bodyPr>
           <a:lstStyle/>
@@ -4960,7 +4492,7 @@
           <a:noFill/>
         </p:spPr>
         <p:txBody>
-          <a:bodyPr wrap="square" lIns="25400" tIns="25400" rIns="25400" bIns="25400" anchor="t">
+          <a:bodyPr wrap="square" anchor="t" lIns="25400" rIns="25400" tIns="25400" bIns="25400">
             <a:spAutoFit/>
           </a:bodyPr>
           <a:lstStyle/>
@@ -5022,7 +4554,6 @@
           <a:lstStyle/>
           <a:p>
             <a:pPr algn="ctr"/>
-            <a:endParaRPr/>
           </a:p>
         </p:txBody>
       </p:sp>
@@ -5043,7 +4574,7 @@
           <a:noFill/>
         </p:spPr>
         <p:txBody>
-          <a:bodyPr wrap="square" lIns="25400" tIns="25400" rIns="25400" bIns="25400" anchor="t">
+          <a:bodyPr wrap="square" anchor="t" lIns="25400" rIns="25400" tIns="25400" bIns="25400">
             <a:spAutoFit/>
           </a:bodyPr>
           <a:lstStyle/>
@@ -5084,36 +4615,18 @@
                 <a:tableStyleId>{5C22544A-7EE6-4342-B048-85BDC9FD1C3A}</a:tableStyleId>
               </a:tblPr>
               <a:tblGrid>
-                <a:gridCol w="1685925">
-                  <a:extLst>
-                    <a:ext uri="{9D8B030D-6E8A-4147-A177-3AD203B41FA5}">
-                      <a16:colId xmlns:a16="http://schemas.microsoft.com/office/drawing/2014/main" val="20000"/>
-                    </a:ext>
-                  </a:extLst>
-                </a:gridCol>
-                <a:gridCol w="1685925">
-                  <a:extLst>
-                    <a:ext uri="{9D8B030D-6E8A-4147-A177-3AD203B41FA5}">
-                      <a16:colId xmlns:a16="http://schemas.microsoft.com/office/drawing/2014/main" val="20001"/>
-                    </a:ext>
-                  </a:extLst>
-                </a:gridCol>
-                <a:gridCol w="2023110">
-                  <a:extLst>
-                    <a:ext uri="{9D8B030D-6E8A-4147-A177-3AD203B41FA5}">
-                      <a16:colId xmlns:a16="http://schemas.microsoft.com/office/drawing/2014/main" val="20002"/>
-                    </a:ext>
-                  </a:extLst>
-                </a:gridCol>
+                <a:gridCol w="1685925"/>
+                <a:gridCol w="1685925"/>
+                <a:gridCol w="2023110"/>
               </a:tblGrid>
               <a:tr h="338328">
                 <a:tc>
                   <a:txBody>
-                    <a:bodyPr/>
+                    <a:bodyPr wrap="square"/>
                     <a:lstStyle/>
                     <a:p>
                       <a:r>
-                        <a:rPr sz="1150" b="1">
+                        <a:rPr b="1" sz="1150">
                           <a:solidFill>
                             <a:srgbClr val="FFFFFF"/>
                           </a:solidFill>
@@ -5123,7 +4636,7 @@
                       </a:r>
                     </a:p>
                   </a:txBody>
-                  <a:tcPr marL="88900" marR="63500" marT="38100" marB="38100" anchor="ctr">
+                  <a:tcPr anchor="ctr" marL="88900" marR="63500" marT="38100" marB="38100">
                     <a:solidFill>
                       <a:srgbClr val="0F2A43"/>
                     </a:solidFill>
@@ -5131,11 +4644,11 @@
                 </a:tc>
                 <a:tc>
                   <a:txBody>
-                    <a:bodyPr/>
+                    <a:bodyPr wrap="square"/>
                     <a:lstStyle/>
                     <a:p>
                       <a:r>
-                        <a:rPr sz="1150" b="1">
+                        <a:rPr b="1" sz="1150">
                           <a:solidFill>
                             <a:srgbClr val="FFFFFF"/>
                           </a:solidFill>
@@ -5145,7 +4658,7 @@
                       </a:r>
                     </a:p>
                   </a:txBody>
-                  <a:tcPr marL="88900" marR="63500" marT="38100" marB="38100" anchor="ctr">
+                  <a:tcPr anchor="ctr" marL="88900" marR="63500" marT="38100" marB="38100">
                     <a:solidFill>
                       <a:srgbClr val="0F2A43"/>
                     </a:solidFill>
@@ -5153,11 +4666,11 @@
                 </a:tc>
                 <a:tc>
                   <a:txBody>
-                    <a:bodyPr/>
+                    <a:bodyPr wrap="square"/>
                     <a:lstStyle/>
                     <a:p>
                       <a:r>
-                        <a:rPr sz="1150" b="1">
+                        <a:rPr b="1" sz="1150">
                           <a:solidFill>
                             <a:srgbClr val="FFFFFF"/>
                           </a:solidFill>
@@ -5167,22 +4680,17 @@
                       </a:r>
                     </a:p>
                   </a:txBody>
-                  <a:tcPr marL="88900" marR="63500" marT="38100" marB="38100" anchor="ctr">
+                  <a:tcPr anchor="ctr" marL="88900" marR="63500" marT="38100" marB="38100">
                     <a:solidFill>
                       <a:srgbClr val="0F2A43"/>
                     </a:solidFill>
                   </a:tcPr>
                 </a:tc>
-                <a:extLst>
-                  <a:ext uri="{0D108BD9-81ED-4DB2-BD59-A6C34878D82A}">
-                    <a16:rowId xmlns:a16="http://schemas.microsoft.com/office/drawing/2014/main" val="10000"/>
-                  </a:ext>
-                </a:extLst>
               </a:tr>
               <a:tr h="338328">
                 <a:tc>
                   <a:txBody>
-                    <a:bodyPr/>
+                    <a:bodyPr wrap="square"/>
                     <a:lstStyle/>
                     <a:p>
                       <a:r>
@@ -5196,7 +4704,7 @@
                       </a:r>
                     </a:p>
                   </a:txBody>
-                  <a:tcPr marL="88900" marR="63500" marT="25400" marB="25400" anchor="ctr">
+                  <a:tcPr anchor="ctr" marL="88900" marR="63500" marT="25400" marB="25400">
                     <a:solidFill>
                       <a:srgbClr val="F4F7F9"/>
                     </a:solidFill>
@@ -5204,7 +4712,7 @@
                 </a:tc>
                 <a:tc>
                   <a:txBody>
-                    <a:bodyPr/>
+                    <a:bodyPr wrap="square"/>
                     <a:lstStyle/>
                     <a:p>
                       <a:r>
@@ -5218,7 +4726,7 @@
                       </a:r>
                     </a:p>
                   </a:txBody>
-                  <a:tcPr marL="88900" marR="63500" marT="25400" marB="25400" anchor="ctr">
+                  <a:tcPr anchor="ctr" marL="88900" marR="63500" marT="25400" marB="25400">
                     <a:solidFill>
                       <a:srgbClr val="F4F7F9"/>
                     </a:solidFill>
@@ -5226,7 +4734,7 @@
                 </a:tc>
                 <a:tc>
                   <a:txBody>
-                    <a:bodyPr/>
+                    <a:bodyPr wrap="square"/>
                     <a:lstStyle/>
                     <a:p>
                       <a:r>
@@ -5240,22 +4748,17 @@
                       </a:r>
                     </a:p>
                   </a:txBody>
-                  <a:tcPr marL="88900" marR="63500" marT="25400" marB="25400" anchor="ctr">
+                  <a:tcPr anchor="ctr" marL="88900" marR="63500" marT="25400" marB="25400">
                     <a:solidFill>
                       <a:srgbClr val="F4F7F9"/>
                     </a:solidFill>
                   </a:tcPr>
                 </a:tc>
-                <a:extLst>
-                  <a:ext uri="{0D108BD9-81ED-4DB2-BD59-A6C34878D82A}">
-                    <a16:rowId xmlns:a16="http://schemas.microsoft.com/office/drawing/2014/main" val="10001"/>
-                  </a:ext>
-                </a:extLst>
               </a:tr>
               <a:tr h="338328">
                 <a:tc>
                   <a:txBody>
-                    <a:bodyPr/>
+                    <a:bodyPr wrap="square"/>
                     <a:lstStyle/>
                     <a:p>
                       <a:r>
@@ -5269,7 +4772,7 @@
                       </a:r>
                     </a:p>
                   </a:txBody>
-                  <a:tcPr marL="88900" marR="63500" marT="25400" marB="25400" anchor="ctr">
+                  <a:tcPr anchor="ctr" marL="88900" marR="63500" marT="25400" marB="25400">
                     <a:solidFill>
                       <a:srgbClr val="FFFFFF"/>
                     </a:solidFill>
@@ -5277,7 +4780,7 @@
                 </a:tc>
                 <a:tc>
                   <a:txBody>
-                    <a:bodyPr/>
+                    <a:bodyPr wrap="square"/>
                     <a:lstStyle/>
                     <a:p>
                       <a:r>
@@ -5291,7 +4794,7 @@
                       </a:r>
                     </a:p>
                   </a:txBody>
-                  <a:tcPr marL="88900" marR="63500" marT="25400" marB="25400" anchor="ctr">
+                  <a:tcPr anchor="ctr" marL="88900" marR="63500" marT="25400" marB="25400">
                     <a:solidFill>
                       <a:srgbClr val="FFFFFF"/>
                     </a:solidFill>
@@ -5299,7 +4802,7 @@
                 </a:tc>
                 <a:tc>
                   <a:txBody>
-                    <a:bodyPr/>
+                    <a:bodyPr wrap="square"/>
                     <a:lstStyle/>
                     <a:p>
                       <a:r>
@@ -5313,22 +4816,17 @@
                       </a:r>
                     </a:p>
                   </a:txBody>
-                  <a:tcPr marL="88900" marR="63500" marT="25400" marB="25400" anchor="ctr">
+                  <a:tcPr anchor="ctr" marL="88900" marR="63500" marT="25400" marB="25400">
                     <a:solidFill>
                       <a:srgbClr val="FFFFFF"/>
                     </a:solidFill>
                   </a:tcPr>
                 </a:tc>
-                <a:extLst>
-                  <a:ext uri="{0D108BD9-81ED-4DB2-BD59-A6C34878D82A}">
-                    <a16:rowId xmlns:a16="http://schemas.microsoft.com/office/drawing/2014/main" val="10002"/>
-                  </a:ext>
-                </a:extLst>
               </a:tr>
               <a:tr h="338328">
                 <a:tc>
                   <a:txBody>
-                    <a:bodyPr/>
+                    <a:bodyPr wrap="square"/>
                     <a:lstStyle/>
                     <a:p>
                       <a:r>
@@ -5342,7 +4840,7 @@
                       </a:r>
                     </a:p>
                   </a:txBody>
-                  <a:tcPr marL="88900" marR="63500" marT="25400" marB="25400" anchor="ctr">
+                  <a:tcPr anchor="ctr" marL="88900" marR="63500" marT="25400" marB="25400">
                     <a:solidFill>
                       <a:srgbClr val="F4F7F9"/>
                     </a:solidFill>
@@ -5350,7 +4848,7 @@
                 </a:tc>
                 <a:tc>
                   <a:txBody>
-                    <a:bodyPr/>
+                    <a:bodyPr wrap="square"/>
                     <a:lstStyle/>
                     <a:p>
                       <a:r>
@@ -5364,7 +4862,7 @@
                       </a:r>
                     </a:p>
                   </a:txBody>
-                  <a:tcPr marL="88900" marR="63500" marT="25400" marB="25400" anchor="ctr">
+                  <a:tcPr anchor="ctr" marL="88900" marR="63500" marT="25400" marB="25400">
                     <a:solidFill>
                       <a:srgbClr val="F4F7F9"/>
                     </a:solidFill>
@@ -5372,7 +4870,7 @@
                 </a:tc>
                 <a:tc>
                   <a:txBody>
-                    <a:bodyPr/>
+                    <a:bodyPr wrap="square"/>
                     <a:lstStyle/>
                     <a:p>
                       <a:r>
@@ -5386,22 +4884,17 @@
                       </a:r>
                     </a:p>
                   </a:txBody>
-                  <a:tcPr marL="88900" marR="63500" marT="25400" marB="25400" anchor="ctr">
+                  <a:tcPr anchor="ctr" marL="88900" marR="63500" marT="25400" marB="25400">
                     <a:solidFill>
                       <a:srgbClr val="F4F7F9"/>
                     </a:solidFill>
                   </a:tcPr>
                 </a:tc>
-                <a:extLst>
-                  <a:ext uri="{0D108BD9-81ED-4DB2-BD59-A6C34878D82A}">
-                    <a16:rowId xmlns:a16="http://schemas.microsoft.com/office/drawing/2014/main" val="10003"/>
-                  </a:ext>
-                </a:extLst>
               </a:tr>
               <a:tr h="338328">
                 <a:tc>
                   <a:txBody>
-                    <a:bodyPr/>
+                    <a:bodyPr wrap="square"/>
                     <a:lstStyle/>
                     <a:p>
                       <a:r>
@@ -5415,7 +4908,7 @@
                       </a:r>
                     </a:p>
                   </a:txBody>
-                  <a:tcPr marL="88900" marR="63500" marT="25400" marB="25400" anchor="ctr">
+                  <a:tcPr anchor="ctr" marL="88900" marR="63500" marT="25400" marB="25400">
                     <a:solidFill>
                       <a:srgbClr val="FFFFFF"/>
                     </a:solidFill>
@@ -5423,7 +4916,7 @@
                 </a:tc>
                 <a:tc>
                   <a:txBody>
-                    <a:bodyPr/>
+                    <a:bodyPr wrap="square"/>
                     <a:lstStyle/>
                     <a:p>
                       <a:r>
@@ -5437,7 +4930,7 @@
                       </a:r>
                     </a:p>
                   </a:txBody>
-                  <a:tcPr marL="88900" marR="63500" marT="25400" marB="25400" anchor="ctr">
+                  <a:tcPr anchor="ctr" marL="88900" marR="63500" marT="25400" marB="25400">
                     <a:solidFill>
                       <a:srgbClr val="FFFFFF"/>
                     </a:solidFill>
@@ -5445,23 +4938,26 @@
                 </a:tc>
                 <a:tc>
                   <a:txBody>
-                    <a:bodyPr/>
+                    <a:bodyPr wrap="square"/>
                     <a:lstStyle/>
                     <a:p>
-                      <a:endParaRPr/>
+                      <a:r>
+                        <a:rPr sz="1100">
+                          <a:solidFill>
+                            <a:srgbClr val="1A2B3C"/>
+                          </a:solidFill>
+                          <a:latin typeface="Calibri"/>
+                        </a:rPr>
+                        <a:t/>
+                      </a:r>
                     </a:p>
                   </a:txBody>
-                  <a:tcPr marL="88900" marR="63500" marT="25400" marB="25400" anchor="ctr">
+                  <a:tcPr anchor="ctr" marL="88900" marR="63500" marT="25400" marB="25400">
                     <a:solidFill>
                       <a:srgbClr val="FFFFFF"/>
                     </a:solidFill>
                   </a:tcPr>
                 </a:tc>
-                <a:extLst>
-                  <a:ext uri="{0D108BD9-81ED-4DB2-BD59-A6C34878D82A}">
-                    <a16:rowId xmlns:a16="http://schemas.microsoft.com/office/drawing/2014/main" val="10004"/>
-                  </a:ext>
-                </a:extLst>
               </a:tr>
             </a:tbl>
           </a:graphicData>
@@ -5484,7 +4980,7 @@
           <a:noFill/>
         </p:spPr>
         <p:txBody>
-          <a:bodyPr wrap="square" lIns="25400" tIns="25400" rIns="25400" bIns="25400" anchor="t">
+          <a:bodyPr wrap="square" anchor="t" lIns="25400" rIns="25400" tIns="25400" bIns="25400">
             <a:spAutoFit/>
           </a:bodyPr>
           <a:lstStyle/>
@@ -5516,7 +5012,7 @@
         </p:nvGraphicFramePr>
         <p:xfrm>
           <a:off x="640080" y="4005072"/>
-          <a:ext cx="5394960" cy="1250950"/>
+          <a:ext cx="5394960" cy="1234440"/>
         </p:xfrm>
         <a:graphic>
           <a:graphicData uri="http://schemas.openxmlformats.org/drawingml/2006/table">
@@ -5525,36 +5021,18 @@
                 <a:tableStyleId>{5C22544A-7EE6-4342-B048-85BDC9FD1C3A}</a:tableStyleId>
               </a:tblPr>
               <a:tblGrid>
-                <a:gridCol w="1685925">
-                  <a:extLst>
-                    <a:ext uri="{9D8B030D-6E8A-4147-A177-3AD203B41FA5}">
-                      <a16:colId xmlns:a16="http://schemas.microsoft.com/office/drawing/2014/main" val="20000"/>
-                    </a:ext>
-                  </a:extLst>
-                </a:gridCol>
-                <a:gridCol w="1685925">
-                  <a:extLst>
-                    <a:ext uri="{9D8B030D-6E8A-4147-A177-3AD203B41FA5}">
-                      <a16:colId xmlns:a16="http://schemas.microsoft.com/office/drawing/2014/main" val="20001"/>
-                    </a:ext>
-                  </a:extLst>
-                </a:gridCol>
-                <a:gridCol w="2023110">
-                  <a:extLst>
-                    <a:ext uri="{9D8B030D-6E8A-4147-A177-3AD203B41FA5}">
-                      <a16:colId xmlns:a16="http://schemas.microsoft.com/office/drawing/2014/main" val="20002"/>
-                    </a:ext>
-                  </a:extLst>
-                </a:gridCol>
+                <a:gridCol w="1685925"/>
+                <a:gridCol w="1685925"/>
+                <a:gridCol w="2023110"/>
               </a:tblGrid>
               <a:tr h="308610">
                 <a:tc>
                   <a:txBody>
-                    <a:bodyPr/>
+                    <a:bodyPr wrap="square"/>
                     <a:lstStyle/>
                     <a:p>
                       <a:r>
-                        <a:rPr sz="1150" b="1">
+                        <a:rPr b="1" sz="1150">
                           <a:solidFill>
                             <a:srgbClr val="FFFFFF"/>
                           </a:solidFill>
@@ -5564,7 +5042,7 @@
                       </a:r>
                     </a:p>
                   </a:txBody>
-                  <a:tcPr marL="88900" marR="63500" marT="38100" marB="38100" anchor="ctr">
+                  <a:tcPr anchor="ctr" marL="88900" marR="63500" marT="38100" marB="38100">
                     <a:solidFill>
                       <a:srgbClr val="0F2A43"/>
                     </a:solidFill>
@@ -5572,11 +5050,11 @@
                 </a:tc>
                 <a:tc>
                   <a:txBody>
-                    <a:bodyPr/>
+                    <a:bodyPr wrap="square"/>
                     <a:lstStyle/>
                     <a:p>
                       <a:r>
-                        <a:rPr sz="1150" b="1">
+                        <a:rPr b="1" sz="1150">
                           <a:solidFill>
                             <a:srgbClr val="FFFFFF"/>
                           </a:solidFill>
@@ -5586,7 +5064,7 @@
                       </a:r>
                     </a:p>
                   </a:txBody>
-                  <a:tcPr marL="88900" marR="63500" marT="38100" marB="38100" anchor="ctr">
+                  <a:tcPr anchor="ctr" marL="88900" marR="63500" marT="38100" marB="38100">
                     <a:solidFill>
                       <a:srgbClr val="0F2A43"/>
                     </a:solidFill>
@@ -5594,11 +5072,11 @@
                 </a:tc>
                 <a:tc>
                   <a:txBody>
-                    <a:bodyPr/>
+                    <a:bodyPr wrap="square"/>
                     <a:lstStyle/>
                     <a:p>
                       <a:r>
-                        <a:rPr sz="1150" b="1">
+                        <a:rPr b="1" sz="1150">
                           <a:solidFill>
                             <a:srgbClr val="FFFFFF"/>
                           </a:solidFill>
@@ -5608,22 +5086,17 @@
                       </a:r>
                     </a:p>
                   </a:txBody>
-                  <a:tcPr marL="88900" marR="63500" marT="38100" marB="38100" anchor="ctr">
+                  <a:tcPr anchor="ctr" marL="88900" marR="63500" marT="38100" marB="38100">
                     <a:solidFill>
                       <a:srgbClr val="0F2A43"/>
                     </a:solidFill>
                   </a:tcPr>
                 </a:tc>
-                <a:extLst>
-                  <a:ext uri="{0D108BD9-81ED-4DB2-BD59-A6C34878D82A}">
-                    <a16:rowId xmlns:a16="http://schemas.microsoft.com/office/drawing/2014/main" val="10000"/>
-                  </a:ext>
-                </a:extLst>
               </a:tr>
               <a:tr h="308610">
                 <a:tc>
                   <a:txBody>
-                    <a:bodyPr/>
+                    <a:bodyPr wrap="square"/>
                     <a:lstStyle/>
                     <a:p>
                       <a:r>
@@ -5637,7 +5110,7 @@
                       </a:r>
                     </a:p>
                   </a:txBody>
-                  <a:tcPr marL="88900" marR="63500" marT="25400" marB="25400" anchor="ctr">
+                  <a:tcPr anchor="ctr" marL="88900" marR="63500" marT="25400" marB="25400">
                     <a:solidFill>
                       <a:srgbClr val="F4F7F9"/>
                     </a:solidFill>
@@ -5645,7 +5118,7 @@
                 </a:tc>
                 <a:tc>
                   <a:txBody>
-                    <a:bodyPr/>
+                    <a:bodyPr wrap="square"/>
                     <a:lstStyle/>
                     <a:p>
                       <a:r>
@@ -5659,7 +5132,7 @@
                       </a:r>
                     </a:p>
                   </a:txBody>
-                  <a:tcPr marL="88900" marR="63500" marT="25400" marB="25400" anchor="ctr">
+                  <a:tcPr anchor="ctr" marL="88900" marR="63500" marT="25400" marB="25400">
                     <a:solidFill>
                       <a:srgbClr val="F4F7F9"/>
                     </a:solidFill>
@@ -5667,7 +5140,7 @@
                 </a:tc>
                 <a:tc>
                   <a:txBody>
-                    <a:bodyPr/>
+                    <a:bodyPr wrap="square"/>
                     <a:lstStyle/>
                     <a:p>
                       <a:r>
@@ -5681,22 +5154,17 @@
                       </a:r>
                     </a:p>
                   </a:txBody>
-                  <a:tcPr marL="88900" marR="63500" marT="25400" marB="25400" anchor="ctr">
+                  <a:tcPr anchor="ctr" marL="88900" marR="63500" marT="25400" marB="25400">
                     <a:solidFill>
                       <a:srgbClr val="F4F7F9"/>
                     </a:solidFill>
                   </a:tcPr>
                 </a:tc>
-                <a:extLst>
-                  <a:ext uri="{0D108BD9-81ED-4DB2-BD59-A6C34878D82A}">
-                    <a16:rowId xmlns:a16="http://schemas.microsoft.com/office/drawing/2014/main" val="10001"/>
-                  </a:ext>
-                </a:extLst>
               </a:tr>
               <a:tr h="308610">
                 <a:tc>
                   <a:txBody>
-                    <a:bodyPr/>
+                    <a:bodyPr wrap="square"/>
                     <a:lstStyle/>
                     <a:p>
                       <a:r>
@@ -5710,7 +5178,7 @@
                       </a:r>
                     </a:p>
                   </a:txBody>
-                  <a:tcPr marL="88900" marR="63500" marT="25400" marB="25400" anchor="ctr">
+                  <a:tcPr anchor="ctr" marL="88900" marR="63500" marT="25400" marB="25400">
                     <a:solidFill>
                       <a:srgbClr val="FFFFFF"/>
                     </a:solidFill>
@@ -5718,7 +5186,7 @@
                 </a:tc>
                 <a:tc>
                   <a:txBody>
-                    <a:bodyPr/>
+                    <a:bodyPr wrap="square"/>
                     <a:lstStyle/>
                     <a:p>
                       <a:r>
@@ -5732,7 +5200,7 @@
                       </a:r>
                     </a:p>
                   </a:txBody>
-                  <a:tcPr marL="88900" marR="63500" marT="25400" marB="25400" anchor="ctr">
+                  <a:tcPr anchor="ctr" marL="88900" marR="63500" marT="25400" marB="25400">
                     <a:solidFill>
                       <a:srgbClr val="FFFFFF"/>
                     </a:solidFill>
@@ -5740,7 +5208,7 @@
                 </a:tc>
                 <a:tc>
                   <a:txBody>
-                    <a:bodyPr/>
+                    <a:bodyPr wrap="square"/>
                     <a:lstStyle/>
                     <a:p>
                       <a:r>
@@ -5754,22 +5222,17 @@
                       </a:r>
                     </a:p>
                   </a:txBody>
-                  <a:tcPr marL="88900" marR="63500" marT="25400" marB="25400" anchor="ctr">
+                  <a:tcPr anchor="ctr" marL="88900" marR="63500" marT="25400" marB="25400">
                     <a:solidFill>
                       <a:srgbClr val="FFFFFF"/>
                     </a:solidFill>
                   </a:tcPr>
                 </a:tc>
-                <a:extLst>
-                  <a:ext uri="{0D108BD9-81ED-4DB2-BD59-A6C34878D82A}">
-                    <a16:rowId xmlns:a16="http://schemas.microsoft.com/office/drawing/2014/main" val="10002"/>
-                  </a:ext>
-                </a:extLst>
               </a:tr>
               <a:tr h="308610">
                 <a:tc>
                   <a:txBody>
-                    <a:bodyPr/>
+                    <a:bodyPr wrap="square"/>
                     <a:lstStyle/>
                     <a:p>
                       <a:r>
@@ -5783,7 +5246,7 @@
                       </a:r>
                     </a:p>
                   </a:txBody>
-                  <a:tcPr marL="88900" marR="63500" marT="25400" marB="25400" anchor="ctr">
+                  <a:tcPr anchor="ctr" marL="88900" marR="63500" marT="25400" marB="25400">
                     <a:solidFill>
                       <a:srgbClr val="F4F7F9"/>
                     </a:solidFill>
@@ -5791,7 +5254,7 @@
                 </a:tc>
                 <a:tc>
                   <a:txBody>
-                    <a:bodyPr/>
+                    <a:bodyPr wrap="square"/>
                     <a:lstStyle/>
                     <a:p>
                       <a:r>
@@ -5805,7 +5268,7 @@
                       </a:r>
                     </a:p>
                   </a:txBody>
-                  <a:tcPr marL="88900" marR="63500" marT="25400" marB="25400" anchor="ctr">
+                  <a:tcPr anchor="ctr" marL="88900" marR="63500" marT="25400" marB="25400">
                     <a:solidFill>
                       <a:srgbClr val="F4F7F9"/>
                     </a:solidFill>
@@ -5813,23 +5276,26 @@
                 </a:tc>
                 <a:tc>
                   <a:txBody>
-                    <a:bodyPr/>
+                    <a:bodyPr wrap="square"/>
                     <a:lstStyle/>
                     <a:p>
-                      <a:endParaRPr/>
+                      <a:r>
+                        <a:rPr sz="1100">
+                          <a:solidFill>
+                            <a:srgbClr val="1A2B3C"/>
+                          </a:solidFill>
+                          <a:latin typeface="Calibri"/>
+                        </a:rPr>
+                        <a:t/>
+                      </a:r>
                     </a:p>
                   </a:txBody>
-                  <a:tcPr marL="88900" marR="63500" marT="25400" marB="25400" anchor="ctr">
+                  <a:tcPr anchor="ctr" marL="88900" marR="63500" marT="25400" marB="25400">
                     <a:solidFill>
                       <a:srgbClr val="F4F7F9"/>
                     </a:solidFill>
                   </a:tcPr>
                 </a:tc>
-                <a:extLst>
-                  <a:ext uri="{0D108BD9-81ED-4DB2-BD59-A6C34878D82A}">
-                    <a16:rowId xmlns:a16="http://schemas.microsoft.com/office/drawing/2014/main" val="10003"/>
-                  </a:ext>
-                </a:extLst>
               </a:tr>
             </a:tbl>
           </a:graphicData>
@@ -5852,7 +5318,7 @@
           <a:noFill/>
         </p:spPr>
         <p:txBody>
-          <a:bodyPr wrap="square" lIns="25400" tIns="25400" rIns="25400" bIns="25400" anchor="t">
+          <a:bodyPr wrap="square" anchor="t" lIns="25400" rIns="25400" tIns="25400" bIns="25400">
             <a:spAutoFit/>
           </a:bodyPr>
           <a:lstStyle/>
@@ -5893,36 +5359,18 @@
                 <a:tableStyleId>{5C22544A-7EE6-4342-B048-85BDC9FD1C3A}</a:tableStyleId>
               </a:tblPr>
               <a:tblGrid>
-                <a:gridCol w="2207622">
-                  <a:extLst>
-                    <a:ext uri="{9D8B030D-6E8A-4147-A177-3AD203B41FA5}">
-                      <a16:colId xmlns:a16="http://schemas.microsoft.com/office/drawing/2014/main" val="20000"/>
-                    </a:ext>
-                  </a:extLst>
-                </a:gridCol>
-                <a:gridCol w="1443445">
-                  <a:extLst>
-                    <a:ext uri="{9D8B030D-6E8A-4147-A177-3AD203B41FA5}">
-                      <a16:colId xmlns:a16="http://schemas.microsoft.com/office/drawing/2014/main" val="20001"/>
-                    </a:ext>
-                  </a:extLst>
-                </a:gridCol>
-                <a:gridCol w="1698171">
-                  <a:extLst>
-                    <a:ext uri="{9D8B030D-6E8A-4147-A177-3AD203B41FA5}">
-                      <a16:colId xmlns:a16="http://schemas.microsoft.com/office/drawing/2014/main" val="20002"/>
-                    </a:ext>
-                  </a:extLst>
-                </a:gridCol>
+                <a:gridCol w="2207622"/>
+                <a:gridCol w="1443445"/>
+                <a:gridCol w="1698171"/>
               </a:tblGrid>
               <a:tr h="375920">
                 <a:tc>
                   <a:txBody>
-                    <a:bodyPr/>
+                    <a:bodyPr wrap="square"/>
                     <a:lstStyle/>
                     <a:p>
                       <a:r>
-                        <a:rPr sz="1100" b="1">
+                        <a:rPr b="1" sz="1100">
                           <a:solidFill>
                             <a:srgbClr val="FFFFFF"/>
                           </a:solidFill>
@@ -5932,7 +5380,7 @@
                       </a:r>
                     </a:p>
                   </a:txBody>
-                  <a:tcPr marL="88900" marR="63500" marT="38100" marB="38100" anchor="ctr">
+                  <a:tcPr anchor="ctr" marL="88900" marR="63500" marT="38100" marB="38100">
                     <a:solidFill>
                       <a:srgbClr val="0F2A43"/>
                     </a:solidFill>
@@ -5940,11 +5388,11 @@
                 </a:tc>
                 <a:tc>
                   <a:txBody>
-                    <a:bodyPr/>
+                    <a:bodyPr wrap="square"/>
                     <a:lstStyle/>
                     <a:p>
                       <a:r>
-                        <a:rPr sz="1100" b="1">
+                        <a:rPr b="1" sz="1100">
                           <a:solidFill>
                             <a:srgbClr val="FFFFFF"/>
                           </a:solidFill>
@@ -5954,7 +5402,7 @@
                       </a:r>
                     </a:p>
                   </a:txBody>
-                  <a:tcPr marL="88900" marR="63500" marT="38100" marB="38100" anchor="ctr">
+                  <a:tcPr anchor="ctr" marL="88900" marR="63500" marT="38100" marB="38100">
                     <a:solidFill>
                       <a:srgbClr val="0F2A43"/>
                     </a:solidFill>
@@ -5962,11 +5410,11 @@
                 </a:tc>
                 <a:tc>
                   <a:txBody>
-                    <a:bodyPr/>
+                    <a:bodyPr wrap="square"/>
                     <a:lstStyle/>
                     <a:p>
                       <a:r>
-                        <a:rPr sz="1100" b="1">
+                        <a:rPr b="1" sz="1100">
                           <a:solidFill>
                             <a:srgbClr val="FFFFFF"/>
                           </a:solidFill>
@@ -5976,22 +5424,17 @@
                       </a:r>
                     </a:p>
                   </a:txBody>
-                  <a:tcPr marL="88900" marR="63500" marT="38100" marB="38100" anchor="ctr">
+                  <a:tcPr anchor="ctr" marL="88900" marR="63500" marT="38100" marB="38100">
                     <a:solidFill>
                       <a:srgbClr val="0F2A43"/>
                     </a:solidFill>
                   </a:tcPr>
                 </a:tc>
-                <a:extLst>
-                  <a:ext uri="{0D108BD9-81ED-4DB2-BD59-A6C34878D82A}">
-                    <a16:rowId xmlns:a16="http://schemas.microsoft.com/office/drawing/2014/main" val="10000"/>
-                  </a:ext>
-                </a:extLst>
               </a:tr>
               <a:tr h="375920">
                 <a:tc>
                   <a:txBody>
-                    <a:bodyPr/>
+                    <a:bodyPr wrap="square"/>
                     <a:lstStyle/>
                     <a:p>
                       <a:r>
@@ -6005,7 +5448,7 @@
                       </a:r>
                     </a:p>
                   </a:txBody>
-                  <a:tcPr marL="88900" marR="63500" marT="25400" marB="25400" anchor="ctr">
+                  <a:tcPr anchor="ctr" marL="88900" marR="63500" marT="25400" marB="25400">
                     <a:solidFill>
                       <a:srgbClr val="F4F7F9"/>
                     </a:solidFill>
@@ -6013,7 +5456,7 @@
                 </a:tc>
                 <a:tc>
                   <a:txBody>
-                    <a:bodyPr/>
+                    <a:bodyPr wrap="square"/>
                     <a:lstStyle/>
                     <a:p>
                       <a:r>
@@ -6027,7 +5470,7 @@
                       </a:r>
                     </a:p>
                   </a:txBody>
-                  <a:tcPr marL="88900" marR="63500" marT="25400" marB="25400" anchor="ctr">
+                  <a:tcPr anchor="ctr" marL="88900" marR="63500" marT="25400" marB="25400">
                     <a:solidFill>
                       <a:srgbClr val="F4F7F9"/>
                     </a:solidFill>
@@ -6035,28 +5478,31 @@
                 </a:tc>
                 <a:tc>
                   <a:txBody>
-                    <a:bodyPr/>
+                    <a:bodyPr wrap="square"/>
                     <a:lstStyle/>
                     <a:p>
-                      <a:endParaRPr/>
+                      <a:r>
+                        <a:rPr sz="1050">
+                          <a:solidFill>
+                            <a:srgbClr val="1A2B3C"/>
+                          </a:solidFill>
+                          <a:latin typeface="Calibri"/>
+                        </a:rPr>
+                        <a:t/>
+                      </a:r>
                     </a:p>
                   </a:txBody>
-                  <a:tcPr marL="88900" marR="63500" marT="25400" marB="25400" anchor="ctr">
+                  <a:tcPr anchor="ctr" marL="88900" marR="63500" marT="25400" marB="25400">
                     <a:solidFill>
                       <a:srgbClr val="F4F7F9"/>
                     </a:solidFill>
                   </a:tcPr>
                 </a:tc>
-                <a:extLst>
-                  <a:ext uri="{0D108BD9-81ED-4DB2-BD59-A6C34878D82A}">
-                    <a16:rowId xmlns:a16="http://schemas.microsoft.com/office/drawing/2014/main" val="10001"/>
-                  </a:ext>
-                </a:extLst>
               </a:tr>
               <a:tr h="375920">
                 <a:tc>
                   <a:txBody>
-                    <a:bodyPr/>
+                    <a:bodyPr wrap="square"/>
                     <a:lstStyle/>
                     <a:p>
                       <a:r>
@@ -6070,7 +5516,7 @@
                       </a:r>
                     </a:p>
                   </a:txBody>
-                  <a:tcPr marL="88900" marR="63500" marT="25400" marB="25400" anchor="ctr">
+                  <a:tcPr anchor="ctr" marL="88900" marR="63500" marT="25400" marB="25400">
                     <a:solidFill>
                       <a:srgbClr val="FFFFFF"/>
                     </a:solidFill>
@@ -6078,7 +5524,7 @@
                 </a:tc>
                 <a:tc>
                   <a:txBody>
-                    <a:bodyPr/>
+                    <a:bodyPr wrap="square"/>
                     <a:lstStyle/>
                     <a:p>
                       <a:r>
@@ -6092,7 +5538,7 @@
                       </a:r>
                     </a:p>
                   </a:txBody>
-                  <a:tcPr marL="88900" marR="63500" marT="25400" marB="25400" anchor="ctr">
+                  <a:tcPr anchor="ctr" marL="88900" marR="63500" marT="25400" marB="25400">
                     <a:solidFill>
                       <a:srgbClr val="FFFFFF"/>
                     </a:solidFill>
@@ -6100,7 +5546,7 @@
                 </a:tc>
                 <a:tc>
                   <a:txBody>
-                    <a:bodyPr/>
+                    <a:bodyPr wrap="square"/>
                     <a:lstStyle/>
                     <a:p>
                       <a:r>
@@ -6114,22 +5560,17 @@
                       </a:r>
                     </a:p>
                   </a:txBody>
-                  <a:tcPr marL="88900" marR="63500" marT="25400" marB="25400" anchor="ctr">
+                  <a:tcPr anchor="ctr" marL="88900" marR="63500" marT="25400" marB="25400">
                     <a:solidFill>
                       <a:srgbClr val="FFFFFF"/>
                     </a:solidFill>
                   </a:tcPr>
                 </a:tc>
-                <a:extLst>
-                  <a:ext uri="{0D108BD9-81ED-4DB2-BD59-A6C34878D82A}">
-                    <a16:rowId xmlns:a16="http://schemas.microsoft.com/office/drawing/2014/main" val="10002"/>
-                  </a:ext>
-                </a:extLst>
               </a:tr>
               <a:tr h="375920">
                 <a:tc>
                   <a:txBody>
-                    <a:bodyPr/>
+                    <a:bodyPr wrap="square"/>
                     <a:lstStyle/>
                     <a:p>
                       <a:r>
@@ -6143,7 +5584,7 @@
                       </a:r>
                     </a:p>
                   </a:txBody>
-                  <a:tcPr marL="88900" marR="63500" marT="25400" marB="25400" anchor="ctr">
+                  <a:tcPr anchor="ctr" marL="88900" marR="63500" marT="25400" marB="25400">
                     <a:solidFill>
                       <a:srgbClr val="F4F7F9"/>
                     </a:solidFill>
@@ -6151,7 +5592,7 @@
                 </a:tc>
                 <a:tc>
                   <a:txBody>
-                    <a:bodyPr/>
+                    <a:bodyPr wrap="square"/>
                     <a:lstStyle/>
                     <a:p>
                       <a:r>
@@ -6165,7 +5606,7 @@
                       </a:r>
                     </a:p>
                   </a:txBody>
-                  <a:tcPr marL="88900" marR="63500" marT="25400" marB="25400" anchor="ctr">
+                  <a:tcPr anchor="ctr" marL="88900" marR="63500" marT="25400" marB="25400">
                     <a:solidFill>
                       <a:srgbClr val="F4F7F9"/>
                     </a:solidFill>
@@ -6173,7 +5614,7 @@
                 </a:tc>
                 <a:tc>
                   <a:txBody>
-                    <a:bodyPr/>
+                    <a:bodyPr wrap="square"/>
                     <a:lstStyle/>
                     <a:p>
                       <a:r>
@@ -6187,22 +5628,17 @@
                       </a:r>
                     </a:p>
                   </a:txBody>
-                  <a:tcPr marL="88900" marR="63500" marT="25400" marB="25400" anchor="ctr">
+                  <a:tcPr anchor="ctr" marL="88900" marR="63500" marT="25400" marB="25400">
                     <a:solidFill>
                       <a:srgbClr val="F4F7F9"/>
                     </a:solidFill>
                   </a:tcPr>
                 </a:tc>
-                <a:extLst>
-                  <a:ext uri="{0D108BD9-81ED-4DB2-BD59-A6C34878D82A}">
-                    <a16:rowId xmlns:a16="http://schemas.microsoft.com/office/drawing/2014/main" val="10003"/>
-                  </a:ext>
-                </a:extLst>
               </a:tr>
               <a:tr h="375920">
                 <a:tc>
                   <a:txBody>
-                    <a:bodyPr/>
+                    <a:bodyPr wrap="square"/>
                     <a:lstStyle/>
                     <a:p>
                       <a:r>
@@ -6216,7 +5652,7 @@
                       </a:r>
                     </a:p>
                   </a:txBody>
-                  <a:tcPr marL="88900" marR="63500" marT="25400" marB="25400" anchor="ctr">
+                  <a:tcPr anchor="ctr" marL="88900" marR="63500" marT="25400" marB="25400">
                     <a:solidFill>
                       <a:srgbClr val="FFFFFF"/>
                     </a:solidFill>
@@ -6224,7 +5660,7 @@
                 </a:tc>
                 <a:tc>
                   <a:txBody>
-                    <a:bodyPr/>
+                    <a:bodyPr wrap="square"/>
                     <a:lstStyle/>
                     <a:p>
                       <a:r>
@@ -6238,7 +5674,7 @@
                       </a:r>
                     </a:p>
                   </a:txBody>
-                  <a:tcPr marL="88900" marR="63500" marT="25400" marB="25400" anchor="ctr">
+                  <a:tcPr anchor="ctr" marL="88900" marR="63500" marT="25400" marB="25400">
                     <a:solidFill>
                       <a:srgbClr val="FFFFFF"/>
                     </a:solidFill>
@@ -6246,28 +5682,31 @@
                 </a:tc>
                 <a:tc>
                   <a:txBody>
-                    <a:bodyPr/>
+                    <a:bodyPr wrap="square"/>
                     <a:lstStyle/>
                     <a:p>
-                      <a:endParaRPr/>
+                      <a:r>
+                        <a:rPr sz="1050">
+                          <a:solidFill>
+                            <a:srgbClr val="1A2B3C"/>
+                          </a:solidFill>
+                          <a:latin typeface="Calibri"/>
+                        </a:rPr>
+                        <a:t/>
+                      </a:r>
                     </a:p>
                   </a:txBody>
-                  <a:tcPr marL="88900" marR="63500" marT="25400" marB="25400" anchor="ctr">
+                  <a:tcPr anchor="ctr" marL="88900" marR="63500" marT="25400" marB="25400">
                     <a:solidFill>
                       <a:srgbClr val="FFFFFF"/>
                     </a:solidFill>
                   </a:tcPr>
                 </a:tc>
-                <a:extLst>
-                  <a:ext uri="{0D108BD9-81ED-4DB2-BD59-A6C34878D82A}">
-                    <a16:rowId xmlns:a16="http://schemas.microsoft.com/office/drawing/2014/main" val="10004"/>
-                  </a:ext>
-                </a:extLst>
               </a:tr>
               <a:tr h="375920">
                 <a:tc>
                   <a:txBody>
-                    <a:bodyPr/>
+                    <a:bodyPr wrap="square"/>
                     <a:lstStyle/>
                     <a:p>
                       <a:r>
@@ -6281,7 +5720,7 @@
                       </a:r>
                     </a:p>
                   </a:txBody>
-                  <a:tcPr marL="88900" marR="63500" marT="25400" marB="25400" anchor="ctr">
+                  <a:tcPr anchor="ctr" marL="88900" marR="63500" marT="25400" marB="25400">
                     <a:solidFill>
                       <a:srgbClr val="F4F7F9"/>
                     </a:solidFill>
@@ -6289,7 +5728,7 @@
                 </a:tc>
                 <a:tc>
                   <a:txBody>
-                    <a:bodyPr/>
+                    <a:bodyPr wrap="square"/>
                     <a:lstStyle/>
                     <a:p>
                       <a:r>
@@ -6303,7 +5742,7 @@
                       </a:r>
                     </a:p>
                   </a:txBody>
-                  <a:tcPr marL="88900" marR="63500" marT="25400" marB="25400" anchor="ctr">
+                  <a:tcPr anchor="ctr" marL="88900" marR="63500" marT="25400" marB="25400">
                     <a:solidFill>
                       <a:srgbClr val="F4F7F9"/>
                     </a:solidFill>
@@ -6311,28 +5750,31 @@
                 </a:tc>
                 <a:tc>
                   <a:txBody>
-                    <a:bodyPr/>
+                    <a:bodyPr wrap="square"/>
                     <a:lstStyle/>
                     <a:p>
-                      <a:endParaRPr/>
+                      <a:r>
+                        <a:rPr sz="1050">
+                          <a:solidFill>
+                            <a:srgbClr val="1A2B3C"/>
+                          </a:solidFill>
+                          <a:latin typeface="Calibri"/>
+                        </a:rPr>
+                        <a:t/>
+                      </a:r>
                     </a:p>
                   </a:txBody>
-                  <a:tcPr marL="88900" marR="63500" marT="25400" marB="25400" anchor="ctr">
+                  <a:tcPr anchor="ctr" marL="88900" marR="63500" marT="25400" marB="25400">
                     <a:solidFill>
                       <a:srgbClr val="F4F7F9"/>
                     </a:solidFill>
                   </a:tcPr>
                 </a:tc>
-                <a:extLst>
-                  <a:ext uri="{0D108BD9-81ED-4DB2-BD59-A6C34878D82A}">
-                    <a16:rowId xmlns:a16="http://schemas.microsoft.com/office/drawing/2014/main" val="10005"/>
-                  </a:ext>
-                </a:extLst>
               </a:tr>
               <a:tr h="375920">
                 <a:tc>
                   <a:txBody>
-                    <a:bodyPr/>
+                    <a:bodyPr wrap="square"/>
                     <a:lstStyle/>
                     <a:p>
                       <a:r>
@@ -6346,7 +5788,7 @@
                       </a:r>
                     </a:p>
                   </a:txBody>
-                  <a:tcPr marL="88900" marR="63500" marT="25400" marB="25400" anchor="ctr">
+                  <a:tcPr anchor="ctr" marL="88900" marR="63500" marT="25400" marB="25400">
                     <a:solidFill>
                       <a:srgbClr val="FFFFFF"/>
                     </a:solidFill>
@@ -6354,7 +5796,7 @@
                 </a:tc>
                 <a:tc>
                   <a:txBody>
-                    <a:bodyPr/>
+                    <a:bodyPr wrap="square"/>
                     <a:lstStyle/>
                     <a:p>
                       <a:r>
@@ -6368,7 +5810,7 @@
                       </a:r>
                     </a:p>
                   </a:txBody>
-                  <a:tcPr marL="88900" marR="63500" marT="25400" marB="25400" anchor="ctr">
+                  <a:tcPr anchor="ctr" marL="88900" marR="63500" marT="25400" marB="25400">
                     <a:solidFill>
                       <a:srgbClr val="FFFFFF"/>
                     </a:solidFill>
@@ -6376,28 +5818,31 @@
                 </a:tc>
                 <a:tc>
                   <a:txBody>
-                    <a:bodyPr/>
+                    <a:bodyPr wrap="square"/>
                     <a:lstStyle/>
                     <a:p>
-                      <a:endParaRPr/>
+                      <a:r>
+                        <a:rPr sz="1050">
+                          <a:solidFill>
+                            <a:srgbClr val="1A2B3C"/>
+                          </a:solidFill>
+                          <a:latin typeface="Calibri"/>
+                        </a:rPr>
+                        <a:t/>
+                      </a:r>
                     </a:p>
                   </a:txBody>
-                  <a:tcPr marL="88900" marR="63500" marT="25400" marB="25400" anchor="ctr">
+                  <a:tcPr anchor="ctr" marL="88900" marR="63500" marT="25400" marB="25400">
                     <a:solidFill>
                       <a:srgbClr val="FFFFFF"/>
                     </a:solidFill>
                   </a:tcPr>
                 </a:tc>
-                <a:extLst>
-                  <a:ext uri="{0D108BD9-81ED-4DB2-BD59-A6C34878D82A}">
-                    <a16:rowId xmlns:a16="http://schemas.microsoft.com/office/drawing/2014/main" val="10006"/>
-                  </a:ext>
-                </a:extLst>
               </a:tr>
               <a:tr h="375920">
                 <a:tc>
                   <a:txBody>
-                    <a:bodyPr/>
+                    <a:bodyPr wrap="square"/>
                     <a:lstStyle/>
                     <a:p>
                       <a:r>
@@ -6411,7 +5856,7 @@
                       </a:r>
                     </a:p>
                   </a:txBody>
-                  <a:tcPr marL="88900" marR="63500" marT="25400" marB="25400" anchor="ctr">
+                  <a:tcPr anchor="ctr" marL="88900" marR="63500" marT="25400" marB="25400">
                     <a:solidFill>
                       <a:srgbClr val="F4F7F9"/>
                     </a:solidFill>
@@ -6419,7 +5864,7 @@
                 </a:tc>
                 <a:tc>
                   <a:txBody>
-                    <a:bodyPr/>
+                    <a:bodyPr wrap="square"/>
                     <a:lstStyle/>
                     <a:p>
                       <a:r>
@@ -6433,7 +5878,7 @@
                       </a:r>
                     </a:p>
                   </a:txBody>
-                  <a:tcPr marL="88900" marR="63500" marT="25400" marB="25400" anchor="ctr">
+                  <a:tcPr anchor="ctr" marL="88900" marR="63500" marT="25400" marB="25400">
                     <a:solidFill>
                       <a:srgbClr val="F4F7F9"/>
                     </a:solidFill>
@@ -6441,7 +5886,7 @@
                 </a:tc>
                 <a:tc>
                   <a:txBody>
-                    <a:bodyPr/>
+                    <a:bodyPr wrap="square"/>
                     <a:lstStyle/>
                     <a:p>
                       <a:r>
@@ -6455,22 +5900,17 @@
                       </a:r>
                     </a:p>
                   </a:txBody>
-                  <a:tcPr marL="88900" marR="63500" marT="25400" marB="25400" anchor="ctr">
+                  <a:tcPr anchor="ctr" marL="88900" marR="63500" marT="25400" marB="25400">
                     <a:solidFill>
                       <a:srgbClr val="F4F7F9"/>
                     </a:solidFill>
                   </a:tcPr>
                 </a:tc>
-                <a:extLst>
-                  <a:ext uri="{0D108BD9-81ED-4DB2-BD59-A6C34878D82A}">
-                    <a16:rowId xmlns:a16="http://schemas.microsoft.com/office/drawing/2014/main" val="10007"/>
-                  </a:ext>
-                </a:extLst>
               </a:tr>
               <a:tr h="375920">
                 <a:tc>
                   <a:txBody>
-                    <a:bodyPr/>
+                    <a:bodyPr wrap="square"/>
                     <a:lstStyle/>
                     <a:p>
                       <a:r>
@@ -6484,7 +5924,7 @@
                       </a:r>
                     </a:p>
                   </a:txBody>
-                  <a:tcPr marL="88900" marR="63500" marT="25400" marB="25400" anchor="ctr">
+                  <a:tcPr anchor="ctr" marL="88900" marR="63500" marT="25400" marB="25400">
                     <a:solidFill>
                       <a:srgbClr val="FFFFFF"/>
                     </a:solidFill>
@@ -6492,7 +5932,7 @@
                 </a:tc>
                 <a:tc>
                   <a:txBody>
-                    <a:bodyPr/>
+                    <a:bodyPr wrap="square"/>
                     <a:lstStyle/>
                     <a:p>
                       <a:r>
@@ -6506,7 +5946,7 @@
                       </a:r>
                     </a:p>
                   </a:txBody>
-                  <a:tcPr marL="88900" marR="63500" marT="25400" marB="25400" anchor="ctr">
+                  <a:tcPr anchor="ctr" marL="88900" marR="63500" marT="25400" marB="25400">
                     <a:solidFill>
                       <a:srgbClr val="FFFFFF"/>
                     </a:solidFill>
@@ -6514,7 +5954,7 @@
                 </a:tc>
                 <a:tc>
                   <a:txBody>
-                    <a:bodyPr/>
+                    <a:bodyPr wrap="square"/>
                     <a:lstStyle/>
                     <a:p>
                       <a:r>
@@ -6528,17 +5968,12 @@
                       </a:r>
                     </a:p>
                   </a:txBody>
-                  <a:tcPr marL="88900" marR="63500" marT="25400" marB="25400" anchor="ctr">
+                  <a:tcPr anchor="ctr" marL="88900" marR="63500" marT="25400" marB="25400">
                     <a:solidFill>
                       <a:srgbClr val="FFFFFF"/>
                     </a:solidFill>
                   </a:tcPr>
                 </a:tc>
-                <a:extLst>
-                  <a:ext uri="{0D108BD9-81ED-4DB2-BD59-A6C34878D82A}">
-                    <a16:rowId xmlns:a16="http://schemas.microsoft.com/office/drawing/2014/main" val="10008"/>
-                  </a:ext>
-                </a:extLst>
               </a:tr>
             </a:tbl>
           </a:graphicData>
@@ -6582,11 +6017,10 @@
           </a:fontRef>
         </p:style>
         <p:txBody>
-          <a:bodyPr wrap="square" rtlCol="0" anchor="ctr"/>
+          <a:bodyPr rtlCol="0" anchor="ctr" wrap="square"/>
           <a:lstStyle/>
           <a:p>
             <a:pPr algn="ctr"/>
-            <a:endParaRPr/>
           </a:p>
         </p:txBody>
       </p:sp>
@@ -6607,7 +6041,7 @@
           <a:noFill/>
         </p:spPr>
         <p:txBody>
-          <a:bodyPr wrap="square" lIns="25400" tIns="25400" rIns="25400" bIns="25400" anchor="ctr">
+          <a:bodyPr wrap="square" anchor="ctr" lIns="25400" rIns="25400" tIns="25400" bIns="25400">
             <a:spAutoFit/>
           </a:bodyPr>
           <a:lstStyle/>
@@ -6646,7 +6080,7 @@
           <a:noFill/>
         </p:spPr>
         <p:txBody>
-          <a:bodyPr wrap="square" lIns="25400" tIns="25400" rIns="25400" bIns="25400" anchor="t">
+          <a:bodyPr wrap="square" anchor="t" lIns="25400" rIns="25400" tIns="25400" bIns="25400">
             <a:spAutoFit/>
           </a:bodyPr>
           <a:lstStyle/>
@@ -6677,7 +6111,7 @@
 </file>
 
 <file path=ppt/slides/slide12.xml><?xml version="1.0" encoding="utf-8"?>
-<p:sld xmlns:a="http://schemas.openxmlformats.org/drawingml/2006/main" xmlns:r="http://schemas.openxmlformats.org/officeDocument/2006/relationships" xmlns:p="http://schemas.openxmlformats.org/presentationml/2006/main">
+<p:sld xmlns:a="http://schemas.openxmlformats.org/drawingml/2006/main" xmlns:p="http://schemas.openxmlformats.org/presentationml/2006/main" xmlns:r="http://schemas.openxmlformats.org/officeDocument/2006/relationships">
   <p:cSld>
     <p:spTree>
       <p:nvGrpSpPr>
@@ -6685,14 +6119,7 @@
         <p:cNvGrpSpPr/>
         <p:nvPr/>
       </p:nvGrpSpPr>
-      <p:grpSpPr>
-        <a:xfrm>
-          <a:off x="0" y="0"/>
-          <a:ext cx="0" cy="0"/>
-          <a:chOff x="0" y="0"/>
-          <a:chExt cx="0" cy="0"/>
-        </a:xfrm>
-      </p:grpSpPr>
+      <p:grpSpPr/>
       <p:sp>
         <p:nvSpPr>
           <p:cNvPr id="2" name="Rectangle 1"/>
@@ -6733,7 +6160,6 @@
           <a:lstStyle/>
           <a:p>
             <a:pPr algn="ctr"/>
-            <a:endParaRPr/>
           </a:p>
         </p:txBody>
       </p:sp>
@@ -6754,7 +6180,7 @@
           <a:noFill/>
         </p:spPr>
         <p:txBody>
-          <a:bodyPr wrap="square" lIns="25400" tIns="25400" rIns="25400" bIns="25400" anchor="t">
+          <a:bodyPr wrap="square" anchor="t" lIns="25400" rIns="25400" tIns="25400" bIns="25400">
             <a:spAutoFit/>
           </a:bodyPr>
           <a:lstStyle/>
@@ -6793,7 +6219,7 @@
           <a:noFill/>
         </p:spPr>
         <p:txBody>
-          <a:bodyPr wrap="square" lIns="25400" tIns="25400" rIns="25400" bIns="25400" anchor="t">
+          <a:bodyPr wrap="square" anchor="t" lIns="25400" rIns="25400" tIns="25400" bIns="25400">
             <a:spAutoFit/>
           </a:bodyPr>
           <a:lstStyle/>
@@ -6855,7 +6281,6 @@
           <a:lstStyle/>
           <a:p>
             <a:pPr algn="ctr"/>
-            <a:endParaRPr/>
           </a:p>
         </p:txBody>
       </p:sp>
@@ -6876,7 +6301,7 @@
           <a:noFill/>
         </p:spPr>
         <p:txBody>
-          <a:bodyPr wrap="square" lIns="25400" tIns="25400" rIns="25400" bIns="25400" anchor="t">
+          <a:bodyPr wrap="square" anchor="t" lIns="25400" rIns="25400" tIns="25400" bIns="25400">
             <a:spAutoFit/>
           </a:bodyPr>
           <a:lstStyle/>
@@ -6938,11 +6363,10 @@
           </a:fontRef>
         </p:style>
         <p:txBody>
-          <a:bodyPr wrap="square" rtlCol="0" anchor="ctr"/>
+          <a:bodyPr rtlCol="0" anchor="ctr" wrap="square"/>
           <a:lstStyle/>
           <a:p>
             <a:pPr algn="ctr"/>
-            <a:endParaRPr/>
           </a:p>
         </p:txBody>
       </p:sp>
@@ -6987,7 +6411,7 @@
           <a:p>
             <a:pPr algn="ctr"/>
             <a:r>
-              <a:rPr sz="1400" b="1">
+              <a:rPr b="1" sz="1400">
                 <a:solidFill>
                   <a:srgbClr val="FFFFFF"/>
                 </a:solidFill>
@@ -7015,7 +6439,7 @@
           <a:noFill/>
         </p:spPr>
         <p:txBody>
-          <a:bodyPr wrap="square" lIns="25400" tIns="25400" rIns="25400" bIns="25400" anchor="t">
+          <a:bodyPr wrap="square" anchor="t" lIns="25400" rIns="25400" tIns="25400" bIns="25400">
             <a:spAutoFit/>
           </a:bodyPr>
           <a:lstStyle/>
@@ -7039,7 +6463,7 @@
             </a:r>
           </a:p>
           <a:p>
-            <a:pPr lvl="1" algn="l">
+            <a:pPr algn="l" lvl="1">
               <a:lnSpc>
                 <a:spcPct val="100000"/>
               </a:lnSpc>
@@ -7080,7 +6504,7 @@
             </a:r>
           </a:p>
           <a:p>
-            <a:pPr lvl="1" algn="l">
+            <a:pPr algn="l" lvl="1">
               <a:lnSpc>
                 <a:spcPct val="100000"/>
               </a:lnSpc>
@@ -7121,7 +6545,7 @@
             </a:r>
           </a:p>
           <a:p>
-            <a:pPr lvl="1" algn="l">
+            <a:pPr algn="l" lvl="1">
               <a:lnSpc>
                 <a:spcPct val="100000"/>
               </a:lnSpc>
@@ -7162,7 +6586,7 @@
             </a:r>
           </a:p>
           <a:p>
-            <a:pPr lvl="1" algn="l">
+            <a:pPr algn="l" lvl="1">
               <a:lnSpc>
                 <a:spcPct val="100000"/>
               </a:lnSpc>
@@ -7225,11 +6649,10 @@
           </a:fontRef>
         </p:style>
         <p:txBody>
-          <a:bodyPr wrap="square" rtlCol="0" anchor="ctr"/>
+          <a:bodyPr rtlCol="0" anchor="ctr" wrap="square"/>
           <a:lstStyle/>
           <a:p>
             <a:pPr algn="ctr"/>
-            <a:endParaRPr/>
           </a:p>
         </p:txBody>
       </p:sp>
@@ -7274,7 +6697,7 @@
           <a:p>
             <a:pPr algn="ctr"/>
             <a:r>
-              <a:rPr sz="1400" b="1">
+              <a:rPr b="1" sz="1400">
                 <a:solidFill>
                   <a:srgbClr val="FFFFFF"/>
                 </a:solidFill>
@@ -7302,7 +6725,7 @@
           <a:noFill/>
         </p:spPr>
         <p:txBody>
-          <a:bodyPr wrap="square" lIns="25400" tIns="25400" rIns="25400" bIns="25400" anchor="t">
+          <a:bodyPr wrap="square" anchor="t" lIns="25400" rIns="25400" tIns="25400" bIns="25400">
             <a:spAutoFit/>
           </a:bodyPr>
           <a:lstStyle/>
@@ -7326,7 +6749,7 @@
             </a:r>
           </a:p>
           <a:p>
-            <a:pPr lvl="1" algn="l">
+            <a:pPr algn="l" lvl="1">
               <a:lnSpc>
                 <a:spcPct val="100000"/>
               </a:lnSpc>
@@ -7367,7 +6790,7 @@
             </a:r>
           </a:p>
           <a:p>
-            <a:pPr lvl="1" algn="l">
+            <a:pPr algn="l" lvl="1">
               <a:lnSpc>
                 <a:spcPct val="100000"/>
               </a:lnSpc>
@@ -7408,7 +6831,7 @@
             </a:r>
           </a:p>
           <a:p>
-            <a:pPr lvl="1" algn="l">
+            <a:pPr algn="l" lvl="1">
               <a:lnSpc>
                 <a:spcPct val="100000"/>
               </a:lnSpc>
@@ -7449,7 +6872,7 @@
             </a:r>
           </a:p>
           <a:p>
-            <a:pPr lvl="1" algn="l">
+            <a:pPr algn="l" lvl="1">
               <a:lnSpc>
                 <a:spcPct val="100000"/>
               </a:lnSpc>
@@ -7510,11 +6933,10 @@
           </a:fontRef>
         </p:style>
         <p:txBody>
-          <a:bodyPr wrap="square" rtlCol="0" anchor="ctr"/>
+          <a:bodyPr rtlCol="0" anchor="ctr" wrap="square"/>
           <a:lstStyle/>
           <a:p>
             <a:pPr algn="ctr"/>
-            <a:endParaRPr/>
           </a:p>
         </p:txBody>
       </p:sp>
@@ -7535,7 +6957,7 @@
           <a:noFill/>
         </p:spPr>
         <p:txBody>
-          <a:bodyPr wrap="square" lIns="25400" tIns="25400" rIns="25400" bIns="25400" anchor="ctr">
+          <a:bodyPr wrap="square" anchor="ctr" lIns="25400" rIns="25400" tIns="25400" bIns="25400">
             <a:spAutoFit/>
           </a:bodyPr>
           <a:lstStyle/>
@@ -7574,7 +6996,7 @@
           <a:noFill/>
         </p:spPr>
         <p:txBody>
-          <a:bodyPr wrap="square" lIns="25400" tIns="25400" rIns="25400" bIns="25400" anchor="t">
+          <a:bodyPr wrap="square" anchor="t" lIns="25400" rIns="25400" tIns="25400" bIns="25400">
             <a:spAutoFit/>
           </a:bodyPr>
           <a:lstStyle/>
@@ -7605,7 +7027,7 @@
 </file>
 
 <file path=ppt/slides/slide13.xml><?xml version="1.0" encoding="utf-8"?>
-<p:sld xmlns:a="http://schemas.openxmlformats.org/drawingml/2006/main" xmlns:r="http://schemas.openxmlformats.org/officeDocument/2006/relationships" xmlns:p="http://schemas.openxmlformats.org/presentationml/2006/main">
+<p:sld xmlns:a="http://schemas.openxmlformats.org/drawingml/2006/main" xmlns:p="http://schemas.openxmlformats.org/presentationml/2006/main" xmlns:r="http://schemas.openxmlformats.org/officeDocument/2006/relationships">
   <p:cSld>
     <p:spTree>
       <p:nvGrpSpPr>
@@ -7613,14 +7035,7 @@
         <p:cNvGrpSpPr/>
         <p:nvPr/>
       </p:nvGrpSpPr>
-      <p:grpSpPr>
-        <a:xfrm>
-          <a:off x="0" y="0"/>
-          <a:ext cx="0" cy="0"/>
-          <a:chOff x="0" y="0"/>
-          <a:chExt cx="0" cy="0"/>
-        </a:xfrm>
-      </p:grpSpPr>
+      <p:grpSpPr/>
       <p:sp>
         <p:nvSpPr>
           <p:cNvPr id="2" name="Rectangle 1"/>
@@ -7661,7 +7076,6 @@
           <a:lstStyle/>
           <a:p>
             <a:pPr algn="ctr"/>
-            <a:endParaRPr/>
           </a:p>
         </p:txBody>
       </p:sp>
@@ -7682,7 +7096,7 @@
           <a:noFill/>
         </p:spPr>
         <p:txBody>
-          <a:bodyPr wrap="square" lIns="25400" tIns="25400" rIns="25400" bIns="25400" anchor="t">
+          <a:bodyPr wrap="square" anchor="t" lIns="25400" rIns="25400" tIns="25400" bIns="25400">
             <a:spAutoFit/>
           </a:bodyPr>
           <a:lstStyle/>
@@ -7721,7 +7135,7 @@
           <a:noFill/>
         </p:spPr>
         <p:txBody>
-          <a:bodyPr wrap="square" lIns="25400" tIns="25400" rIns="25400" bIns="25400" anchor="t">
+          <a:bodyPr wrap="square" anchor="t" lIns="25400" rIns="25400" tIns="25400" bIns="25400">
             <a:spAutoFit/>
           </a:bodyPr>
           <a:lstStyle/>
@@ -7783,7 +7197,6 @@
           <a:lstStyle/>
           <a:p>
             <a:pPr algn="ctr"/>
-            <a:endParaRPr/>
           </a:p>
         </p:txBody>
       </p:sp>
@@ -7825,7 +7238,7 @@
           </a:fontRef>
         </p:style>
         <p:txBody>
-          <a:bodyPr wrap="square" tIns="38100" bIns="38100" rtlCol="0" anchor="ctr"/>
+          <a:bodyPr rtlCol="0" anchor="ctr" wrap="square" tIns="38100" bIns="38100"/>
           <a:lstStyle/>
           <a:p>
             <a:pPr algn="ctr"/>
@@ -7903,7 +7316,7 @@
           </a:fontRef>
         </p:style>
         <p:txBody>
-          <a:bodyPr wrap="square" tIns="38100" bIns="38100" rtlCol="0" anchor="ctr"/>
+          <a:bodyPr rtlCol="0" anchor="ctr" wrap="square" tIns="38100" bIns="38100"/>
           <a:lstStyle/>
           <a:p>
             <a:pPr algn="ctr"/>
@@ -7959,7 +7372,6 @@
           <a:lstStyle/>
           <a:p>
             <a:pPr algn="ctr"/>
-            <a:endParaRPr/>
           </a:p>
         </p:txBody>
       </p:sp>
@@ -8001,7 +7413,7 @@
           </a:fontRef>
         </p:style>
         <p:txBody>
-          <a:bodyPr wrap="square" tIns="38100" bIns="38100" rtlCol="0" anchor="ctr"/>
+          <a:bodyPr rtlCol="0" anchor="ctr" wrap="square" tIns="38100" bIns="38100"/>
           <a:lstStyle/>
           <a:p>
             <a:pPr algn="ctr"/>
@@ -8079,7 +7491,7 @@
           </a:fontRef>
         </p:style>
         <p:txBody>
-          <a:bodyPr wrap="square" tIns="38100" bIns="38100" rtlCol="0" anchor="ctr"/>
+          <a:bodyPr rtlCol="0" anchor="ctr" wrap="square" tIns="38100" bIns="38100"/>
           <a:lstStyle/>
           <a:p>
             <a:pPr algn="ctr"/>
@@ -8135,7 +7547,6 @@
           <a:lstStyle/>
           <a:p>
             <a:pPr algn="ctr"/>
-            <a:endParaRPr/>
           </a:p>
         </p:txBody>
       </p:sp>
@@ -8177,7 +7588,7 @@
           </a:fontRef>
         </p:style>
         <p:txBody>
-          <a:bodyPr wrap="square" tIns="38100" bIns="38100" rtlCol="0" anchor="ctr"/>
+          <a:bodyPr rtlCol="0" anchor="ctr" wrap="square" tIns="38100" bIns="38100"/>
           <a:lstStyle/>
           <a:p>
             <a:pPr algn="ctr"/>
@@ -8255,7 +7666,7 @@
           </a:fontRef>
         </p:style>
         <p:txBody>
-          <a:bodyPr wrap="square" tIns="38100" bIns="38100" rtlCol="0" anchor="ctr"/>
+          <a:bodyPr rtlCol="0" anchor="ctr" wrap="square" tIns="38100" bIns="38100"/>
           <a:lstStyle/>
           <a:p>
             <a:pPr algn="ctr"/>
@@ -8311,7 +7722,6 @@
           <a:lstStyle/>
           <a:p>
             <a:pPr algn="ctr"/>
-            <a:endParaRPr/>
           </a:p>
         </p:txBody>
       </p:sp>
@@ -8353,7 +7763,7 @@
           </a:fontRef>
         </p:style>
         <p:txBody>
-          <a:bodyPr wrap="square" tIns="38100" bIns="38100" rtlCol="0" anchor="ctr"/>
+          <a:bodyPr rtlCol="0" anchor="ctr" wrap="square" tIns="38100" bIns="38100"/>
           <a:lstStyle/>
           <a:p>
             <a:pPr algn="ctr"/>
@@ -8431,7 +7841,7 @@
           </a:fontRef>
         </p:style>
         <p:txBody>
-          <a:bodyPr wrap="square" tIns="38100" bIns="38100" rtlCol="0" anchor="ctr"/>
+          <a:bodyPr rtlCol="0" anchor="ctr" wrap="square" tIns="38100" bIns="38100"/>
           <a:lstStyle/>
           <a:p>
             <a:pPr algn="ctr"/>
@@ -8487,7 +7897,6 @@
           <a:lstStyle/>
           <a:p>
             <a:pPr algn="ctr"/>
-            <a:endParaRPr/>
           </a:p>
         </p:txBody>
       </p:sp>
@@ -8529,7 +7938,7 @@
           </a:fontRef>
         </p:style>
         <p:txBody>
-          <a:bodyPr wrap="square" tIns="38100" bIns="38100" rtlCol="0" anchor="ctr"/>
+          <a:bodyPr rtlCol="0" anchor="ctr" wrap="square" tIns="38100" bIns="38100"/>
           <a:lstStyle/>
           <a:p>
             <a:pPr algn="ctr"/>
@@ -8607,7 +8016,7 @@
           </a:fontRef>
         </p:style>
         <p:txBody>
-          <a:bodyPr wrap="square" tIns="38100" bIns="38100" rtlCol="0" anchor="ctr"/>
+          <a:bodyPr rtlCol="0" anchor="ctr" wrap="square" tIns="38100" bIns="38100"/>
           <a:lstStyle/>
           <a:p>
             <a:pPr algn="ctr"/>
@@ -8663,7 +8072,6 @@
           <a:lstStyle/>
           <a:p>
             <a:pPr algn="ctr"/>
-            <a:endParaRPr/>
           </a:p>
         </p:txBody>
       </p:sp>
@@ -8705,7 +8113,7 @@
           </a:fontRef>
         </p:style>
         <p:txBody>
-          <a:bodyPr wrap="square" tIns="38100" bIns="38100" rtlCol="0" anchor="ctr"/>
+          <a:bodyPr rtlCol="0" anchor="ctr" wrap="square" tIns="38100" bIns="38100"/>
           <a:lstStyle/>
           <a:p>
             <a:pPr algn="ctr"/>
@@ -8783,7 +8191,7 @@
           </a:fontRef>
         </p:style>
         <p:txBody>
-          <a:bodyPr wrap="square" tIns="38100" bIns="38100" rtlCol="0" anchor="ctr"/>
+          <a:bodyPr rtlCol="0" anchor="ctr" wrap="square" tIns="38100" bIns="38100"/>
           <a:lstStyle/>
           <a:p>
             <a:pPr algn="ctr"/>
@@ -8839,11 +8247,10 @@
           </a:fontRef>
         </p:style>
         <p:txBody>
-          <a:bodyPr wrap="square" rtlCol="0" anchor="ctr"/>
+          <a:bodyPr rtlCol="0" anchor="ctr" wrap="square"/>
           <a:lstStyle/>
           <a:p>
             <a:pPr algn="ctr"/>
-            <a:endParaRPr/>
           </a:p>
         </p:txBody>
       </p:sp>
@@ -8864,7 +8271,7 @@
           <a:noFill/>
         </p:spPr>
         <p:txBody>
-          <a:bodyPr wrap="square" lIns="25400" tIns="25400" rIns="25400" bIns="25400" anchor="ctr">
+          <a:bodyPr wrap="square" anchor="ctr" lIns="25400" rIns="25400" tIns="25400" bIns="25400">
             <a:spAutoFit/>
           </a:bodyPr>
           <a:lstStyle/>
@@ -8903,7 +8310,7 @@
           <a:noFill/>
         </p:spPr>
         <p:txBody>
-          <a:bodyPr wrap="square" lIns="25400" tIns="25400" rIns="25400" bIns="25400" anchor="t">
+          <a:bodyPr wrap="square" anchor="t" lIns="25400" rIns="25400" tIns="25400" bIns="25400">
             <a:spAutoFit/>
           </a:bodyPr>
           <a:lstStyle/>
@@ -8942,7 +8349,7 @@
           <a:noFill/>
         </p:spPr>
         <p:txBody>
-          <a:bodyPr wrap="square" lIns="25400" tIns="25400" rIns="25400" bIns="25400" anchor="t">
+          <a:bodyPr wrap="square" anchor="t" lIns="25400" rIns="25400" tIns="25400" bIns="25400">
             <a:spAutoFit/>
           </a:bodyPr>
           <a:lstStyle/>
@@ -8973,7 +8380,7 @@
 </file>
 
 <file path=ppt/slides/slide14.xml><?xml version="1.0" encoding="utf-8"?>
-<p:sld xmlns:a="http://schemas.openxmlformats.org/drawingml/2006/main" xmlns:r="http://schemas.openxmlformats.org/officeDocument/2006/relationships" xmlns:p="http://schemas.openxmlformats.org/presentationml/2006/main">
+<p:sld xmlns:a="http://schemas.openxmlformats.org/drawingml/2006/main" xmlns:p="http://schemas.openxmlformats.org/presentationml/2006/main" xmlns:r="http://schemas.openxmlformats.org/officeDocument/2006/relationships">
   <p:cSld>
     <p:spTree>
       <p:nvGrpSpPr>
@@ -8981,14 +8388,7 @@
         <p:cNvGrpSpPr/>
         <p:nvPr/>
       </p:nvGrpSpPr>
-      <p:grpSpPr>
-        <a:xfrm>
-          <a:off x="0" y="0"/>
-          <a:ext cx="0" cy="0"/>
-          <a:chOff x="0" y="0"/>
-          <a:chExt cx="0" cy="0"/>
-        </a:xfrm>
-      </p:grpSpPr>
+      <p:grpSpPr/>
       <p:sp>
         <p:nvSpPr>
           <p:cNvPr id="2" name="Rectangle 1"/>
@@ -9029,7 +8429,6 @@
           <a:lstStyle/>
           <a:p>
             <a:pPr algn="ctr"/>
-            <a:endParaRPr/>
           </a:p>
         </p:txBody>
       </p:sp>
@@ -9050,7 +8449,7 @@
           <a:noFill/>
         </p:spPr>
         <p:txBody>
-          <a:bodyPr wrap="square" lIns="25400" tIns="25400" rIns="25400" bIns="25400" anchor="t">
+          <a:bodyPr wrap="square" anchor="t" lIns="25400" rIns="25400" tIns="25400" bIns="25400">
             <a:spAutoFit/>
           </a:bodyPr>
           <a:lstStyle/>
@@ -9089,7 +8488,7 @@
           <a:noFill/>
         </p:spPr>
         <p:txBody>
-          <a:bodyPr wrap="square" lIns="25400" tIns="25400" rIns="25400" bIns="25400" anchor="t">
+          <a:bodyPr wrap="square" anchor="t" lIns="25400" rIns="25400" tIns="25400" bIns="25400">
             <a:spAutoFit/>
           </a:bodyPr>
           <a:lstStyle/>
@@ -9151,7 +8550,6 @@
           <a:lstStyle/>
           <a:p>
             <a:pPr algn="ctr"/>
-            <a:endParaRPr/>
           </a:p>
         </p:txBody>
       </p:sp>
@@ -9172,7 +8570,7 @@
           <a:noFill/>
         </p:spPr>
         <p:txBody>
-          <a:bodyPr wrap="square" lIns="25400" tIns="25400" rIns="25400" bIns="25400" anchor="t">
+          <a:bodyPr wrap="square" anchor="t" lIns="25400" rIns="25400" tIns="25400" bIns="25400">
             <a:spAutoFit/>
           </a:bodyPr>
           <a:lstStyle/>
@@ -9232,7 +8630,7 @@
           </a:fontRef>
         </p:style>
         <p:txBody>
-          <a:bodyPr wrap="square" tIns="38100" bIns="38100" rtlCol="0" anchor="ctr"/>
+          <a:bodyPr rtlCol="0" anchor="ctr" wrap="square" tIns="38100" bIns="38100"/>
           <a:lstStyle/>
           <a:p>
             <a:pPr algn="ctr"/>
@@ -9300,7 +8698,6 @@
           <a:lstStyle/>
           <a:p>
             <a:pPr algn="ctr"/>
-            <a:endParaRPr/>
           </a:p>
         </p:txBody>
       </p:sp>
@@ -9342,7 +8739,7 @@
           </a:fontRef>
         </p:style>
         <p:txBody>
-          <a:bodyPr wrap="square" tIns="38100" bIns="38100" rtlCol="0" anchor="ctr"/>
+          <a:bodyPr rtlCol="0" anchor="ctr" wrap="square" tIns="38100" bIns="38100"/>
           <a:lstStyle/>
           <a:p>
             <a:pPr algn="ctr"/>
@@ -9410,7 +8807,6 @@
           <a:lstStyle/>
           <a:p>
             <a:pPr algn="ctr"/>
-            <a:endParaRPr/>
           </a:p>
         </p:txBody>
       </p:sp>
@@ -9452,7 +8848,7 @@
           </a:fontRef>
         </p:style>
         <p:txBody>
-          <a:bodyPr wrap="square" tIns="38100" bIns="38100" rtlCol="0" anchor="ctr"/>
+          <a:bodyPr rtlCol="0" anchor="ctr" wrap="square" tIns="38100" bIns="38100"/>
           <a:lstStyle/>
           <a:p>
             <a:pPr algn="ctr"/>
@@ -9497,7 +8893,7 @@
           <a:noFill/>
         </p:spPr>
         <p:txBody>
-          <a:bodyPr wrap="square" lIns="25400" tIns="25400" rIns="25400" bIns="25400" anchor="t">
+          <a:bodyPr wrap="square" anchor="t" lIns="25400" rIns="25400" tIns="25400" bIns="25400">
             <a:spAutoFit/>
           </a:bodyPr>
           <a:lstStyle/>
@@ -9557,7 +8953,7 @@
           </a:fontRef>
         </p:style>
         <p:txBody>
-          <a:bodyPr wrap="square" tIns="38100" bIns="38100" rtlCol="0" anchor="ctr"/>
+          <a:bodyPr rtlCol="0" anchor="ctr" wrap="square" tIns="38100" bIns="38100"/>
           <a:lstStyle/>
           <a:p>
             <a:pPr algn="ctr"/>
@@ -9625,7 +9021,6 @@
           <a:lstStyle/>
           <a:p>
             <a:pPr algn="ctr"/>
-            <a:endParaRPr/>
           </a:p>
         </p:txBody>
       </p:sp>
@@ -9667,7 +9062,7 @@
           </a:fontRef>
         </p:style>
         <p:txBody>
-          <a:bodyPr wrap="square" tIns="38100" bIns="38100" rtlCol="0" anchor="ctr"/>
+          <a:bodyPr rtlCol="0" anchor="ctr" wrap="square" tIns="38100" bIns="38100"/>
           <a:lstStyle/>
           <a:p>
             <a:pPr algn="ctr"/>
@@ -9735,7 +9130,6 @@
           <a:lstStyle/>
           <a:p>
             <a:pPr algn="ctr"/>
-            <a:endParaRPr/>
           </a:p>
         </p:txBody>
       </p:sp>
@@ -9777,7 +9171,7 @@
           </a:fontRef>
         </p:style>
         <p:txBody>
-          <a:bodyPr wrap="square" tIns="38100" bIns="38100" rtlCol="0" anchor="ctr"/>
+          <a:bodyPr rtlCol="0" anchor="ctr" wrap="square" tIns="38100" bIns="38100"/>
           <a:lstStyle/>
           <a:p>
             <a:pPr algn="ctr"/>
@@ -9845,11 +9239,10 @@
           </a:fontRef>
         </p:style>
         <p:txBody>
-          <a:bodyPr wrap="square" rtlCol="0" anchor="ctr"/>
+          <a:bodyPr rtlCol="0" anchor="ctr" wrap="square"/>
           <a:lstStyle/>
           <a:p>
             <a:pPr algn="ctr"/>
-            <a:endParaRPr/>
           </a:p>
         </p:txBody>
       </p:sp>
@@ -9870,7 +9263,7 @@
           <a:noFill/>
         </p:spPr>
         <p:txBody>
-          <a:bodyPr wrap="square" lIns="25400" tIns="25400" rIns="25400" bIns="25400" anchor="ctr">
+          <a:bodyPr wrap="square" anchor="ctr" lIns="25400" rIns="25400" tIns="25400" bIns="25400">
             <a:spAutoFit/>
           </a:bodyPr>
           <a:lstStyle/>
@@ -9933,11 +9326,10 @@
           </a:fontRef>
         </p:style>
         <p:txBody>
-          <a:bodyPr wrap="square" rtlCol="0" anchor="ctr"/>
+          <a:bodyPr rtlCol="0" anchor="ctr" wrap="square"/>
           <a:lstStyle/>
           <a:p>
             <a:pPr algn="ctr"/>
-            <a:endParaRPr/>
           </a:p>
         </p:txBody>
       </p:sp>
@@ -9958,7 +9350,7 @@
           <a:noFill/>
         </p:spPr>
         <p:txBody>
-          <a:bodyPr wrap="square" lIns="25400" tIns="25400" rIns="25400" bIns="25400" anchor="ctr">
+          <a:bodyPr wrap="square" anchor="ctr" lIns="25400" rIns="25400" tIns="25400" bIns="25400">
             <a:spAutoFit/>
           </a:bodyPr>
           <a:lstStyle/>
@@ -10000,7 +9392,7 @@
           <a:noFill/>
         </p:spPr>
         <p:txBody>
-          <a:bodyPr wrap="square" lIns="25400" tIns="25400" rIns="25400" bIns="25400" anchor="t">
+          <a:bodyPr wrap="square" anchor="t" lIns="25400" rIns="25400" tIns="25400" bIns="25400">
             <a:spAutoFit/>
           </a:bodyPr>
           <a:lstStyle/>
@@ -10031,7 +9423,7 @@
 </file>
 
 <file path=ppt/slides/slide15.xml><?xml version="1.0" encoding="utf-8"?>
-<p:sld xmlns:a="http://schemas.openxmlformats.org/drawingml/2006/main" xmlns:r="http://schemas.openxmlformats.org/officeDocument/2006/relationships" xmlns:p="http://schemas.openxmlformats.org/presentationml/2006/main">
+<p:sld xmlns:a="http://schemas.openxmlformats.org/drawingml/2006/main" xmlns:p="http://schemas.openxmlformats.org/presentationml/2006/main" xmlns:r="http://schemas.openxmlformats.org/officeDocument/2006/relationships">
   <p:cSld>
     <p:spTree>
       <p:nvGrpSpPr>
@@ -10039,14 +9431,7 @@
         <p:cNvGrpSpPr/>
         <p:nvPr/>
       </p:nvGrpSpPr>
-      <p:grpSpPr>
-        <a:xfrm>
-          <a:off x="0" y="0"/>
-          <a:ext cx="0" cy="0"/>
-          <a:chOff x="0" y="0"/>
-          <a:chExt cx="0" cy="0"/>
-        </a:xfrm>
-      </p:grpSpPr>
+      <p:grpSpPr/>
       <p:sp>
         <p:nvSpPr>
           <p:cNvPr id="2" name="Rectangle 1"/>
@@ -10087,7 +9472,6 @@
           <a:lstStyle/>
           <a:p>
             <a:pPr algn="ctr"/>
-            <a:endParaRPr/>
           </a:p>
         </p:txBody>
       </p:sp>
@@ -10108,7 +9492,7 @@
           <a:noFill/>
         </p:spPr>
         <p:txBody>
-          <a:bodyPr wrap="square" lIns="25400" tIns="25400" rIns="25400" bIns="25400" anchor="t">
+          <a:bodyPr wrap="square" anchor="t" lIns="25400" rIns="25400" tIns="25400" bIns="25400">
             <a:spAutoFit/>
           </a:bodyPr>
           <a:lstStyle/>
@@ -10147,7 +9531,7 @@
           <a:noFill/>
         </p:spPr>
         <p:txBody>
-          <a:bodyPr wrap="square" lIns="25400" tIns="25400" rIns="25400" bIns="25400" anchor="t">
+          <a:bodyPr wrap="square" anchor="t" lIns="25400" rIns="25400" tIns="25400" bIns="25400">
             <a:spAutoFit/>
           </a:bodyPr>
           <a:lstStyle/>
@@ -10209,7 +9593,6 @@
           <a:lstStyle/>
           <a:p>
             <a:pPr algn="ctr"/>
-            <a:endParaRPr/>
           </a:p>
         </p:txBody>
       </p:sp>
@@ -10249,7 +9632,7 @@
           </a:fontRef>
         </p:style>
         <p:txBody>
-          <a:bodyPr wrap="none" lIns="0" tIns="0" rIns="0" bIns="0" rtlCol="0" anchor="ctr"/>
+          <a:bodyPr rtlCol="0" anchor="ctr" wrap="none" lIns="0" rIns="0" tIns="0" bIns="0"/>
           <a:lstStyle/>
           <a:p>
             <a:pPr algn="ctr"/>
@@ -10260,7 +9643,7 @@
                 </a:solidFill>
                 <a:latin typeface="Calibri"/>
               </a:rPr>
-              <a:t>⤢</a:t>
+              <a:t>1</a:t>
             </a:r>
           </a:p>
         </p:txBody>
@@ -10282,7 +9665,7 @@
           <a:noFill/>
         </p:spPr>
         <p:txBody>
-          <a:bodyPr wrap="square" lIns="25400" tIns="25400" rIns="25400" bIns="25400" anchor="t">
+          <a:bodyPr wrap="square" anchor="t" lIns="25400" rIns="25400" tIns="25400" bIns="25400">
             <a:spAutoFit/>
           </a:bodyPr>
           <a:lstStyle/>
@@ -10362,7 +9745,7 @@
           </a:fontRef>
         </p:style>
         <p:txBody>
-          <a:bodyPr wrap="none" lIns="0" tIns="0" rIns="0" bIns="0" rtlCol="0" anchor="ctr"/>
+          <a:bodyPr rtlCol="0" anchor="ctr" wrap="none" lIns="0" rIns="0" tIns="0" bIns="0"/>
           <a:lstStyle/>
           <a:p>
             <a:pPr algn="ctr"/>
@@ -10373,7 +9756,7 @@
                 </a:solidFill>
                 <a:latin typeface="Calibri"/>
               </a:rPr>
-              <a:t>⏱</a:t>
+              <a:t>2</a:t>
             </a:r>
           </a:p>
         </p:txBody>
@@ -10395,7 +9778,7 @@
           <a:noFill/>
         </p:spPr>
         <p:txBody>
-          <a:bodyPr wrap="square" lIns="25400" tIns="25400" rIns="25400" bIns="25400" anchor="t">
+          <a:bodyPr wrap="square" anchor="t" lIns="25400" rIns="25400" tIns="25400" bIns="25400">
             <a:spAutoFit/>
           </a:bodyPr>
           <a:lstStyle/>
@@ -10434,7 +9817,7 @@
                 </a:solidFill>
                 <a:latin typeface="Calibri"/>
               </a:rPr>
-              <a:t>A few seconds total — quick bursts, not background polling.</a:t>
+              <a:t>A few seconds total: quick bursts, not background polling.</a:t>
             </a:r>
           </a:p>
         </p:txBody>
@@ -10475,7 +9858,7 @@
           </a:fontRef>
         </p:style>
         <p:txBody>
-          <a:bodyPr wrap="none" lIns="0" tIns="0" rIns="0" bIns="0" rtlCol="0" anchor="ctr"/>
+          <a:bodyPr rtlCol="0" anchor="ctr" wrap="none" lIns="0" rIns="0" tIns="0" bIns="0"/>
           <a:lstStyle/>
           <a:p>
             <a:pPr algn="ctr"/>
@@ -10486,7 +9869,7 @@
                 </a:solidFill>
                 <a:latin typeface="Calibri"/>
               </a:rPr>
-              <a:t>↗</a:t>
+              <a:t>3</a:t>
             </a:r>
           </a:p>
         </p:txBody>
@@ -10508,7 +9891,7 @@
           <a:noFill/>
         </p:spPr>
         <p:txBody>
-          <a:bodyPr wrap="square" lIns="25400" tIns="25400" rIns="25400" bIns="25400" anchor="t">
+          <a:bodyPr wrap="square" anchor="t" lIns="25400" rIns="25400" tIns="25400" bIns="25400">
             <a:spAutoFit/>
           </a:bodyPr>
           <a:lstStyle/>
@@ -10588,25 +9971,19 @@
           </a:fontRef>
         </p:style>
         <p:txBody>
-          <a:bodyPr wrap="none" lIns="0" tIns="0" rIns="0" bIns="0" rtlCol="0" anchor="ctr"/>
+          <a:bodyPr rtlCol="0" anchor="ctr" wrap="none" lIns="0" rIns="0" tIns="0" bIns="0"/>
           <a:lstStyle/>
           <a:p>
             <a:pPr algn="ctr"/>
             <a:r>
-              <a:rPr lang="he-IL" sz="2100" dirty="0">
+              <a:rPr sz="2100">
                 <a:solidFill>
                   <a:srgbClr val="FFFFFF"/>
                 </a:solidFill>
                 <a:latin typeface="Calibri"/>
               </a:rPr>
-              <a:t>%</a:t>
-            </a:r>
-            <a:endParaRPr sz="2100" dirty="0">
-              <a:solidFill>
-                <a:srgbClr val="FFFFFF"/>
-              </a:solidFill>
-              <a:latin typeface="Calibri"/>
-            </a:endParaRPr>
+              <a:t>4</a:t>
+            </a:r>
           </a:p>
         </p:txBody>
       </p:sp>
@@ -10627,7 +10004,7 @@
           <a:noFill/>
         </p:spPr>
         <p:txBody>
-          <a:bodyPr wrap="square" lIns="25400" tIns="25400" rIns="25400" bIns="25400" anchor="t">
+          <a:bodyPr wrap="square" anchor="t" lIns="25400" rIns="25400" tIns="25400" bIns="25400">
             <a:spAutoFit/>
           </a:bodyPr>
           <a:lstStyle/>
@@ -10641,7 +10018,7 @@
               </a:spcAft>
             </a:pPr>
             <a:r>
-              <a:rPr sz="1450" b="1" i="0" dirty="0">
+              <a:rPr sz="1450" b="1" i="0">
                 <a:solidFill>
                   <a:srgbClr val="0F2A43"/>
                 </a:solidFill>
@@ -10660,7 +10037,7 @@
               </a:spcBef>
             </a:pPr>
             <a:r>
-              <a:rPr sz="1150" b="0" i="0" dirty="0">
+              <a:rPr sz="1150" b="0" i="0">
                 <a:solidFill>
                   <a:srgbClr val="6B7C8D"/>
                 </a:solidFill>
@@ -10707,7 +10084,7 @@
           </a:fontRef>
         </p:style>
         <p:txBody>
-          <a:bodyPr wrap="none" lIns="0" tIns="0" rIns="0" bIns="0" rtlCol="0" anchor="ctr"/>
+          <a:bodyPr rtlCol="0" anchor="ctr" wrap="none" lIns="0" rIns="0" tIns="0" bIns="0"/>
           <a:lstStyle/>
           <a:p>
             <a:pPr algn="ctr"/>
@@ -10718,7 +10095,7 @@
                 </a:solidFill>
                 <a:latin typeface="Calibri"/>
               </a:rPr>
-              <a:t>↻</a:t>
+              <a:t>5</a:t>
             </a:r>
           </a:p>
         </p:txBody>
@@ -10740,7 +10117,7 @@
           <a:noFill/>
         </p:spPr>
         <p:txBody>
-          <a:bodyPr wrap="square" lIns="25400" tIns="25400" rIns="25400" bIns="25400" anchor="t">
+          <a:bodyPr wrap="square" anchor="t" lIns="25400" rIns="25400" tIns="25400" bIns="25400">
             <a:spAutoFit/>
           </a:bodyPr>
           <a:lstStyle/>
@@ -10779,7 +10156,7 @@
                 </a:solidFill>
                 <a:latin typeface="Calibri"/>
               </a:rPr>
-              <a:t>Profiles fetched ~daily at a random time, not per check — saves data + battery.</a:t>
+              <a:t>Profiles fetched ~daily at a random time, not per check; saves data and battery.</a:t>
             </a:r>
           </a:p>
         </p:txBody>
@@ -10820,7 +10197,7 @@
           </a:fontRef>
         </p:style>
         <p:txBody>
-          <a:bodyPr wrap="none" lIns="0" tIns="0" rIns="0" bIns="0" rtlCol="0" anchor="ctr"/>
+          <a:bodyPr rtlCol="0" anchor="ctr" wrap="none" lIns="0" rIns="0" tIns="0" bIns="0"/>
           <a:lstStyle/>
           <a:p>
             <a:pPr algn="ctr"/>
@@ -10831,7 +10208,7 @@
                 </a:solidFill>
                 <a:latin typeface="Calibri"/>
               </a:rPr>
-              <a:t>⇣</a:t>
+              <a:t>6</a:t>
             </a:r>
           </a:p>
         </p:txBody>
@@ -10853,7 +10230,7 @@
           <a:noFill/>
         </p:spPr>
         <p:txBody>
-          <a:bodyPr wrap="square" lIns="25400" tIns="25400" rIns="25400" bIns="25400" anchor="t">
+          <a:bodyPr wrap="square" anchor="t" lIns="25400" rIns="25400" tIns="25400" bIns="25400">
             <a:spAutoFit/>
           </a:bodyPr>
           <a:lstStyle/>
@@ -10914,7 +10291,7 @@
           <a:noFill/>
         </p:spPr>
         <p:txBody>
-          <a:bodyPr wrap="square" lIns="25400" tIns="25400" rIns="25400" bIns="25400" anchor="t">
+          <a:bodyPr wrap="square" anchor="t" lIns="25400" rIns="25400" tIns="25400" bIns="25400">
             <a:spAutoFit/>
           </a:bodyPr>
           <a:lstStyle/>
@@ -10945,7 +10322,7 @@
 </file>
 
 <file path=ppt/slides/slide16.xml><?xml version="1.0" encoding="utf-8"?>
-<p:sld xmlns:a="http://schemas.openxmlformats.org/drawingml/2006/main" xmlns:r="http://schemas.openxmlformats.org/officeDocument/2006/relationships" xmlns:p="http://schemas.openxmlformats.org/presentationml/2006/main">
+<p:sld xmlns:a="http://schemas.openxmlformats.org/drawingml/2006/main" xmlns:p="http://schemas.openxmlformats.org/presentationml/2006/main" xmlns:r="http://schemas.openxmlformats.org/officeDocument/2006/relationships">
   <p:cSld>
     <p:spTree>
       <p:nvGrpSpPr>
@@ -10953,14 +10330,7 @@
         <p:cNvGrpSpPr/>
         <p:nvPr/>
       </p:nvGrpSpPr>
-      <p:grpSpPr>
-        <a:xfrm>
-          <a:off x="0" y="0"/>
-          <a:ext cx="0" cy="0"/>
-          <a:chOff x="0" y="0"/>
-          <a:chExt cx="0" cy="0"/>
-        </a:xfrm>
-      </p:grpSpPr>
+      <p:grpSpPr/>
       <p:sp>
         <p:nvSpPr>
           <p:cNvPr id="2" name="Rectangle 1"/>
@@ -11001,7 +10371,6 @@
           <a:lstStyle/>
           <a:p>
             <a:pPr algn="ctr"/>
-            <a:endParaRPr/>
           </a:p>
         </p:txBody>
       </p:sp>
@@ -11022,7 +10391,7 @@
           <a:noFill/>
         </p:spPr>
         <p:txBody>
-          <a:bodyPr wrap="square" lIns="25400" tIns="25400" rIns="25400" bIns="25400" anchor="t">
+          <a:bodyPr wrap="square" anchor="t" lIns="25400" rIns="25400" tIns="25400" bIns="25400">
             <a:spAutoFit/>
           </a:bodyPr>
           <a:lstStyle/>
@@ -11061,7 +10430,7 @@
           <a:noFill/>
         </p:spPr>
         <p:txBody>
-          <a:bodyPr wrap="square" lIns="25400" tIns="25400" rIns="25400" bIns="25400" anchor="t">
+          <a:bodyPr wrap="square" anchor="t" lIns="25400" rIns="25400" tIns="25400" bIns="25400">
             <a:spAutoFit/>
           </a:bodyPr>
           <a:lstStyle/>
@@ -11123,7 +10492,6 @@
           <a:lstStyle/>
           <a:p>
             <a:pPr algn="ctr"/>
-            <a:endParaRPr/>
           </a:p>
         </p:txBody>
       </p:sp>
@@ -11167,11 +10535,10 @@
           </a:fontRef>
         </p:style>
         <p:txBody>
-          <a:bodyPr wrap="square" rtlCol="0" anchor="ctr"/>
+          <a:bodyPr rtlCol="0" anchor="ctr" wrap="square"/>
           <a:lstStyle/>
           <a:p>
             <a:pPr algn="ctr"/>
-            <a:endParaRPr/>
           </a:p>
         </p:txBody>
       </p:sp>
@@ -11216,7 +10583,7 @@
           <a:p>
             <a:pPr algn="ctr"/>
             <a:r>
-              <a:rPr sz="1350" b="1">
+              <a:rPr b="1" sz="1350">
                 <a:solidFill>
                   <a:srgbClr val="FFFFFF"/>
                 </a:solidFill>
@@ -11244,7 +10611,7 @@
           <a:noFill/>
         </p:spPr>
         <p:txBody>
-          <a:bodyPr wrap="square" lIns="25400" tIns="25400" rIns="25400" bIns="25400" anchor="t">
+          <a:bodyPr wrap="square" anchor="t" lIns="25400" rIns="25400" tIns="25400" bIns="25400">
             <a:spAutoFit/>
           </a:bodyPr>
           <a:lstStyle/>
@@ -11366,11 +10733,10 @@
           </a:fontRef>
         </p:style>
         <p:txBody>
-          <a:bodyPr wrap="square" rtlCol="0" anchor="ctr"/>
+          <a:bodyPr rtlCol="0" anchor="ctr" wrap="square"/>
           <a:lstStyle/>
           <a:p>
             <a:pPr algn="ctr"/>
-            <a:endParaRPr/>
           </a:p>
         </p:txBody>
       </p:sp>
@@ -11415,7 +10781,7 @@
           <a:p>
             <a:pPr algn="ctr"/>
             <a:r>
-              <a:rPr sz="1350" b="1">
+              <a:rPr b="1" sz="1350">
                 <a:solidFill>
                   <a:srgbClr val="FFFFFF"/>
                 </a:solidFill>
@@ -11443,7 +10809,7 @@
           <a:noFill/>
         </p:spPr>
         <p:txBody>
-          <a:bodyPr wrap="square" lIns="25400" tIns="25400" rIns="25400" bIns="25400" anchor="t">
+          <a:bodyPr wrap="square" anchor="t" lIns="25400" rIns="25400" tIns="25400" bIns="25400">
             <a:spAutoFit/>
           </a:bodyPr>
           <a:lstStyle/>
@@ -11542,7 +10908,7 @@
           <a:noFill/>
         </p:spPr>
         <p:txBody>
-          <a:bodyPr wrap="square" lIns="25400" tIns="25400" rIns="25400" bIns="25400" anchor="t">
+          <a:bodyPr wrap="square" anchor="t" lIns="25400" rIns="25400" tIns="25400" bIns="25400">
             <a:spAutoFit/>
           </a:bodyPr>
           <a:lstStyle/>
@@ -11573,7 +10939,7 @@
 </file>
 
 <file path=ppt/slides/slide17.xml><?xml version="1.0" encoding="utf-8"?>
-<p:sld xmlns:a="http://schemas.openxmlformats.org/drawingml/2006/main" xmlns:r="http://schemas.openxmlformats.org/officeDocument/2006/relationships" xmlns:p="http://schemas.openxmlformats.org/presentationml/2006/main">
+<p:sld xmlns:a="http://schemas.openxmlformats.org/drawingml/2006/main" xmlns:p="http://schemas.openxmlformats.org/presentationml/2006/main" xmlns:r="http://schemas.openxmlformats.org/officeDocument/2006/relationships">
   <p:cSld>
     <p:spTree>
       <p:nvGrpSpPr>
@@ -11581,14 +10947,7 @@
         <p:cNvGrpSpPr/>
         <p:nvPr/>
       </p:nvGrpSpPr>
-      <p:grpSpPr>
-        <a:xfrm>
-          <a:off x="0" y="0"/>
-          <a:ext cx="0" cy="0"/>
-          <a:chOff x="0" y="0"/>
-          <a:chExt cx="0" cy="0"/>
-        </a:xfrm>
-      </p:grpSpPr>
+      <p:grpSpPr/>
       <p:sp>
         <p:nvSpPr>
           <p:cNvPr id="2" name="Rectangle 1"/>
@@ -11629,7 +10988,6 @@
           <a:lstStyle/>
           <a:p>
             <a:pPr algn="ctr"/>
-            <a:endParaRPr/>
           </a:p>
         </p:txBody>
       </p:sp>
@@ -11650,7 +11008,7 @@
           <a:noFill/>
         </p:spPr>
         <p:txBody>
-          <a:bodyPr wrap="square" lIns="25400" tIns="25400" rIns="25400" bIns="25400" anchor="t">
+          <a:bodyPr wrap="square" anchor="t" lIns="25400" rIns="25400" tIns="25400" bIns="25400">
             <a:spAutoFit/>
           </a:bodyPr>
           <a:lstStyle/>
@@ -11689,7 +11047,7 @@
           <a:noFill/>
         </p:spPr>
         <p:txBody>
-          <a:bodyPr wrap="square" lIns="25400" tIns="25400" rIns="25400" bIns="25400" anchor="t">
+          <a:bodyPr wrap="square" anchor="t" lIns="25400" rIns="25400" tIns="25400" bIns="25400">
             <a:spAutoFit/>
           </a:bodyPr>
           <a:lstStyle/>
@@ -11751,7 +11109,6 @@
           <a:lstStyle/>
           <a:p>
             <a:pPr algn="ctr"/>
-            <a:endParaRPr/>
           </a:p>
         </p:txBody>
       </p:sp>
@@ -11795,11 +11152,10 @@
           </a:fontRef>
         </p:style>
         <p:txBody>
-          <a:bodyPr wrap="square" rtlCol="0" anchor="ctr"/>
+          <a:bodyPr rtlCol="0" anchor="ctr" wrap="square"/>
           <a:lstStyle/>
           <a:p>
             <a:pPr algn="ctr"/>
-            <a:endParaRPr/>
           </a:p>
         </p:txBody>
       </p:sp>
@@ -11844,7 +11200,7 @@
           <a:p>
             <a:pPr algn="ctr"/>
             <a:r>
-              <a:rPr sz="1350" b="1">
+              <a:rPr b="1" sz="1350">
                 <a:solidFill>
                   <a:srgbClr val="FFFFFF"/>
                 </a:solidFill>
@@ -11872,7 +11228,7 @@
           <a:noFill/>
         </p:spPr>
         <p:txBody>
-          <a:bodyPr wrap="square" lIns="25400" tIns="25400" rIns="25400" bIns="25400" anchor="t">
+          <a:bodyPr wrap="square" anchor="t" lIns="25400" rIns="25400" tIns="25400" bIns="25400">
             <a:spAutoFit/>
           </a:bodyPr>
           <a:lstStyle/>
@@ -11994,11 +11350,10 @@
           </a:fontRef>
         </p:style>
         <p:txBody>
-          <a:bodyPr wrap="square" rtlCol="0" anchor="ctr"/>
+          <a:bodyPr rtlCol="0" anchor="ctr" wrap="square"/>
           <a:lstStyle/>
           <a:p>
             <a:pPr algn="ctr"/>
-            <a:endParaRPr/>
           </a:p>
         </p:txBody>
       </p:sp>
@@ -12043,7 +11398,7 @@
           <a:p>
             <a:pPr algn="ctr"/>
             <a:r>
-              <a:rPr sz="1350" b="1">
+              <a:rPr b="1" sz="1350">
                 <a:solidFill>
                   <a:srgbClr val="FFFFFF"/>
                 </a:solidFill>
@@ -12071,7 +11426,7 @@
           <a:noFill/>
         </p:spPr>
         <p:txBody>
-          <a:bodyPr wrap="square" lIns="25400" tIns="25400" rIns="25400" bIns="25400" anchor="t">
+          <a:bodyPr wrap="square" anchor="t" lIns="25400" rIns="25400" tIns="25400" bIns="25400">
             <a:spAutoFit/>
           </a:bodyPr>
           <a:lstStyle/>
@@ -12193,11 +11548,10 @@
           </a:fontRef>
         </p:style>
         <p:txBody>
-          <a:bodyPr wrap="square" rtlCol="0" anchor="ctr"/>
+          <a:bodyPr rtlCol="0" anchor="ctr" wrap="square"/>
           <a:lstStyle/>
           <a:p>
             <a:pPr algn="ctr"/>
-            <a:endParaRPr/>
           </a:p>
         </p:txBody>
       </p:sp>
@@ -12242,7 +11596,7 @@
           <a:p>
             <a:pPr algn="ctr"/>
             <a:r>
-              <a:rPr sz="1350" b="1">
+              <a:rPr b="1" sz="1350">
                 <a:solidFill>
                   <a:srgbClr val="FFFFFF"/>
                 </a:solidFill>
@@ -12270,7 +11624,7 @@
           <a:noFill/>
         </p:spPr>
         <p:txBody>
-          <a:bodyPr wrap="square" lIns="25400" tIns="25400" rIns="25400" bIns="25400" anchor="t">
+          <a:bodyPr wrap="square" anchor="t" lIns="25400" rIns="25400" tIns="25400" bIns="25400">
             <a:spAutoFit/>
           </a:bodyPr>
           <a:lstStyle/>
@@ -12390,11 +11744,10 @@
           </a:fontRef>
         </p:style>
         <p:txBody>
-          <a:bodyPr wrap="square" rtlCol="0" anchor="ctr"/>
+          <a:bodyPr rtlCol="0" anchor="ctr" wrap="square"/>
           <a:lstStyle/>
           <a:p>
             <a:pPr algn="ctr"/>
-            <a:endParaRPr/>
           </a:p>
         </p:txBody>
       </p:sp>
@@ -12415,7 +11768,7 @@
           <a:noFill/>
         </p:spPr>
         <p:txBody>
-          <a:bodyPr wrap="square" lIns="25400" tIns="25400" rIns="25400" bIns="25400" anchor="t">
+          <a:bodyPr wrap="square" anchor="t" lIns="25400" rIns="25400" tIns="25400" bIns="25400">
             <a:spAutoFit/>
           </a:bodyPr>
           <a:lstStyle/>
@@ -12492,7 +11845,7 @@
           <a:noFill/>
         </p:spPr>
         <p:txBody>
-          <a:bodyPr wrap="square" lIns="25400" tIns="25400" rIns="25400" bIns="25400" anchor="t">
+          <a:bodyPr wrap="square" anchor="t" lIns="25400" rIns="25400" tIns="25400" bIns="25400">
             <a:spAutoFit/>
           </a:bodyPr>
           <a:lstStyle/>
@@ -12523,7 +11876,7 @@
 </file>
 
 <file path=ppt/slides/slide18.xml><?xml version="1.0" encoding="utf-8"?>
-<p:sld xmlns:a="http://schemas.openxmlformats.org/drawingml/2006/main" xmlns:r="http://schemas.openxmlformats.org/officeDocument/2006/relationships" xmlns:p="http://schemas.openxmlformats.org/presentationml/2006/main">
+<p:sld xmlns:a="http://schemas.openxmlformats.org/drawingml/2006/main" xmlns:p="http://schemas.openxmlformats.org/presentationml/2006/main" xmlns:r="http://schemas.openxmlformats.org/officeDocument/2006/relationships">
   <p:cSld>
     <p:spTree>
       <p:nvGrpSpPr>
@@ -12531,14 +11884,7 @@
         <p:cNvGrpSpPr/>
         <p:nvPr/>
       </p:nvGrpSpPr>
-      <p:grpSpPr>
-        <a:xfrm>
-          <a:off x="0" y="0"/>
-          <a:ext cx="0" cy="0"/>
-          <a:chOff x="0" y="0"/>
-          <a:chExt cx="0" cy="0"/>
-        </a:xfrm>
-      </p:grpSpPr>
+      <p:grpSpPr/>
       <p:sp>
         <p:nvSpPr>
           <p:cNvPr id="2" name="Rectangle 1"/>
@@ -12579,7 +11925,6 @@
           <a:lstStyle/>
           <a:p>
             <a:pPr algn="ctr"/>
-            <a:endParaRPr/>
           </a:p>
         </p:txBody>
       </p:sp>
@@ -12600,7 +11945,7 @@
           <a:noFill/>
         </p:spPr>
         <p:txBody>
-          <a:bodyPr wrap="square" lIns="25400" tIns="25400" rIns="25400" bIns="25400" anchor="t">
+          <a:bodyPr wrap="square" anchor="t" lIns="25400" rIns="25400" tIns="25400" bIns="25400">
             <a:spAutoFit/>
           </a:bodyPr>
           <a:lstStyle/>
@@ -12639,7 +11984,7 @@
           <a:noFill/>
         </p:spPr>
         <p:txBody>
-          <a:bodyPr wrap="square" lIns="25400" tIns="25400" rIns="25400" bIns="25400" anchor="t">
+          <a:bodyPr wrap="square" anchor="t" lIns="25400" rIns="25400" tIns="25400" bIns="25400">
             <a:spAutoFit/>
           </a:bodyPr>
           <a:lstStyle/>
@@ -12701,7 +12046,6 @@
           <a:lstStyle/>
           <a:p>
             <a:pPr algn="ctr"/>
-            <a:endParaRPr/>
           </a:p>
         </p:txBody>
       </p:sp>
@@ -12745,11 +12089,10 @@
           </a:fontRef>
         </p:style>
         <p:txBody>
-          <a:bodyPr wrap="square" rtlCol="0" anchor="ctr"/>
+          <a:bodyPr rtlCol="0" anchor="ctr" wrap="square"/>
           <a:lstStyle/>
           <a:p>
             <a:pPr algn="ctr"/>
-            <a:endParaRPr/>
           </a:p>
         </p:txBody>
       </p:sp>
@@ -12793,7 +12136,6 @@
           <a:lstStyle/>
           <a:p>
             <a:pPr algn="ctr"/>
-            <a:endParaRPr/>
           </a:p>
         </p:txBody>
       </p:sp>
@@ -12814,7 +12156,7 @@
           <a:noFill/>
         </p:spPr>
         <p:txBody>
-          <a:bodyPr wrap="square" lIns="25400" tIns="25400" rIns="25400" bIns="25400" anchor="ctr">
+          <a:bodyPr wrap="square" anchor="ctr" lIns="25400" rIns="25400" tIns="25400" bIns="25400">
             <a:spAutoFit/>
           </a:bodyPr>
           <a:lstStyle/>
@@ -12853,7 +12195,7 @@
           <a:noFill/>
         </p:spPr>
         <p:txBody>
-          <a:bodyPr wrap="square" lIns="25400" tIns="25400" rIns="25400" bIns="25400" anchor="ctr">
+          <a:bodyPr wrap="square" anchor="ctr" lIns="25400" rIns="25400" tIns="25400" bIns="25400">
             <a:spAutoFit/>
           </a:bodyPr>
           <a:lstStyle/>
@@ -12870,7 +12212,7 @@
                 </a:solidFill>
                 <a:latin typeface="Calibri"/>
               </a:rPr>
-              <a:t>signed in: admin ▾</a:t>
+              <a:t>signed in: admin</a:t>
             </a:r>
           </a:p>
         </p:txBody>
@@ -12915,7 +12257,6 @@
           <a:lstStyle/>
           <a:p>
             <a:pPr algn="ctr"/>
-            <a:endParaRPr/>
           </a:p>
         </p:txBody>
       </p:sp>
@@ -12959,11 +12300,10 @@
           </a:fontRef>
         </p:style>
         <p:txBody>
-          <a:bodyPr wrap="square" rtlCol="0" anchor="ctr"/>
+          <a:bodyPr rtlCol="0" anchor="ctr" wrap="square"/>
           <a:lstStyle/>
           <a:p>
             <a:pPr algn="ctr"/>
-            <a:endParaRPr/>
           </a:p>
         </p:txBody>
       </p:sp>
@@ -12984,7 +12324,7 @@
           <a:noFill/>
         </p:spPr>
         <p:txBody>
-          <a:bodyPr wrap="square" lIns="25400" tIns="25400" rIns="25400" bIns="25400" anchor="ctr">
+          <a:bodyPr wrap="square" anchor="ctr" lIns="25400" rIns="25400" tIns="25400" bIns="25400">
             <a:spAutoFit/>
           </a:bodyPr>
           <a:lstStyle/>
@@ -13046,11 +12386,10 @@
           </a:fontRef>
         </p:style>
         <p:txBody>
-          <a:bodyPr wrap="square" rtlCol="0" anchor="ctr"/>
+          <a:bodyPr rtlCol="0" anchor="ctr" wrap="square"/>
           <a:lstStyle/>
           <a:p>
             <a:pPr algn="ctr"/>
-            <a:endParaRPr/>
           </a:p>
         </p:txBody>
       </p:sp>
@@ -13071,7 +12410,7 @@
           <a:noFill/>
         </p:spPr>
         <p:txBody>
-          <a:bodyPr wrap="square" lIns="25400" tIns="25400" rIns="25400" bIns="25400" anchor="ctr">
+          <a:bodyPr wrap="square" anchor="ctr" lIns="25400" rIns="25400" tIns="25400" bIns="25400">
             <a:spAutoFit/>
           </a:bodyPr>
           <a:lstStyle/>
@@ -13133,11 +12472,10 @@
           </a:fontRef>
         </p:style>
         <p:txBody>
-          <a:bodyPr wrap="square" rtlCol="0" anchor="ctr"/>
+          <a:bodyPr rtlCol="0" anchor="ctr" wrap="square"/>
           <a:lstStyle/>
           <a:p>
             <a:pPr algn="ctr"/>
-            <a:endParaRPr/>
           </a:p>
         </p:txBody>
       </p:sp>
@@ -13158,7 +12496,7 @@
           <a:noFill/>
         </p:spPr>
         <p:txBody>
-          <a:bodyPr wrap="square" lIns="25400" tIns="25400" rIns="25400" bIns="25400" anchor="ctr">
+          <a:bodyPr wrap="square" anchor="ctr" lIns="25400" rIns="25400" tIns="25400" bIns="25400">
             <a:spAutoFit/>
           </a:bodyPr>
           <a:lstStyle/>
@@ -13220,11 +12558,10 @@
           </a:fontRef>
         </p:style>
         <p:txBody>
-          <a:bodyPr wrap="square" rtlCol="0" anchor="ctr"/>
+          <a:bodyPr rtlCol="0" anchor="ctr" wrap="square"/>
           <a:lstStyle/>
           <a:p>
             <a:pPr algn="ctr"/>
-            <a:endParaRPr/>
           </a:p>
         </p:txBody>
       </p:sp>
@@ -13245,7 +12582,7 @@
           <a:noFill/>
         </p:spPr>
         <p:txBody>
-          <a:bodyPr wrap="square" lIns="25400" tIns="25400" rIns="25400" bIns="25400" anchor="ctr">
+          <a:bodyPr wrap="square" anchor="ctr" lIns="25400" rIns="25400" tIns="25400" bIns="25400">
             <a:spAutoFit/>
           </a:bodyPr>
           <a:lstStyle/>
@@ -13307,11 +12644,10 @@
           </a:fontRef>
         </p:style>
         <p:txBody>
-          <a:bodyPr wrap="square" rtlCol="0" anchor="ctr"/>
+          <a:bodyPr rtlCol="0" anchor="ctr" wrap="square"/>
           <a:lstStyle/>
           <a:p>
             <a:pPr algn="ctr"/>
-            <a:endParaRPr/>
           </a:p>
         </p:txBody>
       </p:sp>
@@ -13332,7 +12668,7 @@
           <a:noFill/>
         </p:spPr>
         <p:txBody>
-          <a:bodyPr wrap="square" lIns="25400" tIns="25400" rIns="25400" bIns="25400" anchor="ctr">
+          <a:bodyPr wrap="square" anchor="ctr" lIns="25400" rIns="25400" tIns="25400" bIns="25400">
             <a:spAutoFit/>
           </a:bodyPr>
           <a:lstStyle/>
@@ -13394,11 +12730,10 @@
           </a:fontRef>
         </p:style>
         <p:txBody>
-          <a:bodyPr wrap="square" rtlCol="0" anchor="ctr"/>
+          <a:bodyPr rtlCol="0" anchor="ctr" wrap="square"/>
           <a:lstStyle/>
           <a:p>
             <a:pPr algn="ctr"/>
-            <a:endParaRPr/>
           </a:p>
         </p:txBody>
       </p:sp>
@@ -13419,7 +12754,7 @@
           <a:noFill/>
         </p:spPr>
         <p:txBody>
-          <a:bodyPr wrap="square" lIns="25400" tIns="25400" rIns="25400" bIns="25400" anchor="ctr">
+          <a:bodyPr wrap="square" anchor="ctr" lIns="25400" rIns="25400" tIns="25400" bIns="25400">
             <a:spAutoFit/>
           </a:bodyPr>
           <a:lstStyle/>
@@ -13479,11 +12814,10 @@
           </a:fontRef>
         </p:style>
         <p:txBody>
-          <a:bodyPr wrap="square" rtlCol="0" anchor="ctr"/>
+          <a:bodyPr rtlCol="0" anchor="ctr" wrap="square"/>
           <a:lstStyle/>
           <a:p>
             <a:pPr algn="ctr"/>
-            <a:endParaRPr/>
           </a:p>
         </p:txBody>
       </p:sp>
@@ -13504,7 +12838,7 @@
           <a:noFill/>
         </p:spPr>
         <p:txBody>
-          <a:bodyPr wrap="square" lIns="25400" tIns="25400" rIns="25400" bIns="25400" anchor="t">
+          <a:bodyPr wrap="square" anchor="t" lIns="25400" rIns="25400" tIns="25400" bIns="25400">
             <a:spAutoFit/>
           </a:bodyPr>
           <a:lstStyle/>
@@ -13583,11 +12917,10 @@
           </a:fontRef>
         </p:style>
         <p:txBody>
-          <a:bodyPr wrap="square" rtlCol="0" anchor="ctr"/>
+          <a:bodyPr rtlCol="0" anchor="ctr" wrap="square"/>
           <a:lstStyle/>
           <a:p>
             <a:pPr algn="ctr"/>
-            <a:endParaRPr/>
           </a:p>
         </p:txBody>
       </p:sp>
@@ -13608,7 +12941,7 @@
           <a:noFill/>
         </p:spPr>
         <p:txBody>
-          <a:bodyPr wrap="square" lIns="25400" tIns="25400" rIns="25400" bIns="25400" anchor="t">
+          <a:bodyPr wrap="square" anchor="t" lIns="25400" rIns="25400" tIns="25400" bIns="25400">
             <a:spAutoFit/>
           </a:bodyPr>
           <a:lstStyle/>
@@ -13687,11 +13020,10 @@
           </a:fontRef>
         </p:style>
         <p:txBody>
-          <a:bodyPr wrap="square" rtlCol="0" anchor="ctr"/>
+          <a:bodyPr rtlCol="0" anchor="ctr" wrap="square"/>
           <a:lstStyle/>
           <a:p>
             <a:pPr algn="ctr"/>
-            <a:endParaRPr/>
           </a:p>
         </p:txBody>
       </p:sp>
@@ -13712,7 +13044,7 @@
           <a:noFill/>
         </p:spPr>
         <p:txBody>
-          <a:bodyPr wrap="square" lIns="25400" tIns="25400" rIns="25400" bIns="25400" anchor="t">
+          <a:bodyPr wrap="square" anchor="t" lIns="25400" rIns="25400" tIns="25400" bIns="25400">
             <a:spAutoFit/>
           </a:bodyPr>
           <a:lstStyle/>
@@ -13791,11 +13123,10 @@
           </a:fontRef>
         </p:style>
         <p:txBody>
-          <a:bodyPr wrap="square" rtlCol="0" anchor="ctr"/>
+          <a:bodyPr rtlCol="0" anchor="ctr" wrap="square"/>
           <a:lstStyle/>
           <a:p>
             <a:pPr algn="ctr"/>
-            <a:endParaRPr/>
           </a:p>
         </p:txBody>
       </p:sp>
@@ -13816,7 +13147,7 @@
           <a:noFill/>
         </p:spPr>
         <p:txBody>
-          <a:bodyPr wrap="square" lIns="25400" tIns="25400" rIns="25400" bIns="25400" anchor="t">
+          <a:bodyPr wrap="square" anchor="t" lIns="25400" rIns="25400" tIns="25400" bIns="25400">
             <a:spAutoFit/>
           </a:bodyPr>
           <a:lstStyle/>
@@ -13895,11 +13226,10 @@
           </a:fontRef>
         </p:style>
         <p:txBody>
-          <a:bodyPr wrap="square" rtlCol="0" anchor="ctr"/>
+          <a:bodyPr rtlCol="0" anchor="ctr" wrap="square"/>
           <a:lstStyle/>
           <a:p>
             <a:pPr algn="ctr"/>
-            <a:endParaRPr/>
           </a:p>
         </p:txBody>
       </p:sp>
@@ -13920,7 +13250,7 @@
           <a:noFill/>
         </p:spPr>
         <p:txBody>
-          <a:bodyPr wrap="square" lIns="25400" tIns="25400" rIns="25400" bIns="25400" anchor="t">
+          <a:bodyPr wrap="square" anchor="t" lIns="25400" rIns="25400" tIns="25400" bIns="25400">
             <a:spAutoFit/>
           </a:bodyPr>
           <a:lstStyle/>
@@ -13982,11 +13312,10 @@
           </a:fontRef>
         </p:style>
         <p:txBody>
-          <a:bodyPr wrap="square" rtlCol="0" anchor="ctr"/>
+          <a:bodyPr rtlCol="0" anchor="ctr" wrap="square"/>
           <a:lstStyle/>
           <a:p>
             <a:pPr algn="ctr"/>
-            <a:endParaRPr/>
           </a:p>
         </p:txBody>
       </p:sp>
@@ -14007,7 +13336,7 @@
           <a:noFill/>
         </p:spPr>
         <p:txBody>
-          <a:bodyPr wrap="square" lIns="25400" tIns="25400" rIns="25400" bIns="25400" anchor="ctr">
+          <a:bodyPr wrap="square" anchor="ctr" lIns="25400" rIns="25400" tIns="25400" bIns="25400">
             <a:spAutoFit/>
           </a:bodyPr>
           <a:lstStyle/>
@@ -14069,11 +13398,10 @@
           </a:fontRef>
         </p:style>
         <p:txBody>
-          <a:bodyPr wrap="square" rtlCol="0" anchor="ctr"/>
+          <a:bodyPr rtlCol="0" anchor="ctr" wrap="square"/>
           <a:lstStyle/>
           <a:p>
             <a:pPr algn="ctr"/>
-            <a:endParaRPr/>
           </a:p>
         </p:txBody>
       </p:sp>
@@ -14094,7 +13422,7 @@
           <a:noFill/>
         </p:spPr>
         <p:txBody>
-          <a:bodyPr wrap="square" lIns="25400" tIns="25400" rIns="25400" bIns="25400" anchor="ctr">
+          <a:bodyPr wrap="square" anchor="ctr" lIns="25400" rIns="25400" tIns="25400" bIns="25400">
             <a:spAutoFit/>
           </a:bodyPr>
           <a:lstStyle/>
@@ -14156,11 +13484,10 @@
           </a:fontRef>
         </p:style>
         <p:txBody>
-          <a:bodyPr wrap="square" rtlCol="0" anchor="ctr"/>
+          <a:bodyPr rtlCol="0" anchor="ctr" wrap="square"/>
           <a:lstStyle/>
           <a:p>
             <a:pPr algn="ctr"/>
-            <a:endParaRPr/>
           </a:p>
         </p:txBody>
       </p:sp>
@@ -14181,7 +13508,7 @@
           <a:noFill/>
         </p:spPr>
         <p:txBody>
-          <a:bodyPr wrap="square" lIns="25400" tIns="25400" rIns="25400" bIns="25400" anchor="ctr">
+          <a:bodyPr wrap="square" anchor="ctr" lIns="25400" rIns="25400" tIns="25400" bIns="25400">
             <a:spAutoFit/>
           </a:bodyPr>
           <a:lstStyle/>
@@ -14243,11 +13570,10 @@
           </a:fontRef>
         </p:style>
         <p:txBody>
-          <a:bodyPr wrap="square" rtlCol="0" anchor="ctr"/>
+          <a:bodyPr rtlCol="0" anchor="ctr" wrap="square"/>
           <a:lstStyle/>
           <a:p>
             <a:pPr algn="ctr"/>
-            <a:endParaRPr/>
           </a:p>
         </p:txBody>
       </p:sp>
@@ -14268,7 +13594,7 @@
           <a:noFill/>
         </p:spPr>
         <p:txBody>
-          <a:bodyPr wrap="square" lIns="25400" tIns="25400" rIns="25400" bIns="25400" anchor="ctr">
+          <a:bodyPr wrap="square" anchor="ctr" lIns="25400" rIns="25400" tIns="25400" bIns="25400">
             <a:spAutoFit/>
           </a:bodyPr>
           <a:lstStyle/>
@@ -14328,11 +13654,10 @@
           </a:fontRef>
         </p:style>
         <p:txBody>
-          <a:bodyPr wrap="square" rtlCol="0" anchor="ctr"/>
+          <a:bodyPr rtlCol="0" anchor="ctr" wrap="square"/>
           <a:lstStyle/>
           <a:p>
             <a:pPr algn="ctr"/>
-            <a:endParaRPr/>
           </a:p>
         </p:txBody>
       </p:sp>
@@ -14353,7 +13678,7 @@
           <a:noFill/>
         </p:spPr>
         <p:txBody>
-          <a:bodyPr wrap="square" lIns="25400" tIns="25400" rIns="25400" bIns="25400" anchor="t">
+          <a:bodyPr wrap="square" anchor="t" lIns="25400" rIns="25400" tIns="25400" bIns="25400">
             <a:spAutoFit/>
           </a:bodyPr>
           <a:lstStyle/>
@@ -14415,7 +13740,6 @@
           <a:lstStyle/>
           <a:p>
             <a:pPr algn="ctr"/>
-            <a:endParaRPr/>
           </a:p>
         </p:txBody>
       </p:sp>
@@ -14459,7 +13783,6 @@
           <a:lstStyle/>
           <a:p>
             <a:pPr algn="ctr"/>
-            <a:endParaRPr/>
           </a:p>
         </p:txBody>
       </p:sp>
@@ -14503,7 +13826,6 @@
           <a:lstStyle/>
           <a:p>
             <a:pPr algn="ctr"/>
-            <a:endParaRPr/>
           </a:p>
         </p:txBody>
       </p:sp>
@@ -14547,7 +13869,6 @@
           <a:lstStyle/>
           <a:p>
             <a:pPr algn="ctr"/>
-            <a:endParaRPr/>
           </a:p>
         </p:txBody>
       </p:sp>
@@ -14591,7 +13912,6 @@
           <a:lstStyle/>
           <a:p>
             <a:pPr algn="ctr"/>
-            <a:endParaRPr/>
           </a:p>
         </p:txBody>
       </p:sp>
@@ -14635,7 +13955,6 @@
           <a:lstStyle/>
           <a:p>
             <a:pPr algn="ctr"/>
-            <a:endParaRPr/>
           </a:p>
         </p:txBody>
       </p:sp>
@@ -14679,7 +13998,6 @@
           <a:lstStyle/>
           <a:p>
             <a:pPr algn="ctr"/>
-            <a:endParaRPr/>
           </a:p>
         </p:txBody>
       </p:sp>
@@ -14700,7 +14018,7 @@
           <a:noFill/>
         </p:spPr>
         <p:txBody>
-          <a:bodyPr wrap="square" lIns="25400" tIns="25400" rIns="25400" bIns="25400" anchor="t">
+          <a:bodyPr wrap="square" anchor="t" lIns="25400" rIns="25400" tIns="25400" bIns="25400">
             <a:spAutoFit/>
           </a:bodyPr>
           <a:lstStyle/>
@@ -14731,7 +14049,7 @@
 </file>
 
 <file path=ppt/slides/slide19.xml><?xml version="1.0" encoding="utf-8"?>
-<p:sld xmlns:a="http://schemas.openxmlformats.org/drawingml/2006/main" xmlns:r="http://schemas.openxmlformats.org/officeDocument/2006/relationships" xmlns:p="http://schemas.openxmlformats.org/presentationml/2006/main">
+<p:sld xmlns:a="http://schemas.openxmlformats.org/drawingml/2006/main" xmlns:p="http://schemas.openxmlformats.org/presentationml/2006/main" xmlns:r="http://schemas.openxmlformats.org/officeDocument/2006/relationships">
   <p:cSld>
     <p:spTree>
       <p:nvGrpSpPr>
@@ -14739,14 +14057,7 @@
         <p:cNvGrpSpPr/>
         <p:nvPr/>
       </p:nvGrpSpPr>
-      <p:grpSpPr>
-        <a:xfrm>
-          <a:off x="0" y="0"/>
-          <a:ext cx="0" cy="0"/>
-          <a:chOff x="0" y="0"/>
-          <a:chExt cx="0" cy="0"/>
-        </a:xfrm>
-      </p:grpSpPr>
+      <p:grpSpPr/>
       <p:sp>
         <p:nvSpPr>
           <p:cNvPr id="2" name="Rectangle 1"/>
@@ -14787,7 +14098,6 @@
           <a:lstStyle/>
           <a:p>
             <a:pPr algn="ctr"/>
-            <a:endParaRPr/>
           </a:p>
         </p:txBody>
       </p:sp>
@@ -14808,7 +14118,7 @@
           <a:noFill/>
         </p:spPr>
         <p:txBody>
-          <a:bodyPr wrap="square" lIns="25400" tIns="25400" rIns="25400" bIns="25400" anchor="t">
+          <a:bodyPr wrap="square" anchor="t" lIns="25400" rIns="25400" tIns="25400" bIns="25400">
             <a:spAutoFit/>
           </a:bodyPr>
           <a:lstStyle/>
@@ -14847,7 +14157,7 @@
           <a:noFill/>
         </p:spPr>
         <p:txBody>
-          <a:bodyPr wrap="square" lIns="25400" tIns="25400" rIns="25400" bIns="25400" anchor="t">
+          <a:bodyPr wrap="square" anchor="t" lIns="25400" rIns="25400" tIns="25400" bIns="25400">
             <a:spAutoFit/>
           </a:bodyPr>
           <a:lstStyle/>
@@ -14909,7 +14219,6 @@
           <a:lstStyle/>
           <a:p>
             <a:pPr algn="ctr"/>
-            <a:endParaRPr/>
           </a:p>
         </p:txBody>
       </p:sp>
@@ -14930,7 +14239,7 @@
           <a:noFill/>
         </p:spPr>
         <p:txBody>
-          <a:bodyPr wrap="square" lIns="25400" tIns="25400" rIns="25400" bIns="25400" anchor="t">
+          <a:bodyPr wrap="square" anchor="t" lIns="25400" rIns="25400" tIns="25400" bIns="25400">
             <a:spAutoFit/>
           </a:bodyPr>
           <a:lstStyle/>
@@ -14992,11 +14301,10 @@
           </a:fontRef>
         </p:style>
         <p:txBody>
-          <a:bodyPr wrap="square" rtlCol="0" anchor="ctr"/>
+          <a:bodyPr rtlCol="0" anchor="ctr" wrap="square"/>
           <a:lstStyle/>
           <a:p>
             <a:pPr algn="ctr"/>
-            <a:endParaRPr/>
           </a:p>
         </p:txBody>
       </p:sp>
@@ -15041,7 +14349,7 @@
           <a:p>
             <a:pPr algn="ctr"/>
             <a:r>
-              <a:rPr sz="1250" b="1">
+              <a:rPr b="1" sz="1250">
                 <a:solidFill>
                   <a:srgbClr val="FFFFFF"/>
                 </a:solidFill>
@@ -15068,7 +14376,7 @@
           <a:noFill/>
         </p:spPr>
         <p:txBody>
-          <a:bodyPr wrap="square" lIns="25400" tIns="25400" rIns="25400" bIns="25400" anchor="t">
+          <a:bodyPr wrap="square" anchor="t" lIns="25400" rIns="25400" tIns="25400" bIns="25400">
             <a:spAutoFit/>
           </a:bodyPr>
           <a:lstStyle/>
@@ -15228,11 +14536,10 @@
           </a:fontRef>
         </p:style>
         <p:txBody>
-          <a:bodyPr wrap="square" rtlCol="0" anchor="ctr"/>
+          <a:bodyPr rtlCol="0" anchor="ctr" wrap="square"/>
           <a:lstStyle/>
           <a:p>
             <a:pPr algn="ctr"/>
-            <a:endParaRPr/>
           </a:p>
         </p:txBody>
       </p:sp>
@@ -15277,7 +14584,7 @@
           <a:p>
             <a:pPr algn="ctr"/>
             <a:r>
-              <a:rPr sz="1250" b="1">
+              <a:rPr b="1" sz="1250">
                 <a:solidFill>
                   <a:srgbClr val="FFFFFF"/>
                 </a:solidFill>
@@ -15304,7 +14611,7 @@
           <a:noFill/>
         </p:spPr>
         <p:txBody>
-          <a:bodyPr wrap="square" lIns="25400" tIns="25400" rIns="25400" bIns="25400" anchor="t">
+          <a:bodyPr wrap="square" anchor="t" lIns="25400" rIns="25400" tIns="25400" bIns="25400">
             <a:spAutoFit/>
           </a:bodyPr>
           <a:lstStyle/>
@@ -15464,11 +14771,10 @@
           </a:fontRef>
         </p:style>
         <p:txBody>
-          <a:bodyPr wrap="square" rtlCol="0" anchor="ctr"/>
+          <a:bodyPr rtlCol="0" anchor="ctr" wrap="square"/>
           <a:lstStyle/>
           <a:p>
             <a:pPr algn="ctr"/>
-            <a:endParaRPr/>
           </a:p>
         </p:txBody>
       </p:sp>
@@ -15513,7 +14819,7 @@
           <a:p>
             <a:pPr algn="ctr"/>
             <a:r>
-              <a:rPr sz="1250" b="1">
+              <a:rPr b="1" sz="1250">
                 <a:solidFill>
                   <a:srgbClr val="FFFFFF"/>
                 </a:solidFill>
@@ -15540,7 +14846,7 @@
           <a:noFill/>
         </p:spPr>
         <p:txBody>
-          <a:bodyPr wrap="square" lIns="25400" tIns="25400" rIns="25400" bIns="25400" anchor="t">
+          <a:bodyPr wrap="square" anchor="t" lIns="25400" rIns="25400" tIns="25400" bIns="25400">
             <a:spAutoFit/>
           </a:bodyPr>
           <a:lstStyle/>
@@ -15679,11 +14985,10 @@
           </a:fontRef>
         </p:style>
         <p:txBody>
-          <a:bodyPr wrap="square" rtlCol="0" anchor="ctr"/>
+          <a:bodyPr rtlCol="0" anchor="ctr" wrap="square"/>
           <a:lstStyle/>
           <a:p>
             <a:pPr algn="ctr"/>
-            <a:endParaRPr/>
           </a:p>
         </p:txBody>
       </p:sp>
@@ -15704,7 +15009,7 @@
           <a:noFill/>
         </p:spPr>
         <p:txBody>
-          <a:bodyPr wrap="square" lIns="25400" tIns="25400" rIns="25400" bIns="25400" anchor="ctr">
+          <a:bodyPr wrap="square" anchor="ctr" lIns="25400" rIns="25400" tIns="25400" bIns="25400">
             <a:spAutoFit/>
           </a:bodyPr>
           <a:lstStyle/>
@@ -15743,7 +15048,7 @@
           <a:noFill/>
         </p:spPr>
         <p:txBody>
-          <a:bodyPr wrap="square" lIns="25400" tIns="25400" rIns="25400" bIns="25400" anchor="t">
+          <a:bodyPr wrap="square" anchor="t" lIns="25400" rIns="25400" tIns="25400" bIns="25400">
             <a:spAutoFit/>
           </a:bodyPr>
           <a:lstStyle/>
@@ -15774,7 +15079,7 @@
 </file>
 
 <file path=ppt/slides/slide2.xml><?xml version="1.0" encoding="utf-8"?>
-<p:sld xmlns:a="http://schemas.openxmlformats.org/drawingml/2006/main" xmlns:r="http://schemas.openxmlformats.org/officeDocument/2006/relationships" xmlns:p="http://schemas.openxmlformats.org/presentationml/2006/main">
+<p:sld xmlns:a="http://schemas.openxmlformats.org/drawingml/2006/main" xmlns:p="http://schemas.openxmlformats.org/presentationml/2006/main" xmlns:r="http://schemas.openxmlformats.org/officeDocument/2006/relationships">
   <p:cSld>
     <p:spTree>
       <p:nvGrpSpPr>
@@ -15782,14 +15087,7 @@
         <p:cNvGrpSpPr/>
         <p:nvPr/>
       </p:nvGrpSpPr>
-      <p:grpSpPr>
-        <a:xfrm>
-          <a:off x="0" y="0"/>
-          <a:ext cx="0" cy="0"/>
-          <a:chOff x="0" y="0"/>
-          <a:chExt cx="0" cy="0"/>
-        </a:xfrm>
-      </p:grpSpPr>
+      <p:grpSpPr/>
       <p:sp>
         <p:nvSpPr>
           <p:cNvPr id="2" name="Rectangle 1"/>
@@ -15830,7 +15128,6 @@
           <a:lstStyle/>
           <a:p>
             <a:pPr algn="ctr"/>
-            <a:endParaRPr/>
           </a:p>
         </p:txBody>
       </p:sp>
@@ -15851,7 +15148,7 @@
           <a:noFill/>
         </p:spPr>
         <p:txBody>
-          <a:bodyPr wrap="square" lIns="25400" tIns="25400" rIns="25400" bIns="25400" anchor="t">
+          <a:bodyPr wrap="square" anchor="t" lIns="25400" rIns="25400" tIns="25400" bIns="25400">
             <a:spAutoFit/>
           </a:bodyPr>
           <a:lstStyle/>
@@ -15890,7 +15187,7 @@
           <a:noFill/>
         </p:spPr>
         <p:txBody>
-          <a:bodyPr wrap="square" lIns="25400" tIns="25400" rIns="25400" bIns="25400" anchor="t">
+          <a:bodyPr wrap="square" anchor="t" lIns="25400" rIns="25400" tIns="25400" bIns="25400">
             <a:spAutoFit/>
           </a:bodyPr>
           <a:lstStyle/>
@@ -15952,7 +15249,6 @@
           <a:lstStyle/>
           <a:p>
             <a:pPr algn="ctr"/>
-            <a:endParaRPr/>
           </a:p>
         </p:txBody>
       </p:sp>
@@ -15973,7 +15269,7 @@
           <a:noFill/>
         </p:spPr>
         <p:txBody>
-          <a:bodyPr wrap="square" lIns="25400" tIns="25400" rIns="25400" bIns="25400" anchor="t">
+          <a:bodyPr wrap="square" anchor="t" lIns="25400" rIns="25400" tIns="25400" bIns="25400">
             <a:spAutoFit/>
           </a:bodyPr>
           <a:lstStyle/>
@@ -16035,11 +15331,10 @@
           </a:fontRef>
         </p:style>
         <p:txBody>
-          <a:bodyPr wrap="square" rtlCol="0" anchor="ctr"/>
+          <a:bodyPr rtlCol="0" anchor="ctr" wrap="square"/>
           <a:lstStyle/>
           <a:p>
             <a:pPr algn="ctr"/>
-            <a:endParaRPr/>
           </a:p>
         </p:txBody>
       </p:sp>
@@ -16079,7 +15374,7 @@
           </a:fontRef>
         </p:style>
         <p:txBody>
-          <a:bodyPr wrap="none" lIns="0" tIns="0" rIns="0" bIns="0" rtlCol="0" anchor="ctr"/>
+          <a:bodyPr rtlCol="0" anchor="ctr" wrap="none" lIns="0" rIns="0" tIns="0" bIns="0"/>
           <a:lstStyle/>
           <a:p>
             <a:pPr algn="ctr"/>
@@ -16090,7 +15385,7 @@
                 </a:solidFill>
                 <a:latin typeface="Calibri"/>
               </a:rPr>
-              <a:t>∿</a:t>
+              <a:t>1</a:t>
             </a:r>
           </a:p>
         </p:txBody>
@@ -16112,7 +15407,7 @@
           <a:noFill/>
         </p:spPr>
         <p:txBody>
-          <a:bodyPr wrap="square" lIns="25400" tIns="25400" rIns="25400" bIns="25400" anchor="t">
+          <a:bodyPr wrap="square" anchor="t" lIns="25400" rIns="25400" tIns="25400" bIns="25400">
             <a:spAutoFit/>
           </a:bodyPr>
           <a:lstStyle/>
@@ -16151,7 +15446,7 @@
           <a:noFill/>
         </p:spPr>
         <p:txBody>
-          <a:bodyPr wrap="square" lIns="25400" tIns="25400" rIns="25400" bIns="25400" anchor="t">
+          <a:bodyPr wrap="square" anchor="t" lIns="25400" rIns="25400" tIns="25400" bIns="25400">
             <a:spAutoFit/>
           </a:bodyPr>
           <a:lstStyle/>
@@ -16171,7 +15466,7 @@
                 </a:solidFill>
                 <a:latin typeface="Calibri"/>
               </a:rPr>
-              <a:t>cellular ↔ wifi, moving between cells, weak signal, dead zones</a:t>
+              <a:t>cellular to wifi, moving between cells, weak signal, dead zones</a:t>
             </a:r>
           </a:p>
         </p:txBody>
@@ -16216,11 +15511,10 @@
           </a:fontRef>
         </p:style>
         <p:txBody>
-          <a:bodyPr wrap="square" rtlCol="0" anchor="ctr"/>
+          <a:bodyPr rtlCol="0" anchor="ctr" wrap="square"/>
           <a:lstStyle/>
           <a:p>
             <a:pPr algn="ctr"/>
-            <a:endParaRPr/>
           </a:p>
         </p:txBody>
       </p:sp>
@@ -16260,7 +15554,7 @@
           </a:fontRef>
         </p:style>
         <p:txBody>
-          <a:bodyPr wrap="none" lIns="0" tIns="0" rIns="0" bIns="0" rtlCol="0" anchor="ctr"/>
+          <a:bodyPr rtlCol="0" anchor="ctr" wrap="none" lIns="0" rIns="0" tIns="0" bIns="0"/>
           <a:lstStyle/>
           <a:p>
             <a:pPr algn="ctr"/>
@@ -16271,7 +15565,7 @@
                 </a:solidFill>
                 <a:latin typeface="Calibri"/>
               </a:rPr>
-              <a:t>?</a:t>
+              <a:t>2</a:t>
             </a:r>
           </a:p>
         </p:txBody>
@@ -16293,7 +15587,7 @@
           <a:noFill/>
         </p:spPr>
         <p:txBody>
-          <a:bodyPr wrap="square" lIns="25400" tIns="25400" rIns="25400" bIns="25400" anchor="t">
+          <a:bodyPr wrap="square" anchor="t" lIns="25400" rIns="25400" tIns="25400" bIns="25400">
             <a:spAutoFit/>
           </a:bodyPr>
           <a:lstStyle/>
@@ -16332,7 +15626,7 @@
           <a:noFill/>
         </p:spPr>
         <p:txBody>
-          <a:bodyPr wrap="square" lIns="25400" tIns="25400" rIns="25400" bIns="25400" anchor="t">
+          <a:bodyPr wrap="square" anchor="t" lIns="25400" rIns="25400" tIns="25400" bIns="25400">
             <a:spAutoFit/>
           </a:bodyPr>
           <a:lstStyle/>
@@ -16352,7 +15646,7 @@
                 </a:solidFill>
                 <a:latin typeface="Calibri"/>
               </a:rPr>
-              <a:t>no lightweight “can the network handle this?” check exists</a:t>
+              <a:t>no lightweight "can the network handle this?" check exists</a:t>
             </a:r>
           </a:p>
         </p:txBody>
@@ -16397,11 +15691,10 @@
           </a:fontRef>
         </p:style>
         <p:txBody>
-          <a:bodyPr wrap="square" rtlCol="0" anchor="ctr"/>
+          <a:bodyPr rtlCol="0" anchor="ctr" wrap="square"/>
           <a:lstStyle/>
           <a:p>
             <a:pPr algn="ctr"/>
-            <a:endParaRPr/>
           </a:p>
         </p:txBody>
       </p:sp>
@@ -16441,18 +15734,18 @@
           </a:fontRef>
         </p:style>
         <p:txBody>
-          <a:bodyPr wrap="none" lIns="0" tIns="0" rIns="0" bIns="0" rtlCol="0" anchor="ctr"/>
+          <a:bodyPr rtlCol="0" anchor="ctr" wrap="none" lIns="0" rIns="0" tIns="0" bIns="0"/>
           <a:lstStyle/>
           <a:p>
             <a:pPr algn="ctr"/>
             <a:r>
-              <a:rPr sz="3400" dirty="0">
+              <a:rPr sz="3400">
                 <a:solidFill>
                   <a:srgbClr val="FFFFFF"/>
                 </a:solidFill>
                 <a:latin typeface="Calibri"/>
               </a:rPr>
-              <a:t>⚙</a:t>
+              <a:t>3</a:t>
             </a:r>
           </a:p>
         </p:txBody>
@@ -16474,7 +15767,7 @@
           <a:noFill/>
         </p:spPr>
         <p:txBody>
-          <a:bodyPr wrap="square" lIns="25400" tIns="25400" rIns="25400" bIns="25400" anchor="t">
+          <a:bodyPr wrap="square" anchor="t" lIns="25400" rIns="25400" tIns="25400" bIns="25400">
             <a:spAutoFit/>
           </a:bodyPr>
           <a:lstStyle/>
@@ -16513,7 +15806,7 @@
           <a:noFill/>
         </p:spPr>
         <p:txBody>
-          <a:bodyPr wrap="square" lIns="25400" tIns="25400" rIns="25400" bIns="25400" anchor="t">
+          <a:bodyPr wrap="square" anchor="t" lIns="25400" rIns="25400" tIns="25400" bIns="25400">
             <a:spAutoFit/>
           </a:bodyPr>
           <a:lstStyle/>
@@ -16533,7 +15826,7 @@
                 </a:solidFill>
                 <a:latin typeface="Calibri"/>
               </a:rPr>
-              <a:t>slow-start, flaky nets, data cost — and you need a target to measure against</a:t>
+              <a:t>slow-start, flaky nets, data cost, and you need a target to measure against</a:t>
             </a:r>
           </a:p>
         </p:txBody>
@@ -16576,11 +15869,10 @@
           </a:fontRef>
         </p:style>
         <p:txBody>
-          <a:bodyPr wrap="square" rtlCol="0" anchor="ctr"/>
+          <a:bodyPr rtlCol="0" anchor="ctr" wrap="square"/>
           <a:lstStyle/>
           <a:p>
             <a:pPr algn="ctr"/>
-            <a:endParaRPr/>
           </a:p>
         </p:txBody>
       </p:sp>
@@ -16601,7 +15893,7 @@
           <a:noFill/>
         </p:spPr>
         <p:txBody>
-          <a:bodyPr wrap="square" lIns="25400" tIns="25400" rIns="25400" bIns="25400" anchor="ctr">
+          <a:bodyPr wrap="square" anchor="ctr" lIns="25400" rIns="25400" tIns="25400" bIns="25400">
             <a:spAutoFit/>
           </a:bodyPr>
           <a:lstStyle/>
@@ -16640,7 +15932,7 @@
           <a:noFill/>
         </p:spPr>
         <p:txBody>
-          <a:bodyPr wrap="square" lIns="25400" tIns="25400" rIns="25400" bIns="25400" anchor="t">
+          <a:bodyPr wrap="square" anchor="t" lIns="25400" rIns="25400" tIns="25400" bIns="25400">
             <a:spAutoFit/>
           </a:bodyPr>
           <a:lstStyle/>
@@ -16671,7 +15963,7 @@
 </file>
 
 <file path=ppt/slides/slide20.xml><?xml version="1.0" encoding="utf-8"?>
-<p:sld xmlns:a="http://schemas.openxmlformats.org/drawingml/2006/main" xmlns:r="http://schemas.openxmlformats.org/officeDocument/2006/relationships" xmlns:p="http://schemas.openxmlformats.org/presentationml/2006/main">
+<p:sld xmlns:a="http://schemas.openxmlformats.org/drawingml/2006/main" xmlns:p="http://schemas.openxmlformats.org/presentationml/2006/main" xmlns:r="http://schemas.openxmlformats.org/officeDocument/2006/relationships">
   <p:cSld>
     <p:spTree>
       <p:nvGrpSpPr>
@@ -16679,14 +15971,7 @@
         <p:cNvGrpSpPr/>
         <p:nvPr/>
       </p:nvGrpSpPr>
-      <p:grpSpPr>
-        <a:xfrm>
-          <a:off x="0" y="0"/>
-          <a:ext cx="0" cy="0"/>
-          <a:chOff x="0" y="0"/>
-          <a:chExt cx="0" cy="0"/>
-        </a:xfrm>
-      </p:grpSpPr>
+      <p:grpSpPr/>
       <p:sp>
         <p:nvSpPr>
           <p:cNvPr id="2" name="Rectangle 1"/>
@@ -16727,7 +16012,6 @@
           <a:lstStyle/>
           <a:p>
             <a:pPr algn="ctr"/>
-            <a:endParaRPr/>
           </a:p>
         </p:txBody>
       </p:sp>
@@ -16748,7 +16032,7 @@
           <a:noFill/>
         </p:spPr>
         <p:txBody>
-          <a:bodyPr wrap="square" lIns="25400" tIns="25400" rIns="25400" bIns="25400" anchor="t">
+          <a:bodyPr wrap="square" anchor="t" lIns="25400" rIns="25400" tIns="25400" bIns="25400">
             <a:spAutoFit/>
           </a:bodyPr>
           <a:lstStyle/>
@@ -16787,7 +16071,7 @@
           <a:noFill/>
         </p:spPr>
         <p:txBody>
-          <a:bodyPr wrap="square" lIns="25400" tIns="25400" rIns="25400" bIns="25400" anchor="t">
+          <a:bodyPr wrap="square" anchor="t" lIns="25400" rIns="25400" tIns="25400" bIns="25400">
             <a:spAutoFit/>
           </a:bodyPr>
           <a:lstStyle/>
@@ -16849,7 +16133,6 @@
           <a:lstStyle/>
           <a:p>
             <a:pPr algn="ctr"/>
-            <a:endParaRPr/>
           </a:p>
         </p:txBody>
       </p:sp>
@@ -16870,7 +16153,7 @@
           <a:noFill/>
         </p:spPr>
         <p:txBody>
-          <a:bodyPr wrap="square" lIns="25400" tIns="25400" rIns="25400" bIns="25400" anchor="t">
+          <a:bodyPr wrap="square" anchor="t" lIns="25400" rIns="25400" tIns="25400" bIns="25400">
             <a:spAutoFit/>
           </a:bodyPr>
           <a:lstStyle/>
@@ -16930,7 +16213,7 @@
           </a:fontRef>
         </p:style>
         <p:txBody>
-          <a:bodyPr wrap="square" tIns="38100" bIns="38100" rtlCol="0" anchor="ctr"/>
+          <a:bodyPr rtlCol="0" anchor="ctr" wrap="square" tIns="38100" bIns="38100"/>
           <a:lstStyle/>
           <a:p>
             <a:pPr algn="ctr"/>
@@ -17022,7 +16305,6 @@
           <a:lstStyle/>
           <a:p>
             <a:pPr algn="ctr"/>
-            <a:endParaRPr/>
           </a:p>
         </p:txBody>
       </p:sp>
@@ -17064,7 +16346,7 @@
           </a:fontRef>
         </p:style>
         <p:txBody>
-          <a:bodyPr wrap="square" tIns="38100" bIns="38100" rtlCol="0" anchor="ctr"/>
+          <a:bodyPr rtlCol="0" anchor="ctr" wrap="square" tIns="38100" bIns="38100"/>
           <a:lstStyle/>
           <a:p>
             <a:pPr algn="ctr"/>
@@ -17156,7 +16438,6 @@
           <a:lstStyle/>
           <a:p>
             <a:pPr algn="ctr"/>
-            <a:endParaRPr/>
           </a:p>
         </p:txBody>
       </p:sp>
@@ -17198,7 +16479,7 @@
           </a:fontRef>
         </p:style>
         <p:txBody>
-          <a:bodyPr wrap="square" tIns="38100" bIns="38100" rtlCol="0" anchor="ctr"/>
+          <a:bodyPr rtlCol="0" anchor="ctr" wrap="square" tIns="38100" bIns="38100"/>
           <a:lstStyle/>
           <a:p>
             <a:pPr algn="ctr"/>
@@ -17290,7 +16571,6 @@
           <a:lstStyle/>
           <a:p>
             <a:pPr algn="ctr"/>
-            <a:endParaRPr/>
           </a:p>
         </p:txBody>
       </p:sp>
@@ -17332,7 +16612,7 @@
           </a:fontRef>
         </p:style>
         <p:txBody>
-          <a:bodyPr wrap="square" tIns="38100" bIns="38100" rtlCol="0" anchor="ctr"/>
+          <a:bodyPr rtlCol="0" anchor="ctr" wrap="square" tIns="38100" bIns="38100"/>
           <a:lstStyle/>
           <a:p>
             <a:pPr algn="ctr"/>
@@ -17393,7 +16673,7 @@
         <p:spPr>
           <a:xfrm>
             <a:off x="640080" y="4297680"/>
-            <a:ext cx="10972800" cy="792525"/>
+            <a:ext cx="10972800" cy="1828800"/>
           </a:xfrm>
           <a:prstGeom prst="rect">
             <a:avLst/>
@@ -17401,7 +16681,7 @@
           <a:noFill/>
         </p:spPr>
         <p:txBody>
-          <a:bodyPr wrap="square" lIns="25400" tIns="25400" rIns="25400" bIns="25400" anchor="t">
+          <a:bodyPr wrap="square" anchor="t" lIns="25400" rIns="25400" tIns="25400" bIns="25400">
             <a:spAutoFit/>
           </a:bodyPr>
           <a:lstStyle/>
@@ -17415,7 +16695,7 @@
               </a:spcAft>
             </a:pPr>
             <a:r>
-              <a:rPr sz="1400" b="1" i="0" dirty="0">
+              <a:rPr sz="1400" b="1" i="0">
                 <a:solidFill>
                   <a:srgbClr val="0F2A43"/>
                 </a:solidFill>
@@ -17434,12 +16714,31 @@
               </a:spcAft>
             </a:pPr>
             <a:r>
-              <a:rPr sz="1250" b="0" i="0" dirty="0">
+              <a:rPr sz="1250" b="0" i="0">
                 <a:solidFill>
                   <a:srgbClr val="1A2B3C"/>
                 </a:solidFill>
                 <a:latin typeface="Calibri"/>
               </a:rPr>
+              <a:t>•  ANR detection (main-thread watchdog) and caught non-fatal errors logged as breadcrumbs</a:t>
+            </a:r>
+          </a:p>
+          <a:p>
+            <a:pPr algn="l">
+              <a:spcBef>
+                <a:spcPts val="0"/>
+              </a:spcBef>
+              <a:spcAft>
+                <a:spcPts val="500"/>
+              </a:spcAft>
+            </a:pPr>
+            <a:r>
+              <a:rPr sz="1250" b="0" i="0">
+                <a:solidFill>
+                  <a:srgbClr val="1A2B3C"/>
+                </a:solidFill>
+                <a:latin typeface="Calibri"/>
+              </a:rPr>
               <a:t>•  In-flight test state saved, so a test interrupted by a crash isn't reported as a false failure</a:t>
             </a:r>
           </a:p>
@@ -17450,7 +16749,7 @@
               </a:spcBef>
             </a:pPr>
             <a:r>
-              <a:rPr sz="1250" b="0" i="0" dirty="0">
+              <a:rPr sz="1250" b="0" i="0">
                 <a:solidFill>
                   <a:srgbClr val="1A2B3C"/>
                 </a:solidFill>
@@ -17478,7 +16777,7 @@
           <a:noFill/>
         </p:spPr>
         <p:txBody>
-          <a:bodyPr wrap="square" lIns="25400" tIns="25400" rIns="25400" bIns="25400" anchor="t">
+          <a:bodyPr wrap="square" anchor="t" lIns="25400" rIns="25400" tIns="25400" bIns="25400">
             <a:spAutoFit/>
           </a:bodyPr>
           <a:lstStyle/>
@@ -17509,7 +16808,7 @@
 </file>
 
 <file path=ppt/slides/slide21.xml><?xml version="1.0" encoding="utf-8"?>
-<p:sld xmlns:a="http://schemas.openxmlformats.org/drawingml/2006/main" xmlns:r="http://schemas.openxmlformats.org/officeDocument/2006/relationships" xmlns:p="http://schemas.openxmlformats.org/presentationml/2006/main">
+<p:sld xmlns:a="http://schemas.openxmlformats.org/drawingml/2006/main" xmlns:p="http://schemas.openxmlformats.org/presentationml/2006/main" xmlns:r="http://schemas.openxmlformats.org/officeDocument/2006/relationships">
   <p:cSld>
     <p:spTree>
       <p:nvGrpSpPr>
@@ -17517,14 +16816,7 @@
         <p:cNvGrpSpPr/>
         <p:nvPr/>
       </p:nvGrpSpPr>
-      <p:grpSpPr>
-        <a:xfrm>
-          <a:off x="0" y="0"/>
-          <a:ext cx="0" cy="0"/>
-          <a:chOff x="0" y="0"/>
-          <a:chExt cx="0" cy="0"/>
-        </a:xfrm>
-      </p:grpSpPr>
+      <p:grpSpPr/>
       <p:sp>
         <p:nvSpPr>
           <p:cNvPr id="2" name="Rectangle 1"/>
@@ -17565,7 +16857,6 @@
           <a:lstStyle/>
           <a:p>
             <a:pPr algn="ctr"/>
-            <a:endParaRPr/>
           </a:p>
         </p:txBody>
       </p:sp>
@@ -17586,7 +16877,7 @@
           <a:noFill/>
         </p:spPr>
         <p:txBody>
-          <a:bodyPr wrap="square" lIns="25400" tIns="25400" rIns="25400" bIns="25400" anchor="t">
+          <a:bodyPr wrap="square" anchor="t" lIns="25400" rIns="25400" tIns="25400" bIns="25400">
             <a:spAutoFit/>
           </a:bodyPr>
           <a:lstStyle/>
@@ -17625,7 +16916,7 @@
           <a:noFill/>
         </p:spPr>
         <p:txBody>
-          <a:bodyPr wrap="square" lIns="25400" tIns="25400" rIns="25400" bIns="25400" anchor="t">
+          <a:bodyPr wrap="square" anchor="t" lIns="25400" rIns="25400" tIns="25400" bIns="25400">
             <a:spAutoFit/>
           </a:bodyPr>
           <a:lstStyle/>
@@ -17687,7 +16978,6 @@
           <a:lstStyle/>
           <a:p>
             <a:pPr algn="ctr"/>
-            <a:endParaRPr/>
           </a:p>
         </p:txBody>
       </p:sp>
@@ -17710,36 +17000,18 @@
                 <a:tableStyleId>{5C22544A-7EE6-4342-B048-85BDC9FD1C3A}</a:tableStyleId>
               </a:tblPr>
               <a:tblGrid>
-                <a:gridCol w="2377440">
-                  <a:extLst>
-                    <a:ext uri="{9D8B030D-6E8A-4147-A177-3AD203B41FA5}">
-                      <a16:colId xmlns:a16="http://schemas.microsoft.com/office/drawing/2014/main" val="20000"/>
-                    </a:ext>
-                  </a:extLst>
-                </a:gridCol>
-                <a:gridCol w="3291840">
-                  <a:extLst>
-                    <a:ext uri="{9D8B030D-6E8A-4147-A177-3AD203B41FA5}">
-                      <a16:colId xmlns:a16="http://schemas.microsoft.com/office/drawing/2014/main" val="20001"/>
-                    </a:ext>
-                  </a:extLst>
-                </a:gridCol>
-                <a:gridCol w="5303520">
-                  <a:extLst>
-                    <a:ext uri="{9D8B030D-6E8A-4147-A177-3AD203B41FA5}">
-                      <a16:colId xmlns:a16="http://schemas.microsoft.com/office/drawing/2014/main" val="20002"/>
-                    </a:ext>
-                  </a:extLst>
-                </a:gridCol>
+                <a:gridCol w="2377440"/>
+                <a:gridCol w="3291840"/>
+                <a:gridCol w="5303520"/>
               </a:tblGrid>
               <a:tr h="470262">
                 <a:tc>
                   <a:txBody>
-                    <a:bodyPr/>
+                    <a:bodyPr wrap="square"/>
                     <a:lstStyle/>
                     <a:p>
                       <a:r>
-                        <a:rPr sz="1350" b="1">
+                        <a:rPr b="1" sz="1350">
                           <a:solidFill>
                             <a:srgbClr val="FFFFFF"/>
                           </a:solidFill>
@@ -17749,7 +17021,7 @@
                       </a:r>
                     </a:p>
                   </a:txBody>
-                  <a:tcPr marL="88900" marR="63500" marT="38100" marB="38100" anchor="ctr">
+                  <a:tcPr anchor="ctr" marL="88900" marR="63500" marT="38100" marB="38100">
                     <a:solidFill>
                       <a:srgbClr val="0F2A43"/>
                     </a:solidFill>
@@ -17757,11 +17029,11 @@
                 </a:tc>
                 <a:tc>
                   <a:txBody>
-                    <a:bodyPr/>
+                    <a:bodyPr wrap="square"/>
                     <a:lstStyle/>
                     <a:p>
                       <a:r>
-                        <a:rPr sz="1350" b="1">
+                        <a:rPr b="1" sz="1350">
                           <a:solidFill>
                             <a:srgbClr val="FFFFFF"/>
                           </a:solidFill>
@@ -17771,7 +17043,7 @@
                       </a:r>
                     </a:p>
                   </a:txBody>
-                  <a:tcPr marL="88900" marR="63500" marT="38100" marB="38100" anchor="ctr">
+                  <a:tcPr anchor="ctr" marL="88900" marR="63500" marT="38100" marB="38100">
                     <a:solidFill>
                       <a:srgbClr val="0F2A43"/>
                     </a:solidFill>
@@ -17779,11 +17051,11 @@
                 </a:tc>
                 <a:tc>
                   <a:txBody>
-                    <a:bodyPr/>
+                    <a:bodyPr wrap="square"/>
                     <a:lstStyle/>
                     <a:p>
                       <a:r>
-                        <a:rPr sz="1350" b="1">
+                        <a:rPr b="1" sz="1350">
                           <a:solidFill>
                             <a:srgbClr val="FFFFFF"/>
                           </a:solidFill>
@@ -17793,22 +17065,17 @@
                       </a:r>
                     </a:p>
                   </a:txBody>
-                  <a:tcPr marL="88900" marR="63500" marT="38100" marB="38100" anchor="ctr">
+                  <a:tcPr anchor="ctr" marL="88900" marR="63500" marT="38100" marB="38100">
                     <a:solidFill>
                       <a:srgbClr val="0F2A43"/>
                     </a:solidFill>
                   </a:tcPr>
                 </a:tc>
-                <a:extLst>
-                  <a:ext uri="{0D108BD9-81ED-4DB2-BD59-A6C34878D82A}">
-                    <a16:rowId xmlns:a16="http://schemas.microsoft.com/office/drawing/2014/main" val="10000"/>
-                  </a:ext>
-                </a:extLst>
               </a:tr>
               <a:tr h="470262">
                 <a:tc>
                   <a:txBody>
-                    <a:bodyPr/>
+                    <a:bodyPr wrap="square"/>
                     <a:lstStyle/>
                     <a:p>
                       <a:r>
@@ -17822,7 +17089,7 @@
                       </a:r>
                     </a:p>
                   </a:txBody>
-                  <a:tcPr marL="88900" marR="63500" marT="25400" marB="25400" anchor="ctr">
+                  <a:tcPr anchor="ctr" marL="88900" marR="63500" marT="25400" marB="25400">
                     <a:solidFill>
                       <a:srgbClr val="F4F7F9"/>
                     </a:solidFill>
@@ -17830,7 +17097,7 @@
                 </a:tc>
                 <a:tc>
                   <a:txBody>
-                    <a:bodyPr/>
+                    <a:bodyPr wrap="square"/>
                     <a:lstStyle/>
                     <a:p>
                       <a:r>
@@ -17844,7 +17111,7 @@
                       </a:r>
                     </a:p>
                   </a:txBody>
-                  <a:tcPr marL="88900" marR="63500" marT="25400" marB="25400" anchor="ctr">
+                  <a:tcPr anchor="ctr" marL="88900" marR="63500" marT="25400" marB="25400">
                     <a:solidFill>
                       <a:srgbClr val="F4F7F9"/>
                     </a:solidFill>
@@ -17852,7 +17119,7 @@
                 </a:tc>
                 <a:tc>
                   <a:txBody>
-                    <a:bodyPr/>
+                    <a:bodyPr wrap="square"/>
                     <a:lstStyle/>
                     <a:p>
                       <a:r>
@@ -17866,22 +17133,17 @@
                       </a:r>
                     </a:p>
                   </a:txBody>
-                  <a:tcPr marL="88900" marR="63500" marT="25400" marB="25400" anchor="ctr">
+                  <a:tcPr anchor="ctr" marL="88900" marR="63500" marT="25400" marB="25400">
                     <a:solidFill>
                       <a:srgbClr val="F4F7F9"/>
                     </a:solidFill>
                   </a:tcPr>
                 </a:tc>
-                <a:extLst>
-                  <a:ext uri="{0D108BD9-81ED-4DB2-BD59-A6C34878D82A}">
-                    <a16:rowId xmlns:a16="http://schemas.microsoft.com/office/drawing/2014/main" val="10001"/>
-                  </a:ext>
-                </a:extLst>
               </a:tr>
               <a:tr h="470262">
                 <a:tc>
                   <a:txBody>
-                    <a:bodyPr/>
+                    <a:bodyPr wrap="square"/>
                     <a:lstStyle/>
                     <a:p>
                       <a:r>
@@ -17895,7 +17157,7 @@
                       </a:r>
                     </a:p>
                   </a:txBody>
-                  <a:tcPr marL="88900" marR="63500" marT="25400" marB="25400" anchor="ctr">
+                  <a:tcPr anchor="ctr" marL="88900" marR="63500" marT="25400" marB="25400">
                     <a:solidFill>
                       <a:srgbClr val="FFFFFF"/>
                     </a:solidFill>
@@ -17903,7 +17165,7 @@
                 </a:tc>
                 <a:tc>
                   <a:txBody>
-                    <a:bodyPr/>
+                    <a:bodyPr wrap="square"/>
                     <a:lstStyle/>
                     <a:p>
                       <a:r>
@@ -17917,7 +17179,7 @@
                       </a:r>
                     </a:p>
                   </a:txBody>
-                  <a:tcPr marL="88900" marR="63500" marT="25400" marB="25400" anchor="ctr">
+                  <a:tcPr anchor="ctr" marL="88900" marR="63500" marT="25400" marB="25400">
                     <a:solidFill>
                       <a:srgbClr val="FFFFFF"/>
                     </a:solidFill>
@@ -17925,7 +17187,7 @@
                 </a:tc>
                 <a:tc>
                   <a:txBody>
-                    <a:bodyPr/>
+                    <a:bodyPr wrap="square"/>
                     <a:lstStyle/>
                     <a:p>
                       <a:r>
@@ -17939,22 +17201,17 @@
                       </a:r>
                     </a:p>
                   </a:txBody>
-                  <a:tcPr marL="88900" marR="63500" marT="25400" marB="25400" anchor="ctr">
+                  <a:tcPr anchor="ctr" marL="88900" marR="63500" marT="25400" marB="25400">
                     <a:solidFill>
                       <a:srgbClr val="FFFFFF"/>
                     </a:solidFill>
                   </a:tcPr>
                 </a:tc>
-                <a:extLst>
-                  <a:ext uri="{0D108BD9-81ED-4DB2-BD59-A6C34878D82A}">
-                    <a16:rowId xmlns:a16="http://schemas.microsoft.com/office/drawing/2014/main" val="10002"/>
-                  </a:ext>
-                </a:extLst>
               </a:tr>
               <a:tr h="470262">
                 <a:tc>
                   <a:txBody>
-                    <a:bodyPr/>
+                    <a:bodyPr wrap="square"/>
                     <a:lstStyle/>
                     <a:p>
                       <a:r>
@@ -17968,7 +17225,7 @@
                       </a:r>
                     </a:p>
                   </a:txBody>
-                  <a:tcPr marL="88900" marR="63500" marT="25400" marB="25400" anchor="ctr">
+                  <a:tcPr anchor="ctr" marL="88900" marR="63500" marT="25400" marB="25400">
                     <a:solidFill>
                       <a:srgbClr val="F4F7F9"/>
                     </a:solidFill>
@@ -17976,7 +17233,7 @@
                 </a:tc>
                 <a:tc>
                   <a:txBody>
-                    <a:bodyPr/>
+                    <a:bodyPr wrap="square"/>
                     <a:lstStyle/>
                     <a:p>
                       <a:r>
@@ -17990,7 +17247,7 @@
                       </a:r>
                     </a:p>
                   </a:txBody>
-                  <a:tcPr marL="88900" marR="63500" marT="25400" marB="25400" anchor="ctr">
+                  <a:tcPr anchor="ctr" marL="88900" marR="63500" marT="25400" marB="25400">
                     <a:solidFill>
                       <a:srgbClr val="F4F7F9"/>
                     </a:solidFill>
@@ -17998,7 +17255,7 @@
                 </a:tc>
                 <a:tc>
                   <a:txBody>
-                    <a:bodyPr/>
+                    <a:bodyPr wrap="square"/>
                     <a:lstStyle/>
                     <a:p>
                       <a:r>
@@ -18012,22 +17269,17 @@
                       </a:r>
                     </a:p>
                   </a:txBody>
-                  <a:tcPr marL="88900" marR="63500" marT="25400" marB="25400" anchor="ctr">
+                  <a:tcPr anchor="ctr" marL="88900" marR="63500" marT="25400" marB="25400">
                     <a:solidFill>
                       <a:srgbClr val="F4F7F9"/>
                     </a:solidFill>
                   </a:tcPr>
                 </a:tc>
-                <a:extLst>
-                  <a:ext uri="{0D108BD9-81ED-4DB2-BD59-A6C34878D82A}">
-                    <a16:rowId xmlns:a16="http://schemas.microsoft.com/office/drawing/2014/main" val="10003"/>
-                  </a:ext>
-                </a:extLst>
               </a:tr>
               <a:tr h="470262">
                 <a:tc>
                   <a:txBody>
-                    <a:bodyPr/>
+                    <a:bodyPr wrap="square"/>
                     <a:lstStyle/>
                     <a:p>
                       <a:r>
@@ -18041,7 +17293,7 @@
                       </a:r>
                     </a:p>
                   </a:txBody>
-                  <a:tcPr marL="88900" marR="63500" marT="25400" marB="25400" anchor="ctr">
+                  <a:tcPr anchor="ctr" marL="88900" marR="63500" marT="25400" marB="25400">
                     <a:solidFill>
                       <a:srgbClr val="FFFFFF"/>
                     </a:solidFill>
@@ -18049,7 +17301,7 @@
                 </a:tc>
                 <a:tc>
                   <a:txBody>
-                    <a:bodyPr/>
+                    <a:bodyPr wrap="square"/>
                     <a:lstStyle/>
                     <a:p>
                       <a:r>
@@ -18063,7 +17315,7 @@
                       </a:r>
                     </a:p>
                   </a:txBody>
-                  <a:tcPr marL="88900" marR="63500" marT="25400" marB="25400" anchor="ctr">
+                  <a:tcPr anchor="ctr" marL="88900" marR="63500" marT="25400" marB="25400">
                     <a:solidFill>
                       <a:srgbClr val="FFFFFF"/>
                     </a:solidFill>
@@ -18071,7 +17323,7 @@
                 </a:tc>
                 <a:tc>
                   <a:txBody>
-                    <a:bodyPr/>
+                    <a:bodyPr wrap="square"/>
                     <a:lstStyle/>
                     <a:p>
                       <a:r>
@@ -18085,22 +17337,17 @@
                       </a:r>
                     </a:p>
                   </a:txBody>
-                  <a:tcPr marL="88900" marR="63500" marT="25400" marB="25400" anchor="ctr">
+                  <a:tcPr anchor="ctr" marL="88900" marR="63500" marT="25400" marB="25400">
                     <a:solidFill>
                       <a:srgbClr val="FFFFFF"/>
                     </a:solidFill>
                   </a:tcPr>
                 </a:tc>
-                <a:extLst>
-                  <a:ext uri="{0D108BD9-81ED-4DB2-BD59-A6C34878D82A}">
-                    <a16:rowId xmlns:a16="http://schemas.microsoft.com/office/drawing/2014/main" val="10004"/>
-                  </a:ext>
-                </a:extLst>
               </a:tr>
               <a:tr h="470262">
                 <a:tc>
                   <a:txBody>
-                    <a:bodyPr/>
+                    <a:bodyPr wrap="square"/>
                     <a:lstStyle/>
                     <a:p>
                       <a:r>
@@ -18114,7 +17361,7 @@
                       </a:r>
                     </a:p>
                   </a:txBody>
-                  <a:tcPr marL="88900" marR="63500" marT="25400" marB="25400" anchor="ctr">
+                  <a:tcPr anchor="ctr" marL="88900" marR="63500" marT="25400" marB="25400">
                     <a:solidFill>
                       <a:srgbClr val="F4F7F9"/>
                     </a:solidFill>
@@ -18122,7 +17369,7 @@
                 </a:tc>
                 <a:tc>
                   <a:txBody>
-                    <a:bodyPr/>
+                    <a:bodyPr wrap="square"/>
                     <a:lstStyle/>
                     <a:p>
                       <a:r>
@@ -18136,7 +17383,7 @@
                       </a:r>
                     </a:p>
                   </a:txBody>
-                  <a:tcPr marL="88900" marR="63500" marT="25400" marB="25400" anchor="ctr">
+                  <a:tcPr anchor="ctr" marL="88900" marR="63500" marT="25400" marB="25400">
                     <a:solidFill>
                       <a:srgbClr val="F4F7F9"/>
                     </a:solidFill>
@@ -18144,7 +17391,7 @@
                 </a:tc>
                 <a:tc>
                   <a:txBody>
-                    <a:bodyPr/>
+                    <a:bodyPr wrap="square"/>
                     <a:lstStyle/>
                     <a:p>
                       <a:r>
@@ -18158,22 +17405,17 @@
                       </a:r>
                     </a:p>
                   </a:txBody>
-                  <a:tcPr marL="88900" marR="63500" marT="25400" marB="25400" anchor="ctr">
+                  <a:tcPr anchor="ctr" marL="88900" marR="63500" marT="25400" marB="25400">
                     <a:solidFill>
                       <a:srgbClr val="F4F7F9"/>
                     </a:solidFill>
                   </a:tcPr>
                 </a:tc>
-                <a:extLst>
-                  <a:ext uri="{0D108BD9-81ED-4DB2-BD59-A6C34878D82A}">
-                    <a16:rowId xmlns:a16="http://schemas.microsoft.com/office/drawing/2014/main" val="10005"/>
-                  </a:ext>
-                </a:extLst>
               </a:tr>
               <a:tr h="470268">
                 <a:tc>
                   <a:txBody>
-                    <a:bodyPr/>
+                    <a:bodyPr wrap="square"/>
                     <a:lstStyle/>
                     <a:p>
                       <a:r>
@@ -18187,7 +17429,7 @@
                       </a:r>
                     </a:p>
                   </a:txBody>
-                  <a:tcPr marL="88900" marR="63500" marT="25400" marB="25400" anchor="ctr">
+                  <a:tcPr anchor="ctr" marL="88900" marR="63500" marT="25400" marB="25400">
                     <a:solidFill>
                       <a:srgbClr val="FFFFFF"/>
                     </a:solidFill>
@@ -18195,7 +17437,7 @@
                 </a:tc>
                 <a:tc>
                   <a:txBody>
-                    <a:bodyPr/>
+                    <a:bodyPr wrap="square"/>
                     <a:lstStyle/>
                     <a:p>
                       <a:r>
@@ -18209,7 +17451,7 @@
                       </a:r>
                     </a:p>
                   </a:txBody>
-                  <a:tcPr marL="88900" marR="63500" marT="25400" marB="25400" anchor="ctr">
+                  <a:tcPr anchor="ctr" marL="88900" marR="63500" marT="25400" marB="25400">
                     <a:solidFill>
                       <a:srgbClr val="FFFFFF"/>
                     </a:solidFill>
@@ -18217,7 +17459,7 @@
                 </a:tc>
                 <a:tc>
                   <a:txBody>
-                    <a:bodyPr/>
+                    <a:bodyPr wrap="square"/>
                     <a:lstStyle/>
                     <a:p>
                       <a:r>
@@ -18231,17 +17473,12 @@
                       </a:r>
                     </a:p>
                   </a:txBody>
-                  <a:tcPr marL="88900" marR="63500" marT="25400" marB="25400" anchor="ctr">
+                  <a:tcPr anchor="ctr" marL="88900" marR="63500" marT="25400" marB="25400">
                     <a:solidFill>
                       <a:srgbClr val="FFFFFF"/>
                     </a:solidFill>
                   </a:tcPr>
                 </a:tc>
-                <a:extLst>
-                  <a:ext uri="{0D108BD9-81ED-4DB2-BD59-A6C34878D82A}">
-                    <a16:rowId xmlns:a16="http://schemas.microsoft.com/office/drawing/2014/main" val="10006"/>
-                  </a:ext>
-                </a:extLst>
               </a:tr>
             </a:tbl>
           </a:graphicData>
@@ -18285,11 +17522,10 @@
           </a:fontRef>
         </p:style>
         <p:txBody>
-          <a:bodyPr wrap="square" rtlCol="0" anchor="ctr"/>
+          <a:bodyPr rtlCol="0" anchor="ctr" wrap="square"/>
           <a:lstStyle/>
           <a:p>
             <a:pPr algn="ctr"/>
-            <a:endParaRPr/>
           </a:p>
         </p:txBody>
       </p:sp>
@@ -18310,7 +17546,7 @@
           <a:noFill/>
         </p:spPr>
         <p:txBody>
-          <a:bodyPr wrap="square" lIns="25400" tIns="25400" rIns="25400" bIns="25400" anchor="ctr">
+          <a:bodyPr wrap="square" anchor="ctr" lIns="25400" rIns="25400" tIns="25400" bIns="25400">
             <a:spAutoFit/>
           </a:bodyPr>
           <a:lstStyle/>
@@ -18349,7 +17585,7 @@
           <a:noFill/>
         </p:spPr>
         <p:txBody>
-          <a:bodyPr wrap="square" lIns="25400" tIns="25400" rIns="25400" bIns="25400" anchor="t">
+          <a:bodyPr wrap="square" anchor="t" lIns="25400" rIns="25400" tIns="25400" bIns="25400">
             <a:spAutoFit/>
           </a:bodyPr>
           <a:lstStyle/>
@@ -18380,7 +17616,7 @@
 </file>
 
 <file path=ppt/slides/slide22.xml><?xml version="1.0" encoding="utf-8"?>
-<p:sld xmlns:a="http://schemas.openxmlformats.org/drawingml/2006/main" xmlns:r="http://schemas.openxmlformats.org/officeDocument/2006/relationships" xmlns:p="http://schemas.openxmlformats.org/presentationml/2006/main">
+<p:sld xmlns:a="http://schemas.openxmlformats.org/drawingml/2006/main" xmlns:p="http://schemas.openxmlformats.org/presentationml/2006/main" xmlns:r="http://schemas.openxmlformats.org/officeDocument/2006/relationships">
   <p:cSld>
     <p:spTree>
       <p:nvGrpSpPr>
@@ -18388,14 +17624,7 @@
         <p:cNvGrpSpPr/>
         <p:nvPr/>
       </p:nvGrpSpPr>
-      <p:grpSpPr>
-        <a:xfrm>
-          <a:off x="0" y="0"/>
-          <a:ext cx="0" cy="0"/>
-          <a:chOff x="0" y="0"/>
-          <a:chExt cx="0" cy="0"/>
-        </a:xfrm>
-      </p:grpSpPr>
+      <p:grpSpPr/>
       <p:sp>
         <p:nvSpPr>
           <p:cNvPr id="2" name="Rectangle 1"/>
@@ -18436,7 +17665,6 @@
           <a:lstStyle/>
           <a:p>
             <a:pPr algn="ctr"/>
-            <a:endParaRPr/>
           </a:p>
         </p:txBody>
       </p:sp>
@@ -18457,7 +17685,7 @@
           <a:noFill/>
         </p:spPr>
         <p:txBody>
-          <a:bodyPr wrap="square" lIns="25400" tIns="25400" rIns="25400" bIns="25400" anchor="t">
+          <a:bodyPr wrap="square" anchor="t" lIns="25400" rIns="25400" tIns="25400" bIns="25400">
             <a:spAutoFit/>
           </a:bodyPr>
           <a:lstStyle/>
@@ -18496,7 +17724,7 @@
           <a:noFill/>
         </p:spPr>
         <p:txBody>
-          <a:bodyPr wrap="square" lIns="25400" tIns="25400" rIns="25400" bIns="25400" anchor="t">
+          <a:bodyPr wrap="square" anchor="t" lIns="25400" rIns="25400" tIns="25400" bIns="25400">
             <a:spAutoFit/>
           </a:bodyPr>
           <a:lstStyle/>
@@ -18558,7 +17786,6 @@
           <a:lstStyle/>
           <a:p>
             <a:pPr algn="ctr"/>
-            <a:endParaRPr/>
           </a:p>
         </p:txBody>
       </p:sp>
@@ -18602,11 +17829,10 @@
           </a:fontRef>
         </p:style>
         <p:txBody>
-          <a:bodyPr wrap="square" rtlCol="0" anchor="ctr"/>
+          <a:bodyPr rtlCol="0" anchor="ctr" wrap="square"/>
           <a:lstStyle/>
           <a:p>
             <a:pPr algn="ctr"/>
-            <a:endParaRPr/>
           </a:p>
         </p:txBody>
       </p:sp>
@@ -18646,7 +17872,7 @@
           </a:fontRef>
         </p:style>
         <p:txBody>
-          <a:bodyPr wrap="none" lIns="0" tIns="0" rIns="0" bIns="0" rtlCol="0" anchor="ctr"/>
+          <a:bodyPr rtlCol="0" anchor="ctr" wrap="none" lIns="0" rIns="0" tIns="0" bIns="0"/>
           <a:lstStyle/>
           <a:p>
             <a:pPr algn="ctr"/>
@@ -18657,7 +17883,7 @@
                 </a:solidFill>
                 <a:latin typeface="Calibri"/>
               </a:rPr>
-              <a:t>✉</a:t>
+              <a:t>1</a:t>
             </a:r>
           </a:p>
         </p:txBody>
@@ -18679,7 +17905,7 @@
           <a:noFill/>
         </p:spPr>
         <p:txBody>
-          <a:bodyPr wrap="square" lIns="25400" tIns="25400" rIns="25400" bIns="25400" anchor="t">
+          <a:bodyPr wrap="square" anchor="t" lIns="25400" rIns="25400" tIns="25400" bIns="25400">
             <a:spAutoFit/>
           </a:bodyPr>
           <a:lstStyle/>
@@ -18763,11 +17989,10 @@
           </a:fontRef>
         </p:style>
         <p:txBody>
-          <a:bodyPr wrap="square" rtlCol="0" anchor="ctr"/>
+          <a:bodyPr rtlCol="0" anchor="ctr" wrap="square"/>
           <a:lstStyle/>
           <a:p>
             <a:pPr algn="ctr"/>
-            <a:endParaRPr/>
           </a:p>
         </p:txBody>
       </p:sp>
@@ -18807,7 +18032,7 @@
           </a:fontRef>
         </p:style>
         <p:txBody>
-          <a:bodyPr wrap="none" lIns="0" tIns="0" rIns="0" bIns="0" rtlCol="0" anchor="ctr"/>
+          <a:bodyPr rtlCol="0" anchor="ctr" wrap="none" lIns="0" rIns="0" tIns="0" bIns="0"/>
           <a:lstStyle/>
           <a:p>
             <a:pPr algn="ctr"/>
@@ -18818,7 +18043,7 @@
                 </a:solidFill>
                 <a:latin typeface="Calibri"/>
               </a:rPr>
-              <a:t>☎</a:t>
+              <a:t>2</a:t>
             </a:r>
           </a:p>
         </p:txBody>
@@ -18840,7 +18065,7 @@
           <a:noFill/>
         </p:spPr>
         <p:txBody>
-          <a:bodyPr wrap="square" lIns="25400" tIns="25400" rIns="25400" bIns="25400" anchor="t">
+          <a:bodyPr wrap="square" anchor="t" lIns="25400" rIns="25400" tIns="25400" bIns="25400">
             <a:spAutoFit/>
           </a:bodyPr>
           <a:lstStyle/>
@@ -18924,11 +18149,10 @@
           </a:fontRef>
         </p:style>
         <p:txBody>
-          <a:bodyPr wrap="square" rtlCol="0" anchor="ctr"/>
+          <a:bodyPr rtlCol="0" anchor="ctr" wrap="square"/>
           <a:lstStyle/>
           <a:p>
             <a:pPr algn="ctr"/>
-            <a:endParaRPr/>
           </a:p>
         </p:txBody>
       </p:sp>
@@ -18968,7 +18192,7 @@
           </a:fontRef>
         </p:style>
         <p:txBody>
-          <a:bodyPr wrap="none" lIns="0" tIns="0" rIns="0" bIns="0" rtlCol="0" anchor="ctr"/>
+          <a:bodyPr rtlCol="0" anchor="ctr" wrap="none" lIns="0" rIns="0" tIns="0" bIns="0"/>
           <a:lstStyle/>
           <a:p>
             <a:pPr algn="ctr"/>
@@ -18979,7 +18203,7 @@
                 </a:solidFill>
                 <a:latin typeface="Calibri"/>
               </a:rPr>
-              <a:t>▶</a:t>
+              <a:t>3</a:t>
             </a:r>
           </a:p>
         </p:txBody>
@@ -19001,7 +18225,7 @@
           <a:noFill/>
         </p:spPr>
         <p:txBody>
-          <a:bodyPr wrap="square" lIns="25400" tIns="25400" rIns="25400" bIns="25400" anchor="t">
+          <a:bodyPr wrap="square" anchor="t" lIns="25400" rIns="25400" tIns="25400" bIns="25400">
             <a:spAutoFit/>
           </a:bodyPr>
           <a:lstStyle/>
@@ -19085,11 +18309,10 @@
           </a:fontRef>
         </p:style>
         <p:txBody>
-          <a:bodyPr wrap="square" rtlCol="0" anchor="ctr"/>
+          <a:bodyPr rtlCol="0" anchor="ctr" wrap="square"/>
           <a:lstStyle/>
           <a:p>
             <a:pPr algn="ctr"/>
-            <a:endParaRPr/>
           </a:p>
         </p:txBody>
       </p:sp>
@@ -19129,7 +18352,7 @@
           </a:fontRef>
         </p:style>
         <p:txBody>
-          <a:bodyPr wrap="none" lIns="0" tIns="0" rIns="0" bIns="0" rtlCol="0" anchor="ctr"/>
+          <a:bodyPr rtlCol="0" anchor="ctr" wrap="none" lIns="0" rIns="0" tIns="0" bIns="0"/>
           <a:lstStyle/>
           <a:p>
             <a:pPr algn="ctr"/>
@@ -19140,7 +18363,7 @@
                 </a:solidFill>
                 <a:latin typeface="Calibri"/>
               </a:rPr>
-              <a:t>☁</a:t>
+              <a:t>4</a:t>
             </a:r>
           </a:p>
         </p:txBody>
@@ -19162,7 +18385,7 @@
           <a:noFill/>
         </p:spPr>
         <p:txBody>
-          <a:bodyPr wrap="square" lIns="25400" tIns="25400" rIns="25400" bIns="25400" anchor="t">
+          <a:bodyPr wrap="square" anchor="t" lIns="25400" rIns="25400" tIns="25400" bIns="25400">
             <a:spAutoFit/>
           </a:bodyPr>
           <a:lstStyle/>
@@ -19246,11 +18469,10 @@
           </a:fontRef>
         </p:style>
         <p:txBody>
-          <a:bodyPr wrap="square" rtlCol="0" anchor="ctr"/>
+          <a:bodyPr rtlCol="0" anchor="ctr" wrap="square"/>
           <a:lstStyle/>
           <a:p>
             <a:pPr algn="ctr"/>
-            <a:endParaRPr/>
           </a:p>
         </p:txBody>
       </p:sp>
@@ -19290,7 +18512,7 @@
           </a:fontRef>
         </p:style>
         <p:txBody>
-          <a:bodyPr wrap="none" lIns="0" tIns="0" rIns="0" bIns="0" rtlCol="0" anchor="ctr"/>
+          <a:bodyPr rtlCol="0" anchor="ctr" wrap="none" lIns="0" rIns="0" tIns="0" bIns="0"/>
           <a:lstStyle/>
           <a:p>
             <a:pPr algn="ctr"/>
@@ -19301,7 +18523,7 @@
                 </a:solidFill>
                 <a:latin typeface="Calibri"/>
               </a:rPr>
-              <a:t>✦</a:t>
+              <a:t>5</a:t>
             </a:r>
           </a:p>
         </p:txBody>
@@ -19323,7 +18545,7 @@
           <a:noFill/>
         </p:spPr>
         <p:txBody>
-          <a:bodyPr wrap="square" lIns="25400" tIns="25400" rIns="25400" bIns="25400" anchor="t">
+          <a:bodyPr wrap="square" anchor="t" lIns="25400" rIns="25400" tIns="25400" bIns="25400">
             <a:spAutoFit/>
           </a:bodyPr>
           <a:lstStyle/>
@@ -19362,7 +18584,7 @@
                 </a:solidFill>
                 <a:latin typeface="Calibri"/>
               </a:rPr>
-              <a:t>Gate on ultra-low latency &amp; jitter</a:t>
+              <a:t>Gate on ultra-low latency and jitter</a:t>
             </a:r>
           </a:p>
         </p:txBody>
@@ -19407,11 +18629,10 @@
           </a:fontRef>
         </p:style>
         <p:txBody>
-          <a:bodyPr wrap="square" rtlCol="0" anchor="ctr"/>
+          <a:bodyPr rtlCol="0" anchor="ctr" wrap="square"/>
           <a:lstStyle/>
           <a:p>
             <a:pPr algn="ctr"/>
-            <a:endParaRPr/>
           </a:p>
         </p:txBody>
       </p:sp>
@@ -19451,7 +18672,7 @@
           </a:fontRef>
         </p:style>
         <p:txBody>
-          <a:bodyPr wrap="none" lIns="0" tIns="0" rIns="0" bIns="0" rtlCol="0" anchor="ctr"/>
+          <a:bodyPr rtlCol="0" anchor="ctr" wrap="none" lIns="0" rIns="0" tIns="0" bIns="0"/>
           <a:lstStyle/>
           <a:p>
             <a:pPr algn="ctr"/>
@@ -19462,7 +18683,7 @@
                 </a:solidFill>
                 <a:latin typeface="Calibri"/>
               </a:rPr>
-              <a:t>∿</a:t>
+              <a:t>6</a:t>
             </a:r>
           </a:p>
         </p:txBody>
@@ -19484,7 +18705,7 @@
           <a:noFill/>
         </p:spPr>
         <p:txBody>
-          <a:bodyPr wrap="square" lIns="25400" tIns="25400" rIns="25400" bIns="25400" anchor="t">
+          <a:bodyPr wrap="square" anchor="t" lIns="25400" rIns="25400" tIns="25400" bIns="25400">
             <a:spAutoFit/>
           </a:bodyPr>
           <a:lstStyle/>
@@ -19568,11 +18789,10 @@
           </a:fontRef>
         </p:style>
         <p:txBody>
-          <a:bodyPr wrap="square" rtlCol="0" anchor="ctr"/>
+          <a:bodyPr rtlCol="0" anchor="ctr" wrap="square"/>
           <a:lstStyle/>
           <a:p>
             <a:pPr algn="ctr"/>
-            <a:endParaRPr/>
           </a:p>
         </p:txBody>
       </p:sp>
@@ -19612,7 +18832,7 @@
           </a:fontRef>
         </p:style>
         <p:txBody>
-          <a:bodyPr wrap="none" lIns="0" tIns="0" rIns="0" bIns="0" rtlCol="0" anchor="ctr"/>
+          <a:bodyPr rtlCol="0" anchor="ctr" wrap="none" lIns="0" rIns="0" tIns="0" bIns="0"/>
           <a:lstStyle/>
           <a:p>
             <a:pPr algn="ctr"/>
@@ -19623,7 +18843,7 @@
                 </a:solidFill>
                 <a:latin typeface="Calibri"/>
               </a:rPr>
-              <a:t>⚕</a:t>
+              <a:t>7</a:t>
             </a:r>
           </a:p>
         </p:txBody>
@@ -19645,7 +18865,7 @@
           <a:noFill/>
         </p:spPr>
         <p:txBody>
-          <a:bodyPr wrap="square" lIns="25400" tIns="25400" rIns="25400" bIns="25400" anchor="t">
+          <a:bodyPr wrap="square" anchor="t" lIns="25400" rIns="25400" tIns="25400" bIns="25400">
             <a:spAutoFit/>
           </a:bodyPr>
           <a:lstStyle/>
@@ -19684,7 +18904,7 @@
                 </a:solidFill>
                 <a:latin typeface="Calibri"/>
               </a:rPr>
-              <a:t>Video visits — check call quality first</a:t>
+              <a:t>Video visits: check call quality first</a:t>
             </a:r>
           </a:p>
         </p:txBody>
@@ -19729,11 +18949,10 @@
           </a:fontRef>
         </p:style>
         <p:txBody>
-          <a:bodyPr wrap="square" rtlCol="0" anchor="ctr"/>
+          <a:bodyPr rtlCol="0" anchor="ctr" wrap="square"/>
           <a:lstStyle/>
           <a:p>
             <a:pPr algn="ctr"/>
-            <a:endParaRPr/>
           </a:p>
         </p:txBody>
       </p:sp>
@@ -19773,7 +18992,7 @@
           </a:fontRef>
         </p:style>
         <p:txBody>
-          <a:bodyPr wrap="none" lIns="0" tIns="0" rIns="0" bIns="0" rtlCol="0" anchor="ctr"/>
+          <a:bodyPr rtlCol="0" anchor="ctr" wrap="none" lIns="0" rIns="0" tIns="0" bIns="0"/>
           <a:lstStyle/>
           <a:p>
             <a:pPr algn="ctr"/>
@@ -19784,7 +19003,7 @@
                 </a:solidFill>
                 <a:latin typeface="Calibri"/>
               </a:rPr>
-              <a:t>⬡</a:t>
+              <a:t>8</a:t>
             </a:r>
           </a:p>
         </p:txBody>
@@ -19806,7 +19025,7 @@
           <a:noFill/>
         </p:spPr>
         <p:txBody>
-          <a:bodyPr wrap="square" lIns="25400" tIns="25400" rIns="25400" bIns="25400" anchor="t">
+          <a:bodyPr wrap="square" anchor="t" lIns="25400" rIns="25400" tIns="25400" bIns="25400">
             <a:spAutoFit/>
           </a:bodyPr>
           <a:lstStyle/>
@@ -19890,11 +19109,10 @@
           </a:fontRef>
         </p:style>
         <p:txBody>
-          <a:bodyPr wrap="square" rtlCol="0" anchor="ctr"/>
+          <a:bodyPr rtlCol="0" anchor="ctr" wrap="square"/>
           <a:lstStyle/>
           <a:p>
             <a:pPr algn="ctr"/>
-            <a:endParaRPr/>
           </a:p>
         </p:txBody>
       </p:sp>
@@ -19934,7 +19152,7 @@
           </a:fontRef>
         </p:style>
         <p:txBody>
-          <a:bodyPr wrap="none" lIns="0" tIns="0" rIns="0" bIns="0" rtlCol="0" anchor="ctr"/>
+          <a:bodyPr rtlCol="0" anchor="ctr" wrap="none" lIns="0" rIns="0" tIns="0" bIns="0"/>
           <a:lstStyle/>
           <a:p>
             <a:pPr algn="ctr"/>
@@ -19945,7 +19163,7 @@
                 </a:solidFill>
                 <a:latin typeface="Calibri"/>
               </a:rPr>
-              <a:t>⌖</a:t>
+              <a:t>9</a:t>
             </a:r>
           </a:p>
         </p:txBody>
@@ -19967,7 +19185,7 @@
           <a:noFill/>
         </p:spPr>
         <p:txBody>
-          <a:bodyPr wrap="square" lIns="25400" tIns="25400" rIns="25400" bIns="25400" anchor="t">
+          <a:bodyPr wrap="square" anchor="t" lIns="25400" rIns="25400" tIns="25400" bIns="25400">
             <a:spAutoFit/>
           </a:bodyPr>
           <a:lstStyle/>
@@ -20006,7 +19224,7 @@
                 </a:solidFill>
                 <a:latin typeface="Calibri"/>
               </a:rPr>
-              <a:t>Weak data → switch to offline tiles</a:t>
+              <a:t>Weak data: switch to offline tiles</a:t>
             </a:r>
           </a:p>
         </p:txBody>
@@ -20028,7 +19246,7 @@
           <a:noFill/>
         </p:spPr>
         <p:txBody>
-          <a:bodyPr wrap="square" lIns="25400" tIns="25400" rIns="25400" bIns="25400" anchor="t">
+          <a:bodyPr wrap="square" anchor="t" lIns="25400" rIns="25400" tIns="25400" bIns="25400">
             <a:spAutoFit/>
           </a:bodyPr>
           <a:lstStyle/>
@@ -20059,7 +19277,7 @@
 </file>
 
 <file path=ppt/slides/slide3.xml><?xml version="1.0" encoding="utf-8"?>
-<p:sld xmlns:a="http://schemas.openxmlformats.org/drawingml/2006/main" xmlns:r="http://schemas.openxmlformats.org/officeDocument/2006/relationships" xmlns:p="http://schemas.openxmlformats.org/presentationml/2006/main">
+<p:sld xmlns:a="http://schemas.openxmlformats.org/drawingml/2006/main" xmlns:p="http://schemas.openxmlformats.org/presentationml/2006/main" xmlns:r="http://schemas.openxmlformats.org/officeDocument/2006/relationships">
   <p:cSld>
     <p:spTree>
       <p:nvGrpSpPr>
@@ -20067,14 +19285,7 @@
         <p:cNvGrpSpPr/>
         <p:nvPr/>
       </p:nvGrpSpPr>
-      <p:grpSpPr>
-        <a:xfrm>
-          <a:off x="0" y="0"/>
-          <a:ext cx="0" cy="0"/>
-          <a:chOff x="0" y="0"/>
-          <a:chExt cx="0" cy="0"/>
-        </a:xfrm>
-      </p:grpSpPr>
+      <p:grpSpPr/>
       <p:sp>
         <p:nvSpPr>
           <p:cNvPr id="2" name="Rectangle 1"/>
@@ -20115,7 +19326,6 @@
           <a:lstStyle/>
           <a:p>
             <a:pPr algn="ctr"/>
-            <a:endParaRPr/>
           </a:p>
         </p:txBody>
       </p:sp>
@@ -20136,7 +19346,7 @@
           <a:noFill/>
         </p:spPr>
         <p:txBody>
-          <a:bodyPr wrap="square" lIns="25400" tIns="25400" rIns="25400" bIns="25400" anchor="t">
+          <a:bodyPr wrap="square" anchor="t" lIns="25400" rIns="25400" tIns="25400" bIns="25400">
             <a:spAutoFit/>
           </a:bodyPr>
           <a:lstStyle/>
@@ -20175,7 +19385,7 @@
           <a:noFill/>
         </p:spPr>
         <p:txBody>
-          <a:bodyPr wrap="square" lIns="25400" tIns="25400" rIns="25400" bIns="25400" anchor="t">
+          <a:bodyPr wrap="square" anchor="t" lIns="25400" rIns="25400" tIns="25400" bIns="25400">
             <a:spAutoFit/>
           </a:bodyPr>
           <a:lstStyle/>
@@ -20237,7 +19447,6 @@
           <a:lstStyle/>
           <a:p>
             <a:pPr algn="ctr"/>
-            <a:endParaRPr/>
           </a:p>
         </p:txBody>
       </p:sp>
@@ -20258,7 +19467,7 @@
           <a:noFill/>
         </p:spPr>
         <p:txBody>
-          <a:bodyPr wrap="square" lIns="25400" tIns="25400" rIns="25400" bIns="25400" anchor="t">
+          <a:bodyPr wrap="square" anchor="t" lIns="25400" rIns="25400" tIns="25400" bIns="25400">
             <a:spAutoFit/>
           </a:bodyPr>
           <a:lstStyle/>
@@ -20323,11 +19532,10 @@
           </a:fontRef>
         </p:style>
         <p:txBody>
-          <a:bodyPr wrap="square" rtlCol="0" anchor="ctr"/>
+          <a:bodyPr rtlCol="0" anchor="ctr" wrap="square"/>
           <a:lstStyle/>
           <a:p>
             <a:pPr algn="ctr"/>
-            <a:endParaRPr/>
           </a:p>
         </p:txBody>
       </p:sp>
@@ -20372,7 +19580,7 @@
           <a:p>
             <a:pPr algn="ctr"/>
             <a:r>
-              <a:rPr sz="1500" b="1">
+              <a:rPr b="1" sz="1500">
                 <a:solidFill>
                   <a:srgbClr val="FFFFFF"/>
                 </a:solidFill>
@@ -20399,7 +19607,7 @@
           <a:noFill/>
         </p:spPr>
         <p:txBody>
-          <a:bodyPr wrap="square" lIns="25400" tIns="25400" rIns="25400" bIns="25400" anchor="t">
+          <a:bodyPr wrap="square" anchor="t" lIns="25400" rIns="25400" tIns="25400" bIns="25400">
             <a:spAutoFit/>
           </a:bodyPr>
           <a:lstStyle/>
@@ -20464,11 +19672,10 @@
           </a:fontRef>
         </p:style>
         <p:txBody>
-          <a:bodyPr wrap="square" rtlCol="0" anchor="ctr"/>
+          <a:bodyPr rtlCol="0" anchor="ctr" wrap="square"/>
           <a:lstStyle/>
           <a:p>
             <a:pPr algn="ctr"/>
-            <a:endParaRPr/>
           </a:p>
         </p:txBody>
       </p:sp>
@@ -20513,7 +19720,7 @@
           <a:p>
             <a:pPr algn="ctr"/>
             <a:r>
-              <a:rPr sz="1500" b="1">
+              <a:rPr b="1" sz="1500">
                 <a:solidFill>
                   <a:srgbClr val="FFFFFF"/>
                 </a:solidFill>
@@ -20540,7 +19747,7 @@
           <a:noFill/>
         </p:spPr>
         <p:txBody>
-          <a:bodyPr wrap="square" lIns="25400" tIns="25400" rIns="25400" bIns="25400" anchor="t">
+          <a:bodyPr wrap="square" anchor="t" lIns="25400" rIns="25400" tIns="25400" bIns="25400">
             <a:spAutoFit/>
           </a:bodyPr>
           <a:lstStyle/>
@@ -20605,11 +19812,10 @@
           </a:fontRef>
         </p:style>
         <p:txBody>
-          <a:bodyPr wrap="square" rtlCol="0" anchor="ctr"/>
+          <a:bodyPr rtlCol="0" anchor="ctr" wrap="square"/>
           <a:lstStyle/>
           <a:p>
             <a:pPr algn="ctr"/>
-            <a:endParaRPr/>
           </a:p>
         </p:txBody>
       </p:sp>
@@ -20654,7 +19860,7 @@
           <a:p>
             <a:pPr algn="ctr"/>
             <a:r>
-              <a:rPr sz="1500" b="1">
+              <a:rPr b="1" sz="1500">
                 <a:solidFill>
                   <a:srgbClr val="FFFFFF"/>
                 </a:solidFill>
@@ -20681,7 +19887,7 @@
           <a:noFill/>
         </p:spPr>
         <p:txBody>
-          <a:bodyPr wrap="square" lIns="25400" tIns="25400" rIns="25400" bIns="25400" anchor="t">
+          <a:bodyPr wrap="square" anchor="t" lIns="25400" rIns="25400" tIns="25400" bIns="25400">
             <a:spAutoFit/>
           </a:bodyPr>
           <a:lstStyle/>
@@ -20744,11 +19950,10 @@
           </a:fontRef>
         </p:style>
         <p:txBody>
-          <a:bodyPr wrap="square" rtlCol="0" anchor="ctr"/>
+          <a:bodyPr rtlCol="0" anchor="ctr" wrap="square"/>
           <a:lstStyle/>
           <a:p>
             <a:pPr algn="ctr"/>
-            <a:endParaRPr/>
           </a:p>
         </p:txBody>
       </p:sp>
@@ -20769,7 +19974,7 @@
           <a:noFill/>
         </p:spPr>
         <p:txBody>
-          <a:bodyPr wrap="square" lIns="25400" tIns="25400" rIns="25400" bIns="25400" anchor="t">
+          <a:bodyPr wrap="square" anchor="t" lIns="25400" rIns="25400" tIns="25400" bIns="25400">
             <a:spAutoFit/>
           </a:bodyPr>
           <a:lstStyle/>
@@ -20851,7 +20056,7 @@
           </a:fontRef>
         </p:style>
         <p:txBody>
-          <a:bodyPr wrap="square" lIns="152400" tIns="101600" rIns="127000" bIns="101600" rtlCol="0" anchor="t"/>
+          <a:bodyPr rtlCol="0" anchor="t" wrap="square" lIns="152400" rIns="127000" tIns="101600" bIns="101600"/>
           <a:lstStyle/>
           <a:p>
             <a:pPr algn="ctr">
@@ -20904,7 +20109,7 @@
           <a:noFill/>
         </p:spPr>
         <p:txBody>
-          <a:bodyPr wrap="square" lIns="25400" tIns="25400" rIns="25400" bIns="25400" anchor="t">
+          <a:bodyPr wrap="square" anchor="t" lIns="25400" rIns="25400" tIns="25400" bIns="25400">
             <a:spAutoFit/>
           </a:bodyPr>
           <a:lstStyle/>
@@ -20935,7 +20140,7 @@
 </file>
 
 <file path=ppt/slides/slide4.xml><?xml version="1.0" encoding="utf-8"?>
-<p:sld xmlns:a="http://schemas.openxmlformats.org/drawingml/2006/main" xmlns:r="http://schemas.openxmlformats.org/officeDocument/2006/relationships" xmlns:p="http://schemas.openxmlformats.org/presentationml/2006/main">
+<p:sld xmlns:a="http://schemas.openxmlformats.org/drawingml/2006/main" xmlns:p="http://schemas.openxmlformats.org/presentationml/2006/main" xmlns:r="http://schemas.openxmlformats.org/officeDocument/2006/relationships">
   <p:cSld>
     <p:spTree>
       <p:nvGrpSpPr>
@@ -20943,14 +20148,7 @@
         <p:cNvGrpSpPr/>
         <p:nvPr/>
       </p:nvGrpSpPr>
-      <p:grpSpPr>
-        <a:xfrm>
-          <a:off x="0" y="0"/>
-          <a:ext cx="0" cy="0"/>
-          <a:chOff x="0" y="0"/>
-          <a:chExt cx="0" cy="0"/>
-        </a:xfrm>
-      </p:grpSpPr>
+      <p:grpSpPr/>
       <p:sp>
         <p:nvSpPr>
           <p:cNvPr id="2" name="Rectangle 1"/>
@@ -20991,7 +20189,6 @@
           <a:lstStyle/>
           <a:p>
             <a:pPr algn="ctr"/>
-            <a:endParaRPr/>
           </a:p>
         </p:txBody>
       </p:sp>
@@ -21012,7 +20209,7 @@
           <a:noFill/>
         </p:spPr>
         <p:txBody>
-          <a:bodyPr wrap="square" lIns="25400" tIns="25400" rIns="25400" bIns="25400" anchor="t">
+          <a:bodyPr wrap="square" anchor="t" lIns="25400" rIns="25400" tIns="25400" bIns="25400">
             <a:spAutoFit/>
           </a:bodyPr>
           <a:lstStyle/>
@@ -21051,7 +20248,7 @@
           <a:noFill/>
         </p:spPr>
         <p:txBody>
-          <a:bodyPr wrap="square" lIns="25400" tIns="25400" rIns="25400" bIns="25400" anchor="t">
+          <a:bodyPr wrap="square" anchor="t" lIns="25400" rIns="25400" tIns="25400" bIns="25400">
             <a:spAutoFit/>
           </a:bodyPr>
           <a:lstStyle/>
@@ -21113,7 +20310,6 @@
           <a:lstStyle/>
           <a:p>
             <a:pPr algn="ctr"/>
-            <a:endParaRPr/>
           </a:p>
         </p:txBody>
       </p:sp>
@@ -21136,36 +20332,18 @@
                 <a:tableStyleId>{5C22544A-7EE6-4342-B048-85BDC9FD1C3A}</a:tableStyleId>
               </a:tblPr>
               <a:tblGrid>
-                <a:gridCol w="981307">
-                  <a:extLst>
-                    <a:ext uri="{9D8B030D-6E8A-4147-A177-3AD203B41FA5}">
-                      <a16:colId xmlns:a16="http://schemas.microsoft.com/office/drawing/2014/main" val="20000"/>
-                    </a:ext>
-                  </a:extLst>
-                </a:gridCol>
-                <a:gridCol w="3033131">
-                  <a:extLst>
-                    <a:ext uri="{9D8B030D-6E8A-4147-A177-3AD203B41FA5}">
-                      <a16:colId xmlns:a16="http://schemas.microsoft.com/office/drawing/2014/main" val="20001"/>
-                    </a:ext>
-                  </a:extLst>
-                </a:gridCol>
-                <a:gridCol w="6958360">
-                  <a:extLst>
-                    <a:ext uri="{9D8B030D-6E8A-4147-A177-3AD203B41FA5}">
-                      <a16:colId xmlns:a16="http://schemas.microsoft.com/office/drawing/2014/main" val="20002"/>
-                    </a:ext>
-                  </a:extLst>
-                </a:gridCol>
+                <a:gridCol w="981307"/>
+                <a:gridCol w="3033131"/>
+                <a:gridCol w="6958360"/>
               </a:tblGrid>
               <a:tr h="457200">
                 <a:tc>
                   <a:txBody>
-                    <a:bodyPr/>
+                    <a:bodyPr wrap="square"/>
                     <a:lstStyle/>
                     <a:p>
                       <a:r>
-                        <a:rPr sz="1400" b="1">
+                        <a:rPr b="1" sz="1400">
                           <a:solidFill>
                             <a:srgbClr val="FFFFFF"/>
                           </a:solidFill>
@@ -21175,7 +20353,7 @@
                       </a:r>
                     </a:p>
                   </a:txBody>
-                  <a:tcPr marL="88900" marR="63500" marT="38100" marB="38100" anchor="ctr">
+                  <a:tcPr anchor="ctr" marL="88900" marR="63500" marT="38100" marB="38100">
                     <a:solidFill>
                       <a:srgbClr val="0F2A43"/>
                     </a:solidFill>
@@ -21183,11 +20361,11 @@
                 </a:tc>
                 <a:tc>
                   <a:txBody>
-                    <a:bodyPr/>
+                    <a:bodyPr wrap="square"/>
                     <a:lstStyle/>
                     <a:p>
                       <a:r>
-                        <a:rPr sz="1400" b="1">
+                        <a:rPr b="1" sz="1400">
                           <a:solidFill>
                             <a:srgbClr val="FFFFFF"/>
                           </a:solidFill>
@@ -21197,7 +20375,7 @@
                       </a:r>
                     </a:p>
                   </a:txBody>
-                  <a:tcPr marL="88900" marR="63500" marT="38100" marB="38100" anchor="ctr">
+                  <a:tcPr anchor="ctr" marL="88900" marR="63500" marT="38100" marB="38100">
                     <a:solidFill>
                       <a:srgbClr val="0F2A43"/>
                     </a:solidFill>
@@ -21205,11 +20383,11 @@
                 </a:tc>
                 <a:tc>
                   <a:txBody>
-                    <a:bodyPr/>
+                    <a:bodyPr wrap="square"/>
                     <a:lstStyle/>
                     <a:p>
                       <a:r>
-                        <a:rPr sz="1400" b="1">
+                        <a:rPr b="1" sz="1400">
                           <a:solidFill>
                             <a:srgbClr val="FFFFFF"/>
                           </a:solidFill>
@@ -21219,22 +20397,17 @@
                       </a:r>
                     </a:p>
                   </a:txBody>
-                  <a:tcPr marL="88900" marR="63500" marT="38100" marB="38100" anchor="ctr">
+                  <a:tcPr anchor="ctr" marL="88900" marR="63500" marT="38100" marB="38100">
                     <a:solidFill>
                       <a:srgbClr val="0F2A43"/>
                     </a:solidFill>
                   </a:tcPr>
                 </a:tc>
-                <a:extLst>
-                  <a:ext uri="{0D108BD9-81ED-4DB2-BD59-A6C34878D82A}">
-                    <a16:rowId xmlns:a16="http://schemas.microsoft.com/office/drawing/2014/main" val="10000"/>
-                  </a:ext>
-                </a:extLst>
               </a:tr>
               <a:tr h="457200">
                 <a:tc>
                   <a:txBody>
-                    <a:bodyPr/>
+                    <a:bodyPr wrap="square"/>
                     <a:lstStyle/>
                     <a:p>
                       <a:r>
@@ -21248,7 +20421,7 @@
                       </a:r>
                     </a:p>
                   </a:txBody>
-                  <a:tcPr marL="88900" marR="63500" marT="25400" marB="25400" anchor="ctr">
+                  <a:tcPr anchor="ctr" marL="88900" marR="63500" marT="25400" marB="25400">
                     <a:solidFill>
                       <a:srgbClr val="F4F7F9"/>
                     </a:solidFill>
@@ -21256,7 +20429,7 @@
                 </a:tc>
                 <a:tc>
                   <a:txBody>
-                    <a:bodyPr/>
+                    <a:bodyPr wrap="square"/>
                     <a:lstStyle/>
                     <a:p>
                       <a:r>
@@ -21270,7 +20443,7 @@
                       </a:r>
                     </a:p>
                   </a:txBody>
-                  <a:tcPr marL="88900" marR="63500" marT="25400" marB="25400" anchor="ctr">
+                  <a:tcPr anchor="ctr" marL="88900" marR="63500" marT="25400" marB="25400">
                     <a:solidFill>
                       <a:srgbClr val="F4F7F9"/>
                     </a:solidFill>
@@ -21278,7 +20451,7 @@
                 </a:tc>
                 <a:tc>
                   <a:txBody>
-                    <a:bodyPr/>
+                    <a:bodyPr wrap="square"/>
                     <a:lstStyle/>
                     <a:p>
                       <a:r>
@@ -21292,22 +20465,17 @@
                       </a:r>
                     </a:p>
                   </a:txBody>
-                  <a:tcPr marL="88900" marR="63500" marT="25400" marB="25400" anchor="ctr">
+                  <a:tcPr anchor="ctr" marL="88900" marR="63500" marT="25400" marB="25400">
                     <a:solidFill>
                       <a:srgbClr val="F4F7F9"/>
                     </a:solidFill>
                   </a:tcPr>
                 </a:tc>
-                <a:extLst>
-                  <a:ext uri="{0D108BD9-81ED-4DB2-BD59-A6C34878D82A}">
-                    <a16:rowId xmlns:a16="http://schemas.microsoft.com/office/drawing/2014/main" val="10001"/>
-                  </a:ext>
-                </a:extLst>
               </a:tr>
               <a:tr h="457200">
                 <a:tc>
                   <a:txBody>
-                    <a:bodyPr/>
+                    <a:bodyPr wrap="square"/>
                     <a:lstStyle/>
                     <a:p>
                       <a:r>
@@ -21321,7 +20489,7 @@
                       </a:r>
                     </a:p>
                   </a:txBody>
-                  <a:tcPr marL="88900" marR="63500" marT="25400" marB="25400" anchor="ctr">
+                  <a:tcPr anchor="ctr" marL="88900" marR="63500" marT="25400" marB="25400">
                     <a:solidFill>
                       <a:srgbClr val="FFFFFF"/>
                     </a:solidFill>
@@ -21329,7 +20497,7 @@
                 </a:tc>
                 <a:tc>
                   <a:txBody>
-                    <a:bodyPr/>
+                    <a:bodyPr wrap="square"/>
                     <a:lstStyle/>
                     <a:p>
                       <a:r>
@@ -21343,7 +20511,7 @@
                       </a:r>
                     </a:p>
                   </a:txBody>
-                  <a:tcPr marL="88900" marR="63500" marT="25400" marB="25400" anchor="ctr">
+                  <a:tcPr anchor="ctr" marL="88900" marR="63500" marT="25400" marB="25400">
                     <a:solidFill>
                       <a:srgbClr val="FFFFFF"/>
                     </a:solidFill>
@@ -21351,7 +20519,7 @@
                 </a:tc>
                 <a:tc>
                   <a:txBody>
-                    <a:bodyPr/>
+                    <a:bodyPr wrap="square"/>
                     <a:lstStyle/>
                     <a:p>
                       <a:r>
@@ -21365,22 +20533,17 @@
                       </a:r>
                     </a:p>
                   </a:txBody>
-                  <a:tcPr marL="88900" marR="63500" marT="25400" marB="25400" anchor="ctr">
+                  <a:tcPr anchor="ctr" marL="88900" marR="63500" marT="25400" marB="25400">
                     <a:solidFill>
                       <a:srgbClr val="FFFFFF"/>
                     </a:solidFill>
                   </a:tcPr>
                 </a:tc>
-                <a:extLst>
-                  <a:ext uri="{0D108BD9-81ED-4DB2-BD59-A6C34878D82A}">
-                    <a16:rowId xmlns:a16="http://schemas.microsoft.com/office/drawing/2014/main" val="10002"/>
-                  </a:ext>
-                </a:extLst>
               </a:tr>
               <a:tr h="457200">
                 <a:tc>
                   <a:txBody>
-                    <a:bodyPr/>
+                    <a:bodyPr wrap="square"/>
                     <a:lstStyle/>
                     <a:p>
                       <a:r>
@@ -21394,7 +20557,7 @@
                       </a:r>
                     </a:p>
                   </a:txBody>
-                  <a:tcPr marL="88900" marR="63500" marT="25400" marB="25400" anchor="ctr">
+                  <a:tcPr anchor="ctr" marL="88900" marR="63500" marT="25400" marB="25400">
                     <a:solidFill>
                       <a:srgbClr val="F4F7F9"/>
                     </a:solidFill>
@@ -21402,7 +20565,7 @@
                 </a:tc>
                 <a:tc>
                   <a:txBody>
-                    <a:bodyPr/>
+                    <a:bodyPr wrap="square"/>
                     <a:lstStyle/>
                     <a:p>
                       <a:r>
@@ -21416,7 +20579,7 @@
                       </a:r>
                     </a:p>
                   </a:txBody>
-                  <a:tcPr marL="88900" marR="63500" marT="25400" marB="25400" anchor="ctr">
+                  <a:tcPr anchor="ctr" marL="88900" marR="63500" marT="25400" marB="25400">
                     <a:solidFill>
                       <a:srgbClr val="F4F7F9"/>
                     </a:solidFill>
@@ -21424,7 +20587,7 @@
                 </a:tc>
                 <a:tc>
                   <a:txBody>
-                    <a:bodyPr/>
+                    <a:bodyPr wrap="square"/>
                     <a:lstStyle/>
                     <a:p>
                       <a:r>
@@ -21438,22 +20601,17 @@
                       </a:r>
                     </a:p>
                   </a:txBody>
-                  <a:tcPr marL="88900" marR="63500" marT="25400" marB="25400" anchor="ctr">
+                  <a:tcPr anchor="ctr" marL="88900" marR="63500" marT="25400" marB="25400">
                     <a:solidFill>
                       <a:srgbClr val="F4F7F9"/>
                     </a:solidFill>
                   </a:tcPr>
                 </a:tc>
-                <a:extLst>
-                  <a:ext uri="{0D108BD9-81ED-4DB2-BD59-A6C34878D82A}">
-                    <a16:rowId xmlns:a16="http://schemas.microsoft.com/office/drawing/2014/main" val="10003"/>
-                  </a:ext>
-                </a:extLst>
               </a:tr>
               <a:tr h="457200">
                 <a:tc>
                   <a:txBody>
-                    <a:bodyPr/>
+                    <a:bodyPr wrap="square"/>
                     <a:lstStyle/>
                     <a:p>
                       <a:r>
@@ -21467,7 +20625,7 @@
                       </a:r>
                     </a:p>
                   </a:txBody>
-                  <a:tcPr marL="88900" marR="63500" marT="25400" marB="25400" anchor="ctr">
+                  <a:tcPr anchor="ctr" marL="88900" marR="63500" marT="25400" marB="25400">
                     <a:solidFill>
                       <a:srgbClr val="FFFFFF"/>
                     </a:solidFill>
@@ -21475,7 +20633,7 @@
                 </a:tc>
                 <a:tc>
                   <a:txBody>
-                    <a:bodyPr/>
+                    <a:bodyPr wrap="square"/>
                     <a:lstStyle/>
                     <a:p>
                       <a:r>
@@ -21489,7 +20647,7 @@
                       </a:r>
                     </a:p>
                   </a:txBody>
-                  <a:tcPr marL="88900" marR="63500" marT="25400" marB="25400" anchor="ctr">
+                  <a:tcPr anchor="ctr" marL="88900" marR="63500" marT="25400" marB="25400">
                     <a:solidFill>
                       <a:srgbClr val="FFFFFF"/>
                     </a:solidFill>
@@ -21497,7 +20655,7 @@
                 </a:tc>
                 <a:tc>
                   <a:txBody>
-                    <a:bodyPr/>
+                    <a:bodyPr wrap="square"/>
                     <a:lstStyle/>
                     <a:p>
                       <a:r>
@@ -21511,22 +20669,17 @@
                       </a:r>
                     </a:p>
                   </a:txBody>
-                  <a:tcPr marL="88900" marR="63500" marT="25400" marB="25400" anchor="ctr">
+                  <a:tcPr anchor="ctr" marL="88900" marR="63500" marT="25400" marB="25400">
                     <a:solidFill>
                       <a:srgbClr val="FFFFFF"/>
                     </a:solidFill>
                   </a:tcPr>
                 </a:tc>
-                <a:extLst>
-                  <a:ext uri="{0D108BD9-81ED-4DB2-BD59-A6C34878D82A}">
-                    <a16:rowId xmlns:a16="http://schemas.microsoft.com/office/drawing/2014/main" val="10004"/>
-                  </a:ext>
-                </a:extLst>
               </a:tr>
               <a:tr h="457200">
                 <a:tc>
                   <a:txBody>
-                    <a:bodyPr/>
+                    <a:bodyPr wrap="square"/>
                     <a:lstStyle/>
                     <a:p>
                       <a:r>
@@ -21540,7 +20693,7 @@
                       </a:r>
                     </a:p>
                   </a:txBody>
-                  <a:tcPr marL="88900" marR="63500" marT="25400" marB="25400" anchor="ctr">
+                  <a:tcPr anchor="ctr" marL="88900" marR="63500" marT="25400" marB="25400">
                     <a:solidFill>
                       <a:srgbClr val="F4F7F9"/>
                     </a:solidFill>
@@ -21548,7 +20701,7 @@
                 </a:tc>
                 <a:tc>
                   <a:txBody>
-                    <a:bodyPr/>
+                    <a:bodyPr wrap="square"/>
                     <a:lstStyle/>
                     <a:p>
                       <a:r>
@@ -21562,7 +20715,7 @@
                       </a:r>
                     </a:p>
                   </a:txBody>
-                  <a:tcPr marL="88900" marR="63500" marT="25400" marB="25400" anchor="ctr">
+                  <a:tcPr anchor="ctr" marL="88900" marR="63500" marT="25400" marB="25400">
                     <a:solidFill>
                       <a:srgbClr val="F4F7F9"/>
                     </a:solidFill>
@@ -21570,7 +20723,7 @@
                 </a:tc>
                 <a:tc>
                   <a:txBody>
-                    <a:bodyPr/>
+                    <a:bodyPr wrap="square"/>
                     <a:lstStyle/>
                     <a:p>
                       <a:r>
@@ -21584,22 +20737,17 @@
                       </a:r>
                     </a:p>
                   </a:txBody>
-                  <a:tcPr marL="88900" marR="63500" marT="25400" marB="25400" anchor="ctr">
+                  <a:tcPr anchor="ctr" marL="88900" marR="63500" marT="25400" marB="25400">
                     <a:solidFill>
                       <a:srgbClr val="F4F7F9"/>
                     </a:solidFill>
                   </a:tcPr>
                 </a:tc>
-                <a:extLst>
-                  <a:ext uri="{0D108BD9-81ED-4DB2-BD59-A6C34878D82A}">
-                    <a16:rowId xmlns:a16="http://schemas.microsoft.com/office/drawing/2014/main" val="10005"/>
-                  </a:ext>
-                </a:extLst>
               </a:tr>
               <a:tr h="457200">
                 <a:tc>
                   <a:txBody>
-                    <a:bodyPr/>
+                    <a:bodyPr wrap="square"/>
                     <a:lstStyle/>
                     <a:p>
                       <a:r>
@@ -21613,7 +20761,7 @@
                       </a:r>
                     </a:p>
                   </a:txBody>
-                  <a:tcPr marL="88900" marR="63500" marT="25400" marB="25400" anchor="ctr">
+                  <a:tcPr anchor="ctr" marL="88900" marR="63500" marT="25400" marB="25400">
                     <a:solidFill>
                       <a:srgbClr val="FFFFFF"/>
                     </a:solidFill>
@@ -21621,7 +20769,7 @@
                 </a:tc>
                 <a:tc>
                   <a:txBody>
-                    <a:bodyPr/>
+                    <a:bodyPr wrap="square"/>
                     <a:lstStyle/>
                     <a:p>
                       <a:r>
@@ -21635,7 +20783,7 @@
                       </a:r>
                     </a:p>
                   </a:txBody>
-                  <a:tcPr marL="88900" marR="63500" marT="25400" marB="25400" anchor="ctr">
+                  <a:tcPr anchor="ctr" marL="88900" marR="63500" marT="25400" marB="25400">
                     <a:solidFill>
                       <a:srgbClr val="FFFFFF"/>
                     </a:solidFill>
@@ -21643,7 +20791,7 @@
                 </a:tc>
                 <a:tc>
                   <a:txBody>
-                    <a:bodyPr/>
+                    <a:bodyPr wrap="square"/>
                     <a:lstStyle/>
                     <a:p>
                       <a:r>
@@ -21657,22 +20805,17 @@
                       </a:r>
                     </a:p>
                   </a:txBody>
-                  <a:tcPr marL="88900" marR="63500" marT="25400" marB="25400" anchor="ctr">
+                  <a:tcPr anchor="ctr" marL="88900" marR="63500" marT="25400" marB="25400">
                     <a:solidFill>
                       <a:srgbClr val="FFFFFF"/>
                     </a:solidFill>
                   </a:tcPr>
                 </a:tc>
-                <a:extLst>
-                  <a:ext uri="{0D108BD9-81ED-4DB2-BD59-A6C34878D82A}">
-                    <a16:rowId xmlns:a16="http://schemas.microsoft.com/office/drawing/2014/main" val="10006"/>
-                  </a:ext>
-                </a:extLst>
               </a:tr>
               <a:tr h="457200">
                 <a:tc>
                   <a:txBody>
-                    <a:bodyPr/>
+                    <a:bodyPr wrap="square"/>
                     <a:lstStyle/>
                     <a:p>
                       <a:r>
@@ -21686,7 +20829,7 @@
                       </a:r>
                     </a:p>
                   </a:txBody>
-                  <a:tcPr marL="88900" marR="63500" marT="25400" marB="25400" anchor="ctr">
+                  <a:tcPr anchor="ctr" marL="88900" marR="63500" marT="25400" marB="25400">
                     <a:solidFill>
                       <a:srgbClr val="F4F7F9"/>
                     </a:solidFill>
@@ -21694,7 +20837,7 @@
                 </a:tc>
                 <a:tc>
                   <a:txBody>
-                    <a:bodyPr/>
+                    <a:bodyPr wrap="square"/>
                     <a:lstStyle/>
                     <a:p>
                       <a:r>
@@ -21708,7 +20851,7 @@
                       </a:r>
                     </a:p>
                   </a:txBody>
-                  <a:tcPr marL="88900" marR="63500" marT="25400" marB="25400" anchor="ctr">
+                  <a:tcPr anchor="ctr" marL="88900" marR="63500" marT="25400" marB="25400">
                     <a:solidFill>
                       <a:srgbClr val="F4F7F9"/>
                     </a:solidFill>
@@ -21716,7 +20859,7 @@
                 </a:tc>
                 <a:tc>
                   <a:txBody>
-                    <a:bodyPr/>
+                    <a:bodyPr wrap="square"/>
                     <a:lstStyle/>
                     <a:p>
                       <a:r>
@@ -21730,22 +20873,17 @@
                       </a:r>
                     </a:p>
                   </a:txBody>
-                  <a:tcPr marL="88900" marR="63500" marT="25400" marB="25400" anchor="ctr">
+                  <a:tcPr anchor="ctr" marL="88900" marR="63500" marT="25400" marB="25400">
                     <a:solidFill>
                       <a:srgbClr val="F4F7F9"/>
                     </a:solidFill>
                   </a:tcPr>
                 </a:tc>
-                <a:extLst>
-                  <a:ext uri="{0D108BD9-81ED-4DB2-BD59-A6C34878D82A}">
-                    <a16:rowId xmlns:a16="http://schemas.microsoft.com/office/drawing/2014/main" val="10007"/>
-                  </a:ext>
-                </a:extLst>
               </a:tr>
               <a:tr h="457200">
                 <a:tc>
                   <a:txBody>
-                    <a:bodyPr/>
+                    <a:bodyPr wrap="square"/>
                     <a:lstStyle/>
                     <a:p>
                       <a:r>
@@ -21759,7 +20897,7 @@
                       </a:r>
                     </a:p>
                   </a:txBody>
-                  <a:tcPr marL="88900" marR="63500" marT="25400" marB="25400" anchor="ctr">
+                  <a:tcPr anchor="ctr" marL="88900" marR="63500" marT="25400" marB="25400">
                     <a:solidFill>
                       <a:srgbClr val="FFFFFF"/>
                     </a:solidFill>
@@ -21767,7 +20905,7 @@
                 </a:tc>
                 <a:tc>
                   <a:txBody>
-                    <a:bodyPr/>
+                    <a:bodyPr wrap="square"/>
                     <a:lstStyle/>
                     <a:p>
                       <a:r>
@@ -21781,7 +20919,7 @@
                       </a:r>
                     </a:p>
                   </a:txBody>
-                  <a:tcPr marL="88900" marR="63500" marT="25400" marB="25400" anchor="ctr">
+                  <a:tcPr anchor="ctr" marL="88900" marR="63500" marT="25400" marB="25400">
                     <a:solidFill>
                       <a:srgbClr val="FFFFFF"/>
                     </a:solidFill>
@@ -21789,7 +20927,7 @@
                 </a:tc>
                 <a:tc>
                   <a:txBody>
-                    <a:bodyPr/>
+                    <a:bodyPr wrap="square"/>
                     <a:lstStyle/>
                     <a:p>
                       <a:r>
@@ -21803,17 +20941,12 @@
                       </a:r>
                     </a:p>
                   </a:txBody>
-                  <a:tcPr marL="88900" marR="63500" marT="25400" marB="25400" anchor="ctr">
+                  <a:tcPr anchor="ctr" marL="88900" marR="63500" marT="25400" marB="25400">
                     <a:solidFill>
                       <a:srgbClr val="FFFFFF"/>
                     </a:solidFill>
                   </a:tcPr>
                 </a:tc>
-                <a:extLst>
-                  <a:ext uri="{0D108BD9-81ED-4DB2-BD59-A6C34878D82A}">
-                    <a16:rowId xmlns:a16="http://schemas.microsoft.com/office/drawing/2014/main" val="10008"/>
-                  </a:ext>
-                </a:extLst>
               </a:tr>
             </a:tbl>
           </a:graphicData>
@@ -21836,7 +20969,7 @@
           <a:noFill/>
         </p:spPr>
         <p:txBody>
-          <a:bodyPr wrap="square" lIns="25400" tIns="25400" rIns="25400" bIns="25400" anchor="t">
+          <a:bodyPr wrap="square" anchor="t" lIns="25400" rIns="25400" tIns="25400" bIns="25400">
             <a:spAutoFit/>
           </a:bodyPr>
           <a:lstStyle/>
@@ -21875,7 +21008,7 @@
           <a:noFill/>
         </p:spPr>
         <p:txBody>
-          <a:bodyPr wrap="square" lIns="25400" tIns="25400" rIns="25400" bIns="25400" anchor="t">
+          <a:bodyPr wrap="square" anchor="t" lIns="25400" rIns="25400" tIns="25400" bIns="25400">
             <a:spAutoFit/>
           </a:bodyPr>
           <a:lstStyle/>
@@ -21906,7 +21039,7 @@
 </file>
 
 <file path=ppt/slides/slide5.xml><?xml version="1.0" encoding="utf-8"?>
-<p:sld xmlns:a="http://schemas.openxmlformats.org/drawingml/2006/main" xmlns:r="http://schemas.openxmlformats.org/officeDocument/2006/relationships" xmlns:p="http://schemas.openxmlformats.org/presentationml/2006/main">
+<p:sld xmlns:a="http://schemas.openxmlformats.org/drawingml/2006/main" xmlns:p="http://schemas.openxmlformats.org/presentationml/2006/main" xmlns:r="http://schemas.openxmlformats.org/officeDocument/2006/relationships">
   <p:cSld>
     <p:spTree>
       <p:nvGrpSpPr>
@@ -21914,14 +21047,7 @@
         <p:cNvGrpSpPr/>
         <p:nvPr/>
       </p:nvGrpSpPr>
-      <p:grpSpPr>
-        <a:xfrm>
-          <a:off x="0" y="0"/>
-          <a:ext cx="0" cy="0"/>
-          <a:chOff x="0" y="0"/>
-          <a:chExt cx="0" cy="0"/>
-        </a:xfrm>
-      </p:grpSpPr>
+      <p:grpSpPr/>
       <p:sp>
         <p:nvSpPr>
           <p:cNvPr id="2" name="Rectangle 1"/>
@@ -21962,7 +21088,6 @@
           <a:lstStyle/>
           <a:p>
             <a:pPr algn="ctr"/>
-            <a:endParaRPr/>
           </a:p>
         </p:txBody>
       </p:sp>
@@ -21983,7 +21108,7 @@
           <a:noFill/>
         </p:spPr>
         <p:txBody>
-          <a:bodyPr wrap="square" lIns="25400" tIns="25400" rIns="25400" bIns="25400" anchor="t">
+          <a:bodyPr wrap="square" anchor="t" lIns="25400" rIns="25400" tIns="25400" bIns="25400">
             <a:spAutoFit/>
           </a:bodyPr>
           <a:lstStyle/>
@@ -22022,7 +21147,7 @@
           <a:noFill/>
         </p:spPr>
         <p:txBody>
-          <a:bodyPr wrap="square" lIns="25400" tIns="25400" rIns="25400" bIns="25400" anchor="t">
+          <a:bodyPr wrap="square" anchor="t" lIns="25400" rIns="25400" tIns="25400" bIns="25400">
             <a:spAutoFit/>
           </a:bodyPr>
           <a:lstStyle/>
@@ -22084,7 +21209,6 @@
           <a:lstStyle/>
           <a:p>
             <a:pPr algn="ctr"/>
-            <a:endParaRPr/>
           </a:p>
         </p:txBody>
       </p:sp>
@@ -22105,7 +21229,7 @@
           <a:noFill/>
         </p:spPr>
         <p:txBody>
-          <a:bodyPr wrap="square" lIns="25400" tIns="25400" rIns="25400" bIns="25400" anchor="t">
+          <a:bodyPr wrap="square" anchor="t" lIns="25400" rIns="25400" tIns="25400" bIns="25400">
             <a:spAutoFit/>
           </a:bodyPr>
           <a:lstStyle/>
@@ -22146,29 +21270,17 @@
                 <a:tableStyleId>{5C22544A-7EE6-4342-B048-85BDC9FD1C3A}</a:tableStyleId>
               </a:tblPr>
               <a:tblGrid>
-                <a:gridCol w="2743200">
-                  <a:extLst>
-                    <a:ext uri="{9D8B030D-6E8A-4147-A177-3AD203B41FA5}">
-                      <a16:colId xmlns:a16="http://schemas.microsoft.com/office/drawing/2014/main" val="20000"/>
-                    </a:ext>
-                  </a:extLst>
-                </a:gridCol>
-                <a:gridCol w="3017520">
-                  <a:extLst>
-                    <a:ext uri="{9D8B030D-6E8A-4147-A177-3AD203B41FA5}">
-                      <a16:colId xmlns:a16="http://schemas.microsoft.com/office/drawing/2014/main" val="20001"/>
-                    </a:ext>
-                  </a:extLst>
-                </a:gridCol>
+                <a:gridCol w="2743200"/>
+                <a:gridCol w="3017520"/>
               </a:tblGrid>
               <a:tr h="436880">
                 <a:tc>
                   <a:txBody>
-                    <a:bodyPr/>
+                    <a:bodyPr wrap="square"/>
                     <a:lstStyle/>
                     <a:p>
                       <a:r>
-                        <a:rPr sz="1250" b="1">
+                        <a:rPr b="1" sz="1250">
                           <a:solidFill>
                             <a:srgbClr val="FFFFFF"/>
                           </a:solidFill>
@@ -22178,7 +21290,7 @@
                       </a:r>
                     </a:p>
                   </a:txBody>
-                  <a:tcPr marL="88900" marR="63500" marT="38100" marB="38100" anchor="ctr">
+                  <a:tcPr anchor="ctr" marL="88900" marR="63500" marT="38100" marB="38100">
                     <a:solidFill>
                       <a:srgbClr val="0F2A43"/>
                     </a:solidFill>
@@ -22186,11 +21298,11 @@
                 </a:tc>
                 <a:tc>
                   <a:txBody>
-                    <a:bodyPr/>
+                    <a:bodyPr wrap="square"/>
                     <a:lstStyle/>
                     <a:p>
                       <a:r>
-                        <a:rPr sz="1250" b="1">
+                        <a:rPr b="1" sz="1250">
                           <a:solidFill>
                             <a:srgbClr val="FFFFFF"/>
                           </a:solidFill>
@@ -22200,22 +21312,17 @@
                       </a:r>
                     </a:p>
                   </a:txBody>
-                  <a:tcPr marL="88900" marR="63500" marT="38100" marB="38100" anchor="ctr">
+                  <a:tcPr anchor="ctr" marL="88900" marR="63500" marT="38100" marB="38100">
                     <a:solidFill>
                       <a:srgbClr val="0F2A43"/>
                     </a:solidFill>
                   </a:tcPr>
                 </a:tc>
-                <a:extLst>
-                  <a:ext uri="{0D108BD9-81ED-4DB2-BD59-A6C34878D82A}">
-                    <a16:rowId xmlns:a16="http://schemas.microsoft.com/office/drawing/2014/main" val="10000"/>
-                  </a:ext>
-                </a:extLst>
               </a:tr>
               <a:tr h="436880">
                 <a:tc>
                   <a:txBody>
-                    <a:bodyPr/>
+                    <a:bodyPr wrap="square"/>
                     <a:lstStyle/>
                     <a:p>
                       <a:r>
@@ -22229,7 +21336,7 @@
                       </a:r>
                     </a:p>
                   </a:txBody>
-                  <a:tcPr marL="88900" marR="63500" marT="25400" marB="25400" anchor="ctr">
+                  <a:tcPr anchor="ctr" marL="88900" marR="63500" marT="25400" marB="25400">
                     <a:solidFill>
                       <a:srgbClr val="F4F7F9"/>
                     </a:solidFill>
@@ -22237,7 +21344,7 @@
                 </a:tc>
                 <a:tc>
                   <a:txBody>
-                    <a:bodyPr/>
+                    <a:bodyPr wrap="square"/>
                     <a:lstStyle/>
                     <a:p>
                       <a:r>
@@ -22251,22 +21358,17 @@
                       </a:r>
                     </a:p>
                   </a:txBody>
-                  <a:tcPr marL="88900" marR="63500" marT="25400" marB="25400" anchor="ctr">
+                  <a:tcPr anchor="ctr" marL="88900" marR="63500" marT="25400" marB="25400">
                     <a:solidFill>
                       <a:srgbClr val="F4F7F9"/>
                     </a:solidFill>
                   </a:tcPr>
                 </a:tc>
-                <a:extLst>
-                  <a:ext uri="{0D108BD9-81ED-4DB2-BD59-A6C34878D82A}">
-                    <a16:rowId xmlns:a16="http://schemas.microsoft.com/office/drawing/2014/main" val="10001"/>
-                  </a:ext>
-                </a:extLst>
               </a:tr>
               <a:tr h="436880">
                 <a:tc>
                   <a:txBody>
-                    <a:bodyPr/>
+                    <a:bodyPr wrap="square"/>
                     <a:lstStyle/>
                     <a:p>
                       <a:r>
@@ -22280,7 +21382,7 @@
                       </a:r>
                     </a:p>
                   </a:txBody>
-                  <a:tcPr marL="88900" marR="63500" marT="25400" marB="25400" anchor="ctr">
+                  <a:tcPr anchor="ctr" marL="88900" marR="63500" marT="25400" marB="25400">
                     <a:solidFill>
                       <a:srgbClr val="FFFFFF"/>
                     </a:solidFill>
@@ -22288,7 +21390,7 @@
                 </a:tc>
                 <a:tc>
                   <a:txBody>
-                    <a:bodyPr/>
+                    <a:bodyPr wrap="square"/>
                     <a:lstStyle/>
                     <a:p>
                       <a:r>
@@ -22302,22 +21404,17 @@
                       </a:r>
                     </a:p>
                   </a:txBody>
-                  <a:tcPr marL="88900" marR="63500" marT="25400" marB="25400" anchor="ctr">
+                  <a:tcPr anchor="ctr" marL="88900" marR="63500" marT="25400" marB="25400">
                     <a:solidFill>
                       <a:srgbClr val="FFFFFF"/>
                     </a:solidFill>
                   </a:tcPr>
                 </a:tc>
-                <a:extLst>
-                  <a:ext uri="{0D108BD9-81ED-4DB2-BD59-A6C34878D82A}">
-                    <a16:rowId xmlns:a16="http://schemas.microsoft.com/office/drawing/2014/main" val="10002"/>
-                  </a:ext>
-                </a:extLst>
               </a:tr>
               <a:tr h="436880">
                 <a:tc>
                   <a:txBody>
-                    <a:bodyPr/>
+                    <a:bodyPr wrap="square"/>
                     <a:lstStyle/>
                     <a:p>
                       <a:r>
@@ -22331,7 +21428,7 @@
                       </a:r>
                     </a:p>
                   </a:txBody>
-                  <a:tcPr marL="88900" marR="63500" marT="25400" marB="25400" anchor="ctr">
+                  <a:tcPr anchor="ctr" marL="88900" marR="63500" marT="25400" marB="25400">
                     <a:solidFill>
                       <a:srgbClr val="F4F7F9"/>
                     </a:solidFill>
@@ -22339,7 +21436,7 @@
                 </a:tc>
                 <a:tc>
                   <a:txBody>
-                    <a:bodyPr/>
+                    <a:bodyPr wrap="square"/>
                     <a:lstStyle/>
                     <a:p>
                       <a:r>
@@ -22353,22 +21450,17 @@
                       </a:r>
                     </a:p>
                   </a:txBody>
-                  <a:tcPr marL="88900" marR="63500" marT="25400" marB="25400" anchor="ctr">
+                  <a:tcPr anchor="ctr" marL="88900" marR="63500" marT="25400" marB="25400">
                     <a:solidFill>
                       <a:srgbClr val="F4F7F9"/>
                     </a:solidFill>
                   </a:tcPr>
                 </a:tc>
-                <a:extLst>
-                  <a:ext uri="{0D108BD9-81ED-4DB2-BD59-A6C34878D82A}">
-                    <a16:rowId xmlns:a16="http://schemas.microsoft.com/office/drawing/2014/main" val="10003"/>
-                  </a:ext>
-                </a:extLst>
               </a:tr>
               <a:tr h="436880">
                 <a:tc>
                   <a:txBody>
-                    <a:bodyPr/>
+                    <a:bodyPr wrap="square"/>
                     <a:lstStyle/>
                     <a:p>
                       <a:r>
@@ -22382,7 +21474,7 @@
                       </a:r>
                     </a:p>
                   </a:txBody>
-                  <a:tcPr marL="88900" marR="63500" marT="25400" marB="25400" anchor="ctr">
+                  <a:tcPr anchor="ctr" marL="88900" marR="63500" marT="25400" marB="25400">
                     <a:solidFill>
                       <a:srgbClr val="FFFFFF"/>
                     </a:solidFill>
@@ -22390,7 +21482,7 @@
                 </a:tc>
                 <a:tc>
                   <a:txBody>
-                    <a:bodyPr/>
+                    <a:bodyPr wrap="square"/>
                     <a:lstStyle/>
                     <a:p>
                       <a:r>
@@ -22404,22 +21496,17 @@
                       </a:r>
                     </a:p>
                   </a:txBody>
-                  <a:tcPr marL="88900" marR="63500" marT="25400" marB="25400" anchor="ctr">
+                  <a:tcPr anchor="ctr" marL="88900" marR="63500" marT="25400" marB="25400">
                     <a:solidFill>
                       <a:srgbClr val="FFFFFF"/>
                     </a:solidFill>
                   </a:tcPr>
                 </a:tc>
-                <a:extLst>
-                  <a:ext uri="{0D108BD9-81ED-4DB2-BD59-A6C34878D82A}">
-                    <a16:rowId xmlns:a16="http://schemas.microsoft.com/office/drawing/2014/main" val="10004"/>
-                  </a:ext>
-                </a:extLst>
               </a:tr>
               <a:tr h="436880">
                 <a:tc>
                   <a:txBody>
-                    <a:bodyPr/>
+                    <a:bodyPr wrap="square"/>
                     <a:lstStyle/>
                     <a:p>
                       <a:r>
@@ -22433,7 +21520,7 @@
                       </a:r>
                     </a:p>
                   </a:txBody>
-                  <a:tcPr marL="88900" marR="63500" marT="25400" marB="25400" anchor="ctr">
+                  <a:tcPr anchor="ctr" marL="88900" marR="63500" marT="25400" marB="25400">
                     <a:solidFill>
                       <a:srgbClr val="F4F7F9"/>
                     </a:solidFill>
@@ -22441,7 +21528,7 @@
                 </a:tc>
                 <a:tc>
                   <a:txBody>
-                    <a:bodyPr/>
+                    <a:bodyPr wrap="square"/>
                     <a:lstStyle/>
                     <a:p>
                       <a:r>
@@ -22455,22 +21542,17 @@
                       </a:r>
                     </a:p>
                   </a:txBody>
-                  <a:tcPr marL="88900" marR="63500" marT="25400" marB="25400" anchor="ctr">
+                  <a:tcPr anchor="ctr" marL="88900" marR="63500" marT="25400" marB="25400">
                     <a:solidFill>
                       <a:srgbClr val="F4F7F9"/>
                     </a:solidFill>
                   </a:tcPr>
                 </a:tc>
-                <a:extLst>
-                  <a:ext uri="{0D108BD9-81ED-4DB2-BD59-A6C34878D82A}">
-                    <a16:rowId xmlns:a16="http://schemas.microsoft.com/office/drawing/2014/main" val="10005"/>
-                  </a:ext>
-                </a:extLst>
               </a:tr>
               <a:tr h="436880">
                 <a:tc>
                   <a:txBody>
-                    <a:bodyPr/>
+                    <a:bodyPr wrap="square"/>
                     <a:lstStyle/>
                     <a:p>
                       <a:r>
@@ -22484,7 +21566,7 @@
                       </a:r>
                     </a:p>
                   </a:txBody>
-                  <a:tcPr marL="88900" marR="63500" marT="25400" marB="25400" anchor="ctr">
+                  <a:tcPr anchor="ctr" marL="88900" marR="63500" marT="25400" marB="25400">
                     <a:solidFill>
                       <a:srgbClr val="FFFFFF"/>
                     </a:solidFill>
@@ -22492,7 +21574,7 @@
                 </a:tc>
                 <a:tc>
                   <a:txBody>
-                    <a:bodyPr/>
+                    <a:bodyPr wrap="square"/>
                     <a:lstStyle/>
                     <a:p>
                       <a:r>
@@ -22506,22 +21588,17 @@
                       </a:r>
                     </a:p>
                   </a:txBody>
-                  <a:tcPr marL="88900" marR="63500" marT="25400" marB="25400" anchor="ctr">
+                  <a:tcPr anchor="ctr" marL="88900" marR="63500" marT="25400" marB="25400">
                     <a:solidFill>
                       <a:srgbClr val="FFFFFF"/>
                     </a:solidFill>
                   </a:tcPr>
                 </a:tc>
-                <a:extLst>
-                  <a:ext uri="{0D108BD9-81ED-4DB2-BD59-A6C34878D82A}">
-                    <a16:rowId xmlns:a16="http://schemas.microsoft.com/office/drawing/2014/main" val="10006"/>
-                  </a:ext>
-                </a:extLst>
               </a:tr>
               <a:tr h="436880">
                 <a:tc>
                   <a:txBody>
-                    <a:bodyPr/>
+                    <a:bodyPr wrap="square"/>
                     <a:lstStyle/>
                     <a:p>
                       <a:r>
@@ -22535,7 +21612,7 @@
                       </a:r>
                     </a:p>
                   </a:txBody>
-                  <a:tcPr marL="88900" marR="63500" marT="25400" marB="25400" anchor="ctr">
+                  <a:tcPr anchor="ctr" marL="88900" marR="63500" marT="25400" marB="25400">
                     <a:solidFill>
                       <a:srgbClr val="F4F7F9"/>
                     </a:solidFill>
@@ -22543,7 +21620,7 @@
                 </a:tc>
                 <a:tc>
                   <a:txBody>
-                    <a:bodyPr/>
+                    <a:bodyPr wrap="square"/>
                     <a:lstStyle/>
                     <a:p>
                       <a:r>
@@ -22557,22 +21634,17 @@
                       </a:r>
                     </a:p>
                   </a:txBody>
-                  <a:tcPr marL="88900" marR="63500" marT="25400" marB="25400" anchor="ctr">
+                  <a:tcPr anchor="ctr" marL="88900" marR="63500" marT="25400" marB="25400">
                     <a:solidFill>
                       <a:srgbClr val="F4F7F9"/>
                     </a:solidFill>
                   </a:tcPr>
                 </a:tc>
-                <a:extLst>
-                  <a:ext uri="{0D108BD9-81ED-4DB2-BD59-A6C34878D82A}">
-                    <a16:rowId xmlns:a16="http://schemas.microsoft.com/office/drawing/2014/main" val="10007"/>
-                  </a:ext>
-                </a:extLst>
               </a:tr>
               <a:tr h="436880">
                 <a:tc>
                   <a:txBody>
-                    <a:bodyPr/>
+                    <a:bodyPr wrap="square"/>
                     <a:lstStyle/>
                     <a:p>
                       <a:r>
@@ -22586,7 +21658,7 @@
                       </a:r>
                     </a:p>
                   </a:txBody>
-                  <a:tcPr marL="88900" marR="63500" marT="25400" marB="25400" anchor="ctr">
+                  <a:tcPr anchor="ctr" marL="88900" marR="63500" marT="25400" marB="25400">
                     <a:solidFill>
                       <a:srgbClr val="FFFFFF"/>
                     </a:solidFill>
@@ -22594,7 +21666,7 @@
                 </a:tc>
                 <a:tc>
                   <a:txBody>
-                    <a:bodyPr/>
+                    <a:bodyPr wrap="square"/>
                     <a:lstStyle/>
                     <a:p>
                       <a:r>
@@ -22608,17 +21680,12 @@
                       </a:r>
                     </a:p>
                   </a:txBody>
-                  <a:tcPr marL="88900" marR="63500" marT="25400" marB="25400" anchor="ctr">
+                  <a:tcPr anchor="ctr" marL="88900" marR="63500" marT="25400" marB="25400">
                     <a:solidFill>
                       <a:srgbClr val="FFFFFF"/>
                     </a:solidFill>
                   </a:tcPr>
                 </a:tc>
-                <a:extLst>
-                  <a:ext uri="{0D108BD9-81ED-4DB2-BD59-A6C34878D82A}">
-                    <a16:rowId xmlns:a16="http://schemas.microsoft.com/office/drawing/2014/main" val="10008"/>
-                  </a:ext>
-                </a:extLst>
               </a:tr>
             </a:tbl>
           </a:graphicData>
@@ -22662,7 +21729,7 @@
           </a:fontRef>
         </p:style>
         <p:txBody>
-          <a:bodyPr wrap="square" lIns="152400" tIns="101600" rIns="127000" bIns="101600" rtlCol="0" anchor="t"/>
+          <a:bodyPr rtlCol="0" anchor="t" wrap="square" lIns="152400" rIns="127000" tIns="101600" bIns="101600"/>
           <a:lstStyle/>
           <a:p>
             <a:pPr algn="ctr">
@@ -22795,7 +21862,7 @@
           <a:noFill/>
         </p:spPr>
         <p:txBody>
-          <a:bodyPr wrap="square" lIns="25400" tIns="25400" rIns="25400" bIns="25400" anchor="t">
+          <a:bodyPr wrap="square" anchor="t" lIns="25400" rIns="25400" tIns="25400" bIns="25400">
             <a:spAutoFit/>
           </a:bodyPr>
           <a:lstStyle/>
@@ -22855,7 +21922,7 @@
           </a:fontRef>
         </p:style>
         <p:txBody>
-          <a:bodyPr wrap="square" lIns="152400" tIns="101600" rIns="127000" bIns="101600" rtlCol="0" anchor="t"/>
+          <a:bodyPr rtlCol="0" anchor="t" wrap="square" lIns="152400" rIns="127000" tIns="101600" bIns="101600"/>
           <a:lstStyle/>
           <a:p>
             <a:pPr algn="ctr">
@@ -22924,7 +21991,7 @@
           <a:noFill/>
         </p:spPr>
         <p:txBody>
-          <a:bodyPr wrap="square" lIns="25400" tIns="25400" rIns="25400" bIns="25400" anchor="t">
+          <a:bodyPr wrap="square" anchor="t" lIns="25400" rIns="25400" tIns="25400" bIns="25400">
             <a:spAutoFit/>
           </a:bodyPr>
           <a:lstStyle/>
@@ -22963,7 +22030,7 @@
           <a:noFill/>
         </p:spPr>
         <p:txBody>
-          <a:bodyPr wrap="square" lIns="25400" tIns="25400" rIns="25400" bIns="25400" anchor="t">
+          <a:bodyPr wrap="square" anchor="t" lIns="25400" rIns="25400" tIns="25400" bIns="25400">
             <a:spAutoFit/>
           </a:bodyPr>
           <a:lstStyle/>
@@ -22994,7 +22061,7 @@
 </file>
 
 <file path=ppt/slides/slide6.xml><?xml version="1.0" encoding="utf-8"?>
-<p:sld xmlns:a="http://schemas.openxmlformats.org/drawingml/2006/main" xmlns:r="http://schemas.openxmlformats.org/officeDocument/2006/relationships" xmlns:p="http://schemas.openxmlformats.org/presentationml/2006/main">
+<p:sld xmlns:a="http://schemas.openxmlformats.org/drawingml/2006/main" xmlns:p="http://schemas.openxmlformats.org/presentationml/2006/main" xmlns:r="http://schemas.openxmlformats.org/officeDocument/2006/relationships">
   <p:cSld>
     <p:spTree>
       <p:nvGrpSpPr>
@@ -23002,14 +22069,7 @@
         <p:cNvGrpSpPr/>
         <p:nvPr/>
       </p:nvGrpSpPr>
-      <p:grpSpPr>
-        <a:xfrm>
-          <a:off x="0" y="0"/>
-          <a:ext cx="0" cy="0"/>
-          <a:chOff x="0" y="0"/>
-          <a:chExt cx="0" cy="0"/>
-        </a:xfrm>
-      </p:grpSpPr>
+      <p:grpSpPr/>
       <p:sp>
         <p:nvSpPr>
           <p:cNvPr id="2" name="Rectangle 1"/>
@@ -23050,7 +22110,6 @@
           <a:lstStyle/>
           <a:p>
             <a:pPr algn="ctr"/>
-            <a:endParaRPr/>
           </a:p>
         </p:txBody>
       </p:sp>
@@ -23071,7 +22130,7 @@
           <a:noFill/>
         </p:spPr>
         <p:txBody>
-          <a:bodyPr wrap="square" lIns="25400" tIns="25400" rIns="25400" bIns="25400" anchor="t">
+          <a:bodyPr wrap="square" anchor="t" lIns="25400" rIns="25400" tIns="25400" bIns="25400">
             <a:spAutoFit/>
           </a:bodyPr>
           <a:lstStyle/>
@@ -23110,7 +22169,7 @@
           <a:noFill/>
         </p:spPr>
         <p:txBody>
-          <a:bodyPr wrap="square" lIns="25400" tIns="25400" rIns="25400" bIns="25400" anchor="t">
+          <a:bodyPr wrap="square" anchor="t" lIns="25400" rIns="25400" tIns="25400" bIns="25400">
             <a:spAutoFit/>
           </a:bodyPr>
           <a:lstStyle/>
@@ -23172,7 +22231,6 @@
           <a:lstStyle/>
           <a:p>
             <a:pPr algn="ctr"/>
-            <a:endParaRPr/>
           </a:p>
         </p:txBody>
       </p:sp>
@@ -23193,7 +22251,7 @@
           <a:noFill/>
         </p:spPr>
         <p:txBody>
-          <a:bodyPr wrap="square" lIns="25400" tIns="25400" rIns="25400" bIns="25400" anchor="t">
+          <a:bodyPr wrap="square" anchor="t" lIns="25400" rIns="25400" tIns="25400" bIns="25400">
             <a:spAutoFit/>
           </a:bodyPr>
           <a:lstStyle/>
@@ -23253,7 +22311,7 @@
           </a:fontRef>
         </p:style>
         <p:txBody>
-          <a:bodyPr wrap="square" tIns="38100" bIns="38100" rtlCol="0" anchor="ctr"/>
+          <a:bodyPr rtlCol="0" anchor="ctr" wrap="square" tIns="38100" bIns="38100"/>
           <a:lstStyle/>
           <a:p>
             <a:pPr algn="ctr"/>
@@ -23281,12 +22339,15 @@
           </a:p>
           <a:p>
             <a:pPr algn="ctr"/>
-            <a:endParaRPr sz="1150">
-              <a:solidFill>
-                <a:srgbClr val="FFFFFF"/>
-              </a:solidFill>
-              <a:latin typeface="Calibri"/>
-            </a:endParaRPr>
+            <a:r>
+              <a:rPr sz="1150">
+                <a:solidFill>
+                  <a:srgbClr val="FFFFFF"/>
+                </a:solidFill>
+                <a:latin typeface="Calibri"/>
+              </a:rPr>
+              <a:t/>
+            </a:r>
           </a:p>
           <a:p>
             <a:pPr algn="ctr"/>
@@ -23331,7 +22392,7 @@
           <a:noFill/>
         </p:spPr>
         <p:txBody>
-          <a:bodyPr wrap="square" lIns="25400" tIns="25400" rIns="25400" bIns="25400" anchor="t">
+          <a:bodyPr wrap="square" anchor="t" lIns="25400" rIns="25400" tIns="25400" bIns="25400">
             <a:spAutoFit/>
           </a:bodyPr>
           <a:lstStyle/>
@@ -23393,7 +22454,6 @@
           <a:lstStyle/>
           <a:p>
             <a:pPr algn="ctr"/>
-            <a:endParaRPr/>
           </a:p>
         </p:txBody>
       </p:sp>
@@ -23437,11 +22497,10 @@
           </a:fontRef>
         </p:style>
         <p:txBody>
-          <a:bodyPr wrap="square" rtlCol="0" anchor="ctr"/>
+          <a:bodyPr rtlCol="0" anchor="ctr" wrap="square"/>
           <a:lstStyle/>
           <a:p>
             <a:pPr algn="ctr"/>
-            <a:endParaRPr/>
           </a:p>
         </p:txBody>
       </p:sp>
@@ -23462,7 +22521,7 @@
           <a:noFill/>
         </p:spPr>
         <p:txBody>
-          <a:bodyPr wrap="square" lIns="25400" tIns="25400" rIns="25400" bIns="25400" anchor="t">
+          <a:bodyPr wrap="square" anchor="t" lIns="25400" rIns="25400" tIns="25400" bIns="25400">
             <a:spAutoFit/>
           </a:bodyPr>
           <a:lstStyle/>
@@ -23522,7 +22581,7 @@
           </a:fontRef>
         </p:style>
         <p:txBody>
-          <a:bodyPr wrap="square" tIns="38100" bIns="38100" rtlCol="0" anchor="ctr"/>
+          <a:bodyPr rtlCol="0" anchor="ctr" wrap="square" tIns="38100" bIns="38100"/>
           <a:lstStyle/>
           <a:p>
             <a:pPr algn="ctr"/>
@@ -23586,12 +22645,15 @@
           </a:p>
           <a:p>
             <a:pPr algn="ctr"/>
-            <a:endParaRPr sz="1050">
-              <a:solidFill>
-                <a:srgbClr val="FFFFFF"/>
-              </a:solidFill>
-              <a:latin typeface="Calibri"/>
-            </a:endParaRPr>
+            <a:r>
+              <a:rPr sz="1050">
+                <a:solidFill>
+                  <a:srgbClr val="FFFFFF"/>
+                </a:solidFill>
+                <a:latin typeface="Calibri"/>
+              </a:rPr>
+              <a:t/>
+            </a:r>
           </a:p>
           <a:p>
             <a:pPr algn="ctr"/>
@@ -23657,7 +22719,7 @@
           </a:fontRef>
         </p:style>
         <p:txBody>
-          <a:bodyPr wrap="square" tIns="38100" bIns="38100" rtlCol="0" anchor="ctr"/>
+          <a:bodyPr rtlCol="0" anchor="ctr" wrap="square" tIns="38100" bIns="38100"/>
           <a:lstStyle/>
           <a:p>
             <a:pPr algn="ctr"/>
@@ -23709,21 +22771,27 @@
           </a:p>
           <a:p>
             <a:pPr algn="ctr"/>
-            <a:endParaRPr sz="1050">
-              <a:solidFill>
-                <a:srgbClr val="FFFFFF"/>
-              </a:solidFill>
-              <a:latin typeface="Calibri"/>
-            </a:endParaRPr>
+            <a:r>
+              <a:rPr sz="1050">
+                <a:solidFill>
+                  <a:srgbClr val="FFFFFF"/>
+                </a:solidFill>
+                <a:latin typeface="Calibri"/>
+              </a:rPr>
+              <a:t/>
+            </a:r>
           </a:p>
           <a:p>
             <a:pPr algn="ctr"/>
-            <a:endParaRPr sz="1050">
-              <a:solidFill>
-                <a:srgbClr val="FFFFFF"/>
-              </a:solidFill>
-              <a:latin typeface="Calibri"/>
-            </a:endParaRPr>
+            <a:r>
+              <a:rPr sz="1050">
+                <a:solidFill>
+                  <a:srgbClr val="FFFFFF"/>
+                </a:solidFill>
+                <a:latin typeface="Calibri"/>
+              </a:rPr>
+              <a:t/>
+            </a:r>
           </a:p>
           <a:p>
             <a:pPr algn="ctr"/>
@@ -23791,7 +22859,6 @@
           <a:lstStyle/>
           <a:p>
             <a:pPr algn="ctr"/>
-            <a:endParaRPr/>
           </a:p>
         </p:txBody>
       </p:sp>
@@ -23833,7 +22900,7 @@
           </a:fontRef>
         </p:style>
         <p:txBody>
-          <a:bodyPr wrap="square" tIns="38100" bIns="38100" rtlCol="0" anchor="ctr"/>
+          <a:bodyPr rtlCol="0" anchor="ctr" wrap="square" tIns="38100" bIns="38100"/>
           <a:lstStyle/>
           <a:p>
             <a:pPr algn="ctr"/>
@@ -23861,12 +22928,15 @@
           </a:p>
           <a:p>
             <a:pPr algn="ctr"/>
-            <a:endParaRPr sz="1150">
-              <a:solidFill>
-                <a:srgbClr val="FFFFFF"/>
-              </a:solidFill>
-              <a:latin typeface="Calibri"/>
-            </a:endParaRPr>
+            <a:r>
+              <a:rPr sz="1150">
+                <a:solidFill>
+                  <a:srgbClr val="FFFFFF"/>
+                </a:solidFill>
+                <a:latin typeface="Calibri"/>
+              </a:rPr>
+              <a:t/>
+            </a:r>
           </a:p>
           <a:p>
             <a:pPr algn="ctr"/>
@@ -23920,11 +22990,10 @@
           </a:fontRef>
         </p:style>
         <p:txBody>
-          <a:bodyPr wrap="square" rtlCol="0" anchor="ctr"/>
+          <a:bodyPr rtlCol="0" anchor="ctr" wrap="square"/>
           <a:lstStyle/>
           <a:p>
             <a:pPr algn="ctr"/>
-            <a:endParaRPr/>
           </a:p>
         </p:txBody>
       </p:sp>
@@ -23945,7 +23014,7 @@
           <a:noFill/>
         </p:spPr>
         <p:txBody>
-          <a:bodyPr wrap="square" lIns="25400" tIns="25400" rIns="25400" bIns="25400" anchor="t">
+          <a:bodyPr wrap="square" anchor="t" lIns="25400" rIns="25400" tIns="25400" bIns="25400">
             <a:spAutoFit/>
           </a:bodyPr>
           <a:lstStyle/>
@@ -24003,7 +23072,7 @@
           <a:noFill/>
         </p:spPr>
         <p:txBody>
-          <a:bodyPr wrap="square" lIns="25400" tIns="25400" rIns="25400" bIns="25400" anchor="t">
+          <a:bodyPr wrap="square" anchor="t" lIns="25400" rIns="25400" tIns="25400" bIns="25400">
             <a:spAutoFit/>
           </a:bodyPr>
           <a:lstStyle/>
@@ -24034,7 +23103,7 @@
 </file>
 
 <file path=ppt/slides/slide7.xml><?xml version="1.0" encoding="utf-8"?>
-<p:sld xmlns:a="http://schemas.openxmlformats.org/drawingml/2006/main" xmlns:r="http://schemas.openxmlformats.org/officeDocument/2006/relationships" xmlns:p="http://schemas.openxmlformats.org/presentationml/2006/main">
+<p:sld xmlns:a="http://schemas.openxmlformats.org/drawingml/2006/main" xmlns:p="http://schemas.openxmlformats.org/presentationml/2006/main" xmlns:r="http://schemas.openxmlformats.org/officeDocument/2006/relationships">
   <p:cSld>
     <p:spTree>
       <p:nvGrpSpPr>
@@ -24042,14 +23111,7 @@
         <p:cNvGrpSpPr/>
         <p:nvPr/>
       </p:nvGrpSpPr>
-      <p:grpSpPr>
-        <a:xfrm>
-          <a:off x="0" y="0"/>
-          <a:ext cx="0" cy="0"/>
-          <a:chOff x="0" y="0"/>
-          <a:chExt cx="0" cy="0"/>
-        </a:xfrm>
-      </p:grpSpPr>
+      <p:grpSpPr/>
       <p:sp>
         <p:nvSpPr>
           <p:cNvPr id="2" name="Rectangle 1"/>
@@ -24090,7 +23152,6 @@
           <a:lstStyle/>
           <a:p>
             <a:pPr algn="ctr"/>
-            <a:endParaRPr/>
           </a:p>
         </p:txBody>
       </p:sp>
@@ -24111,7 +23172,7 @@
           <a:noFill/>
         </p:spPr>
         <p:txBody>
-          <a:bodyPr wrap="square" lIns="25400" tIns="25400" rIns="25400" bIns="25400" anchor="t">
+          <a:bodyPr wrap="square" anchor="t" lIns="25400" rIns="25400" tIns="25400" bIns="25400">
             <a:spAutoFit/>
           </a:bodyPr>
           <a:lstStyle/>
@@ -24150,7 +23211,7 @@
           <a:noFill/>
         </p:spPr>
         <p:txBody>
-          <a:bodyPr wrap="square" lIns="25400" tIns="25400" rIns="25400" bIns="25400" anchor="t">
+          <a:bodyPr wrap="square" anchor="t" lIns="25400" rIns="25400" tIns="25400" bIns="25400">
             <a:spAutoFit/>
           </a:bodyPr>
           <a:lstStyle/>
@@ -24212,7 +23273,6 @@
           <a:lstStyle/>
           <a:p>
             <a:pPr algn="ctr"/>
-            <a:endParaRPr/>
           </a:p>
         </p:txBody>
       </p:sp>
@@ -24233,7 +23293,7 @@
           <a:noFill/>
         </p:spPr>
         <p:txBody>
-          <a:bodyPr wrap="square" lIns="25400" tIns="25400" rIns="25400" bIns="25400" anchor="t">
+          <a:bodyPr wrap="square" anchor="t" lIns="25400" rIns="25400" tIns="25400" bIns="25400">
             <a:spAutoFit/>
           </a:bodyPr>
           <a:lstStyle/>
@@ -24293,7 +23353,7 @@
           </a:fontRef>
         </p:style>
         <p:txBody>
-          <a:bodyPr wrap="square" lIns="152400" tIns="101600" rIns="127000" bIns="101600" rtlCol="0" anchor="t"/>
+          <a:bodyPr rtlCol="0" anchor="t" wrap="square" lIns="152400" rIns="127000" tIns="101600" bIns="101600"/>
           <a:lstStyle/>
           <a:p>
             <a:pPr algn="ctr">
@@ -24302,31 +23362,13 @@
               </a:lnSpc>
             </a:pPr>
             <a:r>
-              <a:rPr sz="1300" dirty="0">
+              <a:rPr sz="1300">
                 <a:solidFill>
                   <a:srgbClr val="CBE6F2"/>
                 </a:solidFill>
                 <a:latin typeface="Consolas"/>
               </a:rPr>
-              <a:t>// ---- Setup (</a:t>
-            </a:r>
-            <a:r>
-              <a:rPr sz="1300" dirty="0" err="1">
-                <a:solidFill>
-                  <a:srgbClr val="CBE6F2"/>
-                </a:solidFill>
-                <a:latin typeface="Consolas"/>
-              </a:rPr>
-              <a:t>appId</a:t>
-            </a:r>
-            <a:r>
-              <a:rPr sz="1300" dirty="0">
-                <a:solidFill>
-                  <a:srgbClr val="CBE6F2"/>
-                </a:solidFill>
-                <a:latin typeface="Consolas"/>
-              </a:rPr>
-              <a:t> scopes all data to this app) ------------------</a:t>
+              <a:t>// ---- Setup (appId scopes all data to this app) ------------------</a:t>
             </a:r>
           </a:p>
           <a:p>
@@ -24336,76 +23378,13 @@
               </a:lnSpc>
             </a:pPr>
             <a:r>
-              <a:rPr sz="1300" dirty="0" err="1">
+              <a:rPr sz="1300">
                 <a:solidFill>
                   <a:srgbClr val="CBE6F2"/>
                 </a:solidFill>
                 <a:latin typeface="Consolas"/>
               </a:rPr>
-              <a:t>PingIt.init</a:t>
-            </a:r>
-            <a:r>
-              <a:rPr sz="1300" dirty="0">
-                <a:solidFill>
-                  <a:srgbClr val="CBE6F2"/>
-                </a:solidFill>
-                <a:latin typeface="Consolas"/>
-              </a:rPr>
-              <a:t>(</a:t>
-            </a:r>
-            <a:r>
-              <a:rPr sz="1300" dirty="0" err="1">
-                <a:solidFill>
-                  <a:srgbClr val="CBE6F2"/>
-                </a:solidFill>
-                <a:latin typeface="Consolas"/>
-              </a:rPr>
-              <a:t>appId</a:t>
-            </a:r>
-            <a:r>
-              <a:rPr sz="1300" dirty="0">
-                <a:solidFill>
-                  <a:srgbClr val="CBE6F2"/>
-                </a:solidFill>
-                <a:latin typeface="Consolas"/>
-              </a:rPr>
-              <a:t>, { </a:t>
-            </a:r>
-            <a:r>
-              <a:rPr sz="1300" dirty="0" err="1">
-                <a:solidFill>
-                  <a:srgbClr val="CBE6F2"/>
-                </a:solidFill>
-                <a:latin typeface="Consolas"/>
-              </a:rPr>
-              <a:t>historyMode</a:t>
-            </a:r>
-            <a:r>
-              <a:rPr sz="1300" dirty="0">
-                <a:solidFill>
-                  <a:srgbClr val="CBE6F2"/>
-                </a:solidFill>
-                <a:latin typeface="Consolas"/>
-              </a:rPr>
-              <a:t>, </a:t>
-            </a:r>
-            <a:r>
-              <a:rPr sz="1300" dirty="0" err="1">
-                <a:solidFill>
-                  <a:srgbClr val="CBE6F2"/>
-                </a:solidFill>
-                <a:latin typeface="Consolas"/>
-              </a:rPr>
-              <a:t>dataSaver</a:t>
-            </a:r>
-            <a:r>
-              <a:rPr sz="1300" dirty="0">
-                <a:solidFill>
-                  <a:srgbClr val="CBE6F2"/>
-                </a:solidFill>
-                <a:latin typeface="Consolas"/>
-              </a:rPr>
-              <a:t>, endpoint })</a:t>
+              <a:t>PingIt.init(appId, { historyMode, dataSaver, endpoint })</a:t>
             </a:r>
           </a:p>
           <a:p>
@@ -24415,7 +23394,7 @@
               </a:lnSpc>
             </a:pPr>
             <a:r>
-              <a:rPr sz="1300" dirty="0">
+              <a:rPr sz="1300">
                 <a:solidFill>
                   <a:srgbClr val="CBE6F2"/>
                 </a:solidFill>
@@ -24431,7 +23410,7 @@
               </a:lnSpc>
             </a:pPr>
             <a:r>
-              <a:rPr sz="1300" dirty="0">
+              <a:rPr sz="1300">
                 <a:solidFill>
                   <a:srgbClr val="CBE6F2"/>
                 </a:solidFill>
@@ -24447,40 +23426,13 @@
               </a:lnSpc>
             </a:pPr>
             <a:r>
-              <a:rPr sz="1300" dirty="0" err="1">
+              <a:rPr sz="1300">
                 <a:solidFill>
                   <a:srgbClr val="CBE6F2"/>
                 </a:solidFill>
                 <a:latin typeface="Consolas"/>
               </a:rPr>
-              <a:t>pingIt.isReadyFor</a:t>
-            </a:r>
-            <a:r>
-              <a:rPr sz="1300" dirty="0">
-                <a:solidFill>
-                  <a:srgbClr val="CBE6F2"/>
-                </a:solidFill>
-                <a:latin typeface="Consolas"/>
-              </a:rPr>
-              <a:t>(</a:t>
-            </a:r>
-            <a:r>
-              <a:rPr sz="1300" dirty="0" err="1">
-                <a:solidFill>
-                  <a:srgbClr val="CBE6F2"/>
-                </a:solidFill>
-                <a:latin typeface="Consolas"/>
-              </a:rPr>
-              <a:t>Profile.VIDEO_CALL</a:t>
-            </a:r>
-            <a:r>
-              <a:rPr sz="1300" dirty="0">
-                <a:solidFill>
-                  <a:srgbClr val="CBE6F2"/>
-                </a:solidFill>
-                <a:latin typeface="Consolas"/>
-              </a:rPr>
-              <a:t>)  -&gt; { passed, reason, measured }</a:t>
+              <a:t>pingIt.isReadyFor(Profile.VIDEO_CALL)  -&gt; { passed, reason, measured }</a:t>
             </a:r>
           </a:p>
           <a:p>
@@ -24490,7 +23442,7 @@
               </a:lnSpc>
             </a:pPr>
             <a:r>
-              <a:rPr sz="1300" dirty="0">
+              <a:rPr sz="1300">
                 <a:solidFill>
                   <a:srgbClr val="CBE6F2"/>
                 </a:solidFill>
@@ -24506,7 +23458,7 @@
               </a:lnSpc>
             </a:pPr>
             <a:r>
-              <a:rPr sz="1300" dirty="0">
+              <a:rPr sz="1300">
                 <a:solidFill>
                   <a:srgbClr val="CBE6F2"/>
                 </a:solidFill>
@@ -24522,94 +23474,13 @@
               </a:lnSpc>
             </a:pPr>
             <a:r>
-              <a:rPr sz="1300" dirty="0" err="1">
+              <a:rPr sz="1300">
                 <a:solidFill>
                   <a:srgbClr val="CBE6F2"/>
                 </a:solidFill>
                 <a:latin typeface="Consolas"/>
               </a:rPr>
-              <a:t>pingIt.runTest</a:t>
-            </a:r>
-            <a:r>
-              <a:rPr sz="1300" dirty="0">
-                <a:solidFill>
-                  <a:srgbClr val="CBE6F2"/>
-                </a:solidFill>
-                <a:latin typeface="Consolas"/>
-              </a:rPr>
-              <a:t>()   -&gt; { </a:t>
-            </a:r>
-            <a:r>
-              <a:rPr sz="1300" dirty="0" err="1">
-                <a:solidFill>
-                  <a:srgbClr val="CBE6F2"/>
-                </a:solidFill>
-                <a:latin typeface="Consolas"/>
-              </a:rPr>
-              <a:t>downloadMbps</a:t>
-            </a:r>
-            <a:r>
-              <a:rPr sz="1300" dirty="0">
-                <a:solidFill>
-                  <a:srgbClr val="CBE6F2"/>
-                </a:solidFill>
-                <a:latin typeface="Consolas"/>
-              </a:rPr>
-              <a:t>, </a:t>
-            </a:r>
-            <a:r>
-              <a:rPr sz="1300" dirty="0" err="1">
-                <a:solidFill>
-                  <a:srgbClr val="CBE6F2"/>
-                </a:solidFill>
-                <a:latin typeface="Consolas"/>
-              </a:rPr>
-              <a:t>uploadMbps</a:t>
-            </a:r>
-            <a:r>
-              <a:rPr sz="1300" dirty="0">
-                <a:solidFill>
-                  <a:srgbClr val="CBE6F2"/>
-                </a:solidFill>
-                <a:latin typeface="Consolas"/>
-              </a:rPr>
-              <a:t>, </a:t>
-            </a:r>
-            <a:r>
-              <a:rPr sz="1300" dirty="0" err="1">
-                <a:solidFill>
-                  <a:srgbClr val="CBE6F2"/>
-                </a:solidFill>
-                <a:latin typeface="Consolas"/>
-              </a:rPr>
-              <a:t>latencyMs</a:t>
-            </a:r>
-            <a:r>
-              <a:rPr sz="1300" dirty="0">
-                <a:solidFill>
-                  <a:srgbClr val="CBE6F2"/>
-                </a:solidFill>
-                <a:latin typeface="Consolas"/>
-              </a:rPr>
-              <a:t>, </a:t>
-            </a:r>
-            <a:r>
-              <a:rPr sz="1300" dirty="0" err="1">
-                <a:solidFill>
-                  <a:srgbClr val="CBE6F2"/>
-                </a:solidFill>
-                <a:latin typeface="Consolas"/>
-              </a:rPr>
-              <a:t>jitterMs</a:t>
-            </a:r>
-            <a:r>
-              <a:rPr sz="1300" dirty="0">
-                <a:solidFill>
-                  <a:srgbClr val="CBE6F2"/>
-                </a:solidFill>
-                <a:latin typeface="Consolas"/>
-              </a:rPr>
-              <a:t>,</a:t>
+              <a:t>pingIt.runTest()   -&gt; { downloadMbps, uploadMbps, latencyMs, jitterMs,</a:t>
             </a:r>
           </a:p>
           <a:p>
@@ -24619,31 +23490,13 @@
               </a:lnSpc>
             </a:pPr>
             <a:r>
-              <a:rPr sz="1300" dirty="0">
+              <a:rPr sz="1300">
                 <a:solidFill>
                   <a:srgbClr val="CBE6F2"/>
                 </a:solidFill>
                 <a:latin typeface="Consolas"/>
               </a:rPr>
-              <a:t>                        </a:t>
-            </a:r>
-            <a:r>
-              <a:rPr sz="1300" dirty="0" err="1">
-                <a:solidFill>
-                  <a:srgbClr val="CBE6F2"/>
-                </a:solidFill>
-                <a:latin typeface="Consolas"/>
-              </a:rPr>
-              <a:t>packetLossPct</a:t>
-            </a:r>
-            <a:r>
-              <a:rPr sz="1300" dirty="0">
-                <a:solidFill>
-                  <a:srgbClr val="CBE6F2"/>
-                </a:solidFill>
-                <a:latin typeface="Consolas"/>
-              </a:rPr>
-              <a:t>, score, label, timestamp }</a:t>
+              <a:t>                        packetLossPct, score, label, timestamp }</a:t>
             </a:r>
           </a:p>
           <a:p>
@@ -24653,38 +23506,14 @@
               </a:lnSpc>
             </a:pPr>
             <a:r>
-              <a:rPr sz="1300" dirty="0" err="1">
+              <a:rPr sz="1300">
                 <a:solidFill>
                   <a:srgbClr val="CBE6F2"/>
                 </a:solidFill>
                 <a:latin typeface="Consolas"/>
               </a:rPr>
-              <a:t>pingIt.ping</a:t>
-            </a:r>
-            <a:r>
-              <a:rPr sz="1300" dirty="0">
-                <a:solidFill>
-                  <a:srgbClr val="CBE6F2"/>
-                </a:solidFill>
-                <a:latin typeface="Consolas"/>
-              </a:rPr>
-              <a:t>()      -&gt; </a:t>
-            </a:r>
-            <a:r>
-              <a:rPr sz="1300" dirty="0" err="1">
-                <a:solidFill>
-                  <a:srgbClr val="CBE6F2"/>
-                </a:solidFill>
-                <a:latin typeface="Consolas"/>
-              </a:rPr>
-              <a:t>latencyMs</a:t>
-            </a:r>
-            <a:endParaRPr sz="1300" dirty="0">
-              <a:solidFill>
-                <a:srgbClr val="CBE6F2"/>
-              </a:solidFill>
-              <a:latin typeface="Consolas"/>
-            </a:endParaRPr>
+              <a:t>pingIt.ping()      -&gt; latencyMs</a:t>
+            </a:r>
           </a:p>
           <a:p>
             <a:pPr>
@@ -24693,7 +23522,7 @@
               </a:lnSpc>
             </a:pPr>
             <a:r>
-              <a:rPr sz="1300" dirty="0">
+              <a:rPr sz="1300">
                 <a:solidFill>
                   <a:srgbClr val="CBE6F2"/>
                 </a:solidFill>
@@ -24709,31 +23538,13 @@
               </a:lnSpc>
             </a:pPr>
             <a:r>
-              <a:rPr sz="1300" dirty="0">
+              <a:rPr sz="1300">
                 <a:solidFill>
                   <a:srgbClr val="CBE6F2"/>
                 </a:solidFill>
                 <a:latin typeface="Consolas"/>
               </a:rPr>
-              <a:t>// ---- History (only when </a:t>
-            </a:r>
-            <a:r>
-              <a:rPr sz="1300" dirty="0" err="1">
-                <a:solidFill>
-                  <a:srgbClr val="CBE6F2"/>
-                </a:solidFill>
-                <a:latin typeface="Consolas"/>
-              </a:rPr>
-              <a:t>historyMode</a:t>
-            </a:r>
-            <a:r>
-              <a:rPr sz="1300" dirty="0">
-                <a:solidFill>
-                  <a:srgbClr val="CBE6F2"/>
-                </a:solidFill>
-                <a:latin typeface="Consolas"/>
-              </a:rPr>
-              <a:t> != NONE) --------------------</a:t>
+              <a:t>// ---- History (only when historyMode != NONE) --------------------</a:t>
             </a:r>
           </a:p>
           <a:p>
@@ -24743,22 +23554,13 @@
               </a:lnSpc>
             </a:pPr>
             <a:r>
-              <a:rPr sz="1300" dirty="0" err="1">
+              <a:rPr sz="1300">
                 <a:solidFill>
                   <a:srgbClr val="CBE6F2"/>
                 </a:solidFill>
                 <a:latin typeface="Consolas"/>
               </a:rPr>
-              <a:t>pingIt.getHistory</a:t>
-            </a:r>
-            <a:r>
-              <a:rPr sz="1300" dirty="0">
-                <a:solidFill>
-                  <a:srgbClr val="CBE6F2"/>
-                </a:solidFill>
-                <a:latin typeface="Consolas"/>
-              </a:rPr>
-              <a:t>(limit)   -&gt; [ past results ]</a:t>
+              <a:t>pingIt.getHistory(limit)   -&gt; [ past results ]</a:t>
             </a:r>
           </a:p>
           <a:p>
@@ -24768,7 +23570,7 @@
               </a:lnSpc>
             </a:pPr>
             <a:r>
-              <a:rPr sz="1300" dirty="0">
+              <a:rPr sz="1300">
                 <a:solidFill>
                   <a:srgbClr val="CBE6F2"/>
                 </a:solidFill>
@@ -24784,7 +23586,7 @@
               </a:lnSpc>
             </a:pPr>
             <a:r>
-              <a:rPr sz="1300" dirty="0">
+              <a:rPr sz="1300">
                 <a:solidFill>
                   <a:srgbClr val="CBE6F2"/>
                 </a:solidFill>
@@ -24800,22 +23602,13 @@
               </a:lnSpc>
             </a:pPr>
             <a:r>
-              <a:rPr sz="1300" dirty="0" err="1">
+              <a:rPr sz="1300">
                 <a:solidFill>
                   <a:srgbClr val="CBE6F2"/>
                 </a:solidFill>
                 <a:latin typeface="Consolas"/>
               </a:rPr>
-              <a:t>pingIt.refreshProfiles</a:t>
-            </a:r>
-            <a:r>
-              <a:rPr sz="1300" dirty="0">
-                <a:solidFill>
-                  <a:srgbClr val="CBE6F2"/>
-                </a:solidFill>
-                <a:latin typeface="Consolas"/>
-              </a:rPr>
-              <a:t>()   // force a threshold refresh</a:t>
+              <a:t>pingIt.refreshProfiles()   // force a threshold refresh</a:t>
             </a:r>
           </a:p>
           <a:p>
@@ -24825,22 +23618,13 @@
               </a:lnSpc>
             </a:pPr>
             <a:r>
-              <a:rPr sz="1300" dirty="0" err="1">
+              <a:rPr sz="1300">
                 <a:solidFill>
                   <a:srgbClr val="CBE6F2"/>
                 </a:solidFill>
                 <a:latin typeface="Consolas"/>
               </a:rPr>
-              <a:t>pingIt.cancel</a:t>
-            </a:r>
-            <a:r>
-              <a:rPr sz="1300" dirty="0">
-                <a:solidFill>
-                  <a:srgbClr val="CBE6F2"/>
-                </a:solidFill>
-                <a:latin typeface="Consolas"/>
-              </a:rPr>
-              <a:t>()            // abort an in-flight test</a:t>
+              <a:t>pingIt.cancel()            // abort an in-flight test</a:t>
             </a:r>
           </a:p>
         </p:txBody>
@@ -24862,7 +23646,7 @@
           <a:noFill/>
         </p:spPr>
         <p:txBody>
-          <a:bodyPr wrap="square" lIns="25400" tIns="25400" rIns="25400" bIns="25400" anchor="t">
+          <a:bodyPr wrap="square" anchor="t" lIns="25400" rIns="25400" tIns="25400" bIns="25400">
             <a:spAutoFit/>
           </a:bodyPr>
           <a:lstStyle/>
@@ -24893,7 +23677,7 @@
 </file>
 
 <file path=ppt/slides/slide8.xml><?xml version="1.0" encoding="utf-8"?>
-<p:sld xmlns:a="http://schemas.openxmlformats.org/drawingml/2006/main" xmlns:r="http://schemas.openxmlformats.org/officeDocument/2006/relationships" xmlns:p="http://schemas.openxmlformats.org/presentationml/2006/main">
+<p:sld xmlns:a="http://schemas.openxmlformats.org/drawingml/2006/main" xmlns:p="http://schemas.openxmlformats.org/presentationml/2006/main" xmlns:r="http://schemas.openxmlformats.org/officeDocument/2006/relationships">
   <p:cSld>
     <p:spTree>
       <p:nvGrpSpPr>
@@ -24901,14 +23685,7 @@
         <p:cNvGrpSpPr/>
         <p:nvPr/>
       </p:nvGrpSpPr>
-      <p:grpSpPr>
-        <a:xfrm>
-          <a:off x="0" y="0"/>
-          <a:ext cx="0" cy="0"/>
-          <a:chOff x="0" y="0"/>
-          <a:chExt cx="0" cy="0"/>
-        </a:xfrm>
-      </p:grpSpPr>
+      <p:grpSpPr/>
       <p:sp>
         <p:nvSpPr>
           <p:cNvPr id="2" name="Rectangle 1"/>
@@ -24949,7 +23726,6 @@
           <a:lstStyle/>
           <a:p>
             <a:pPr algn="ctr"/>
-            <a:endParaRPr/>
           </a:p>
         </p:txBody>
       </p:sp>
@@ -24970,7 +23746,7 @@
           <a:noFill/>
         </p:spPr>
         <p:txBody>
-          <a:bodyPr wrap="square" lIns="25400" tIns="25400" rIns="25400" bIns="25400" anchor="t">
+          <a:bodyPr wrap="square" anchor="t" lIns="25400" rIns="25400" tIns="25400" bIns="25400">
             <a:spAutoFit/>
           </a:bodyPr>
           <a:lstStyle/>
@@ -25009,7 +23785,7 @@
           <a:noFill/>
         </p:spPr>
         <p:txBody>
-          <a:bodyPr wrap="square" lIns="25400" tIns="25400" rIns="25400" bIns="25400" anchor="t">
+          <a:bodyPr wrap="square" anchor="t" lIns="25400" rIns="25400" tIns="25400" bIns="25400">
             <a:spAutoFit/>
           </a:bodyPr>
           <a:lstStyle/>
@@ -25071,7 +23847,6 @@
           <a:lstStyle/>
           <a:p>
             <a:pPr algn="ctr"/>
-            <a:endParaRPr/>
           </a:p>
         </p:txBody>
       </p:sp>
@@ -25092,7 +23867,7 @@
           <a:noFill/>
         </p:spPr>
         <p:txBody>
-          <a:bodyPr wrap="square" lIns="25400" tIns="25400" rIns="25400" bIns="25400" anchor="t">
+          <a:bodyPr wrap="square" anchor="t" lIns="25400" rIns="25400" tIns="25400" bIns="25400">
             <a:spAutoFit/>
           </a:bodyPr>
           <a:lstStyle/>
@@ -25154,11 +23929,10 @@
           </a:fontRef>
         </p:style>
         <p:txBody>
-          <a:bodyPr wrap="square" rtlCol="0" anchor="ctr"/>
+          <a:bodyPr rtlCol="0" anchor="ctr" wrap="square"/>
           <a:lstStyle/>
           <a:p>
             <a:pPr algn="ctr"/>
-            <a:endParaRPr/>
           </a:p>
         </p:txBody>
       </p:sp>
@@ -25203,7 +23977,7 @@
           <a:p>
             <a:pPr algn="ctr"/>
             <a:r>
-              <a:rPr sz="1350" b="1">
+              <a:rPr b="1" sz="1350">
                 <a:solidFill>
                   <a:srgbClr val="FFFFFF"/>
                 </a:solidFill>
@@ -25231,7 +24005,7 @@
           <a:noFill/>
         </p:spPr>
         <p:txBody>
-          <a:bodyPr wrap="square" lIns="25400" tIns="25400" rIns="25400" bIns="25400" anchor="t">
+          <a:bodyPr wrap="square" anchor="t" lIns="25400" rIns="25400" tIns="25400" bIns="25400">
             <a:spAutoFit/>
           </a:bodyPr>
           <a:lstStyle/>
@@ -25391,11 +24165,10 @@
           </a:fontRef>
         </p:style>
         <p:txBody>
-          <a:bodyPr wrap="square" rtlCol="0" anchor="ctr"/>
+          <a:bodyPr rtlCol="0" anchor="ctr" wrap="square"/>
           <a:lstStyle/>
           <a:p>
             <a:pPr algn="ctr"/>
-            <a:endParaRPr/>
           </a:p>
         </p:txBody>
       </p:sp>
@@ -25440,7 +24213,7 @@
           <a:p>
             <a:pPr algn="ctr"/>
             <a:r>
-              <a:rPr sz="1350" b="1">
+              <a:rPr b="1" sz="1350">
                 <a:solidFill>
                   <a:srgbClr val="FFFFFF"/>
                 </a:solidFill>
@@ -25468,7 +24241,7 @@
           <a:noFill/>
         </p:spPr>
         <p:txBody>
-          <a:bodyPr wrap="square" lIns="25400" tIns="25400" rIns="25400" bIns="25400" anchor="t">
+          <a:bodyPr wrap="square" anchor="t" lIns="25400" rIns="25400" tIns="25400" bIns="25400">
             <a:spAutoFit/>
           </a:bodyPr>
           <a:lstStyle/>
@@ -25590,11 +24363,10 @@
           </a:fontRef>
         </p:style>
         <p:txBody>
-          <a:bodyPr wrap="square" rtlCol="0" anchor="ctr"/>
+          <a:bodyPr rtlCol="0" anchor="ctr" wrap="square"/>
           <a:lstStyle/>
           <a:p>
             <a:pPr algn="ctr"/>
-            <a:endParaRPr/>
           </a:p>
         </p:txBody>
       </p:sp>
@@ -25639,7 +24411,7 @@
           <a:p>
             <a:pPr algn="ctr"/>
             <a:r>
-              <a:rPr sz="1350" b="1">
+              <a:rPr b="1" sz="1350">
                 <a:solidFill>
                   <a:srgbClr val="FFFFFF"/>
                 </a:solidFill>
@@ -25667,7 +24439,7 @@
           <a:noFill/>
         </p:spPr>
         <p:txBody>
-          <a:bodyPr wrap="square" lIns="25400" tIns="25400" rIns="25400" bIns="25400" anchor="t">
+          <a:bodyPr wrap="square" anchor="t" lIns="25400" rIns="25400" tIns="25400" bIns="25400">
             <a:spAutoFit/>
           </a:bodyPr>
           <a:lstStyle/>
@@ -25785,7 +24557,7 @@
           <a:noFill/>
         </p:spPr>
         <p:txBody>
-          <a:bodyPr wrap="square" lIns="25400" tIns="25400" rIns="25400" bIns="25400" anchor="t">
+          <a:bodyPr wrap="square" anchor="t" lIns="25400" rIns="25400" tIns="25400" bIns="25400">
             <a:spAutoFit/>
           </a:bodyPr>
           <a:lstStyle/>
@@ -25816,7 +24588,7 @@
 </file>
 
 <file path=ppt/slides/slide9.xml><?xml version="1.0" encoding="utf-8"?>
-<p:sld xmlns:a="http://schemas.openxmlformats.org/drawingml/2006/main" xmlns:r="http://schemas.openxmlformats.org/officeDocument/2006/relationships" xmlns:p="http://schemas.openxmlformats.org/presentationml/2006/main">
+<p:sld xmlns:a="http://schemas.openxmlformats.org/drawingml/2006/main" xmlns:p="http://schemas.openxmlformats.org/presentationml/2006/main" xmlns:r="http://schemas.openxmlformats.org/officeDocument/2006/relationships">
   <p:cSld>
     <p:spTree>
       <p:nvGrpSpPr>
@@ -25824,14 +24596,7 @@
         <p:cNvGrpSpPr/>
         <p:nvPr/>
       </p:nvGrpSpPr>
-      <p:grpSpPr>
-        <a:xfrm>
-          <a:off x="0" y="0"/>
-          <a:ext cx="0" cy="0"/>
-          <a:chOff x="0" y="0"/>
-          <a:chExt cx="0" cy="0"/>
-        </a:xfrm>
-      </p:grpSpPr>
+      <p:grpSpPr/>
       <p:sp>
         <p:nvSpPr>
           <p:cNvPr id="2" name="Rectangle 1"/>
@@ -25872,7 +24637,6 @@
           <a:lstStyle/>
           <a:p>
             <a:pPr algn="ctr"/>
-            <a:endParaRPr/>
           </a:p>
         </p:txBody>
       </p:sp>
@@ -25893,7 +24657,7 @@
           <a:noFill/>
         </p:spPr>
         <p:txBody>
-          <a:bodyPr wrap="square" lIns="25400" tIns="25400" rIns="25400" bIns="25400" anchor="t">
+          <a:bodyPr wrap="square" anchor="t" lIns="25400" rIns="25400" tIns="25400" bIns="25400">
             <a:spAutoFit/>
           </a:bodyPr>
           <a:lstStyle/>
@@ -25932,7 +24696,7 @@
           <a:noFill/>
         </p:spPr>
         <p:txBody>
-          <a:bodyPr wrap="square" lIns="25400" tIns="25400" rIns="25400" bIns="25400" anchor="t">
+          <a:bodyPr wrap="square" anchor="t" lIns="25400" rIns="25400" tIns="25400" bIns="25400">
             <a:spAutoFit/>
           </a:bodyPr>
           <a:lstStyle/>
@@ -25994,7 +24758,6 @@
           <a:lstStyle/>
           <a:p>
             <a:pPr algn="ctr"/>
-            <a:endParaRPr/>
           </a:p>
         </p:txBody>
       </p:sp>
@@ -26015,7 +24778,7 @@
           <a:noFill/>
         </p:spPr>
         <p:txBody>
-          <a:bodyPr wrap="square" lIns="25400" tIns="25400" rIns="25400" bIns="25400" anchor="t">
+          <a:bodyPr wrap="square" anchor="t" lIns="25400" rIns="25400" tIns="25400" bIns="25400">
             <a:spAutoFit/>
           </a:bodyPr>
           <a:lstStyle/>
@@ -26077,11 +24840,10 @@
           </a:fontRef>
         </p:style>
         <p:txBody>
-          <a:bodyPr wrap="square" rtlCol="0" anchor="ctr"/>
+          <a:bodyPr rtlCol="0" anchor="ctr" wrap="square"/>
           <a:lstStyle/>
           <a:p>
             <a:pPr algn="ctr"/>
-            <a:endParaRPr/>
           </a:p>
         </p:txBody>
       </p:sp>
@@ -26126,7 +24888,7 @@
           <a:p>
             <a:pPr algn="ctr"/>
             <a:r>
-              <a:rPr sz="1350" b="1">
+              <a:rPr b="1" sz="1350">
                 <a:solidFill>
                   <a:srgbClr val="FFFFFF"/>
                 </a:solidFill>
@@ -26154,7 +24916,7 @@
           <a:noFill/>
         </p:spPr>
         <p:txBody>
-          <a:bodyPr wrap="square" lIns="25400" tIns="25400" rIns="25400" bIns="25400" anchor="t">
+          <a:bodyPr wrap="square" anchor="t" lIns="25400" rIns="25400" tIns="25400" bIns="25400">
             <a:spAutoFit/>
           </a:bodyPr>
           <a:lstStyle/>
@@ -26257,11 +25019,10 @@
           </a:fontRef>
         </p:style>
         <p:txBody>
-          <a:bodyPr wrap="square" rtlCol="0" anchor="ctr"/>
+          <a:bodyPr rtlCol="0" anchor="ctr" wrap="square"/>
           <a:lstStyle/>
           <a:p>
             <a:pPr algn="ctr"/>
-            <a:endParaRPr/>
           </a:p>
         </p:txBody>
       </p:sp>
@@ -26306,7 +25067,7 @@
           <a:p>
             <a:pPr algn="ctr"/>
             <a:r>
-              <a:rPr sz="1350" b="1">
+              <a:rPr b="1" sz="1350">
                 <a:solidFill>
                   <a:srgbClr val="FFFFFF"/>
                 </a:solidFill>
@@ -26334,7 +25095,7 @@
           <a:noFill/>
         </p:spPr>
         <p:txBody>
-          <a:bodyPr wrap="square" lIns="25400" tIns="25400" rIns="25400" bIns="25400" anchor="t">
+          <a:bodyPr wrap="square" anchor="t" lIns="25400" rIns="25400" tIns="25400" bIns="25400">
             <a:spAutoFit/>
           </a:bodyPr>
           <a:lstStyle/>
@@ -26348,31 +25109,13 @@
               </a:spcAft>
             </a:pPr>
             <a:r>
-              <a:rPr sz="1250" b="0" i="0" dirty="0">
+              <a:rPr sz="1250" b="0" i="0">
                 <a:solidFill>
                   <a:srgbClr val="1A2B3C"/>
                 </a:solidFill>
                 <a:latin typeface="Calibri"/>
               </a:rPr>
-              <a:t>•  </a:t>
-            </a:r>
-            <a:r>
-              <a:rPr sz="1250" b="0" i="0" dirty="0" err="1">
-                <a:solidFill>
-                  <a:srgbClr val="1A2B3C"/>
-                </a:solidFill>
-                <a:latin typeface="Calibri"/>
-              </a:rPr>
-              <a:t>appId</a:t>
-            </a:r>
-            <a:r>
-              <a:rPr sz="1250" b="0" i="0" dirty="0">
-                <a:solidFill>
-                  <a:srgbClr val="1A2B3C"/>
-                </a:solidFill>
-                <a:latin typeface="Calibri"/>
-              </a:rPr>
-              <a:t> scopes all data to one app</a:t>
+              <a:t>•  appId scopes all data to one app</a:t>
             </a:r>
           </a:p>
           <a:p>
@@ -26385,31 +25128,13 @@
               </a:spcAft>
             </a:pPr>
             <a:r>
-              <a:rPr sz="1250" b="0" i="0" dirty="0">
+              <a:rPr sz="1250" b="0" i="0">
                 <a:solidFill>
                   <a:srgbClr val="1A2B3C"/>
                 </a:solidFill>
                 <a:latin typeface="Calibri"/>
               </a:rPr>
-              <a:t>•  </a:t>
-            </a:r>
-            <a:r>
-              <a:rPr sz="1250" b="0" i="0" dirty="0" err="1">
-                <a:solidFill>
-                  <a:srgbClr val="1A2B3C"/>
-                </a:solidFill>
-                <a:latin typeface="Calibri"/>
-              </a:rPr>
-              <a:t>deviceId</a:t>
-            </a:r>
-            <a:r>
-              <a:rPr sz="1250" b="0" i="0" dirty="0">
-                <a:solidFill>
-                  <a:srgbClr val="1A2B3C"/>
-                </a:solidFill>
-                <a:latin typeface="Calibri"/>
-              </a:rPr>
-              <a:t> = UUID in private storage; survives restarts</a:t>
+              <a:t>•  deviceId = UUID in private storage; survives restarts</a:t>
             </a:r>
           </a:p>
           <a:p>
@@ -26422,31 +25147,13 @@
               </a:spcAft>
             </a:pPr>
             <a:r>
-              <a:rPr sz="1250" b="0" i="0" dirty="0">
+              <a:rPr sz="1250" b="0" i="0">
                 <a:solidFill>
                   <a:srgbClr val="1A2B3C"/>
                 </a:solidFill>
                 <a:latin typeface="Calibri"/>
               </a:rPr>
-              <a:t>•  IP changing doesn't matter (we key on </a:t>
-            </a:r>
-            <a:r>
-              <a:rPr sz="1250" b="0" i="0" dirty="0" err="1">
-                <a:solidFill>
-                  <a:srgbClr val="1A2B3C"/>
-                </a:solidFill>
-                <a:latin typeface="Calibri"/>
-              </a:rPr>
-              <a:t>appId+deviceId</a:t>
-            </a:r>
-            <a:r>
-              <a:rPr sz="1250" b="0" i="0" dirty="0">
-                <a:solidFill>
-                  <a:srgbClr val="1A2B3C"/>
-                </a:solidFill>
-                <a:latin typeface="Calibri"/>
-              </a:rPr>
-              <a:t>)</a:t>
+              <a:t>•  IP changing doesn't matter (we key on appId+deviceId)</a:t>
             </a:r>
           </a:p>
         </p:txBody>
@@ -26491,11 +25198,10 @@
           </a:fontRef>
         </p:style>
         <p:txBody>
-          <a:bodyPr wrap="square" rtlCol="0" anchor="ctr"/>
+          <a:bodyPr rtlCol="0" anchor="ctr" wrap="square"/>
           <a:lstStyle/>
           <a:p>
             <a:pPr algn="ctr"/>
-            <a:endParaRPr/>
           </a:p>
         </p:txBody>
       </p:sp>
@@ -26540,7 +25246,7 @@
           <a:p>
             <a:pPr algn="ctr"/>
             <a:r>
-              <a:rPr sz="1350" b="1">
+              <a:rPr b="1" sz="1350">
                 <a:solidFill>
                   <a:srgbClr val="FFFFFF"/>
                 </a:solidFill>
@@ -26568,13 +25274,11 @@
           <a:noFill/>
         </p:spPr>
         <p:txBody>
-          <a:bodyPr wrap="square" lIns="25400" tIns="25400" rIns="25400" bIns="25400" anchor="t">
+          <a:bodyPr wrap="square" anchor="t" lIns="25400" rIns="25400" tIns="25400" bIns="25400">
             <a:spAutoFit/>
           </a:bodyPr>
           <a:lstStyle/>
-          <a:p>
-            <a:endParaRPr/>
-          </a:p>
+          <a:p/>
         </p:txBody>
       </p:sp>
       <p:sp>
@@ -26648,7 +25352,7 @@
           <a:noFill/>
         </p:spPr>
         <p:txBody>
-          <a:bodyPr wrap="square" lIns="25400" tIns="25400" rIns="25400" bIns="25400" anchor="ctr">
+          <a:bodyPr wrap="square" anchor="ctr" lIns="25400" rIns="25400" tIns="25400" bIns="25400">
             <a:spAutoFit/>
           </a:bodyPr>
           <a:lstStyle/>
@@ -26741,7 +25445,7 @@
           <a:noFill/>
         </p:spPr>
         <p:txBody>
-          <a:bodyPr wrap="square" lIns="25400" tIns="25400" rIns="25400" bIns="25400" anchor="ctr">
+          <a:bodyPr wrap="square" anchor="ctr" lIns="25400" rIns="25400" tIns="25400" bIns="25400">
             <a:spAutoFit/>
           </a:bodyPr>
           <a:lstStyle/>
@@ -26834,7 +25538,7 @@
           <a:noFill/>
         </p:spPr>
         <p:txBody>
-          <a:bodyPr wrap="square" lIns="25400" tIns="25400" rIns="25400" bIns="25400" anchor="ctr">
+          <a:bodyPr wrap="square" anchor="ctr" lIns="25400" rIns="25400" tIns="25400" bIns="25400">
             <a:spAutoFit/>
           </a:bodyPr>
           <a:lstStyle/>
@@ -26896,11 +25600,10 @@
           </a:fontRef>
         </p:style>
         <p:txBody>
-          <a:bodyPr wrap="square" rtlCol="0" anchor="ctr"/>
+          <a:bodyPr rtlCol="0" anchor="ctr" wrap="square"/>
           <a:lstStyle/>
           <a:p>
             <a:pPr algn="ctr"/>
-            <a:endParaRPr/>
           </a:p>
         </p:txBody>
       </p:sp>
@@ -26945,7 +25648,7 @@
           <a:p>
             <a:pPr algn="ctr"/>
             <a:r>
-              <a:rPr sz="1350" b="1">
+              <a:rPr b="1" sz="1350">
                 <a:solidFill>
                   <a:srgbClr val="FFFFFF"/>
                 </a:solidFill>
@@ -26973,7 +25676,7 @@
           <a:noFill/>
         </p:spPr>
         <p:txBody>
-          <a:bodyPr wrap="square" lIns="25400" tIns="25400" rIns="25400" bIns="25400" anchor="t">
+          <a:bodyPr wrap="square" anchor="t" lIns="25400" rIns="25400" tIns="25400" bIns="25400">
             <a:spAutoFit/>
           </a:bodyPr>
           <a:lstStyle/>
@@ -27053,7 +25756,7 @@
           <a:noFill/>
         </p:spPr>
         <p:txBody>
-          <a:bodyPr wrap="square" lIns="25400" tIns="25400" rIns="25400" bIns="25400" anchor="t">
+          <a:bodyPr wrap="square" anchor="t" lIns="25400" rIns="25400" tIns="25400" bIns="25400">
             <a:spAutoFit/>
           </a:bodyPr>
           <a:lstStyle/>
@@ -27401,319 +26104,4 @@
   </a:objectDefaults>
   <a:extraClrSchemeLst/>
 </a:theme>
-</file>
-
-<file path=ppt/theme/theme2.xml><?xml version="1.0" encoding="utf-8"?>
-<a:theme xmlns:a="http://schemas.openxmlformats.org/drawingml/2006/main" name="Office Theme">
-  <a:themeElements>
-    <a:clrScheme name="Office">
-      <a:dk1>
-        <a:sysClr val="windowText" lastClr="000000"/>
-      </a:dk1>
-      <a:lt1>
-        <a:sysClr val="window" lastClr="FFFFFF"/>
-      </a:lt1>
-      <a:dk2>
-        <a:srgbClr val="0E2841"/>
-      </a:dk2>
-      <a:lt2>
-        <a:srgbClr val="E8E8E8"/>
-      </a:lt2>
-      <a:accent1>
-        <a:srgbClr val="156082"/>
-      </a:accent1>
-      <a:accent2>
-        <a:srgbClr val="E97132"/>
-      </a:accent2>
-      <a:accent3>
-        <a:srgbClr val="196B24"/>
-      </a:accent3>
-      <a:accent4>
-        <a:srgbClr val="0F9ED5"/>
-      </a:accent4>
-      <a:accent5>
-        <a:srgbClr val="A02B93"/>
-      </a:accent5>
-      <a:accent6>
-        <a:srgbClr val="4EA72E"/>
-      </a:accent6>
-      <a:hlink>
-        <a:srgbClr val="467886"/>
-      </a:hlink>
-      <a:folHlink>
-        <a:srgbClr val="96607D"/>
-      </a:folHlink>
-    </a:clrScheme>
-    <a:fontScheme name="Office">
-      <a:majorFont>
-        <a:latin typeface="Aptos Display" panose="02110004020202020204"/>
-        <a:ea typeface=""/>
-        <a:cs typeface=""/>
-        <a:font script="Jpan" typeface="游ゴシック Light"/>
-        <a:font script="Hang" typeface="맑은 고딕"/>
-        <a:font script="Hans" typeface="等线 Light"/>
-        <a:font script="Hant" typeface="新細明體"/>
-        <a:font script="Arab" typeface="Times New Roman"/>
-        <a:font script="Hebr" typeface="Times New Roman"/>
-        <a:font script="Thai" typeface="Angsana New"/>
-        <a:font script="Ethi" typeface="Nyala"/>
-        <a:font script="Beng" typeface="Vrinda"/>
-        <a:font script="Gujr" typeface="Shruti"/>
-        <a:font script="Khmr" typeface="MoolBoran"/>
-        <a:font script="Knda" typeface="Tunga"/>
-        <a:font script="Guru" typeface="Raavi"/>
-        <a:font script="Cans" typeface="Euphemia"/>
-        <a:font script="Cher" typeface="Plantagenet Cherokee"/>
-        <a:font script="Yiii" typeface="Microsoft Yi Baiti"/>
-        <a:font script="Tibt" typeface="Microsoft Himalaya"/>
-        <a:font script="Thaa" typeface="MV Boli"/>
-        <a:font script="Deva" typeface="Mangal"/>
-        <a:font script="Telu" typeface="Gautami"/>
-        <a:font script="Taml" typeface="Latha"/>
-        <a:font script="Syrc" typeface="Estrangelo Edessa"/>
-        <a:font script="Orya" typeface="Kalinga"/>
-        <a:font script="Mlym" typeface="Kartika"/>
-        <a:font script="Laoo" typeface="DokChampa"/>
-        <a:font script="Sinh" typeface="Iskoola Pota"/>
-        <a:font script="Mong" typeface="Mongolian Baiti"/>
-        <a:font script="Viet" typeface="Times New Roman"/>
-        <a:font script="Uigh" typeface="Microsoft Uighur"/>
-        <a:font script="Geor" typeface="Sylfaen"/>
-        <a:font script="Armn" typeface="Arial"/>
-        <a:font script="Bugi" typeface="Leelawadee UI"/>
-        <a:font script="Bopo" typeface="Microsoft JhengHei"/>
-        <a:font script="Java" typeface="Javanese Text"/>
-        <a:font script="Lisu" typeface="Segoe UI"/>
-        <a:font script="Mymr" typeface="Myanmar Text"/>
-        <a:font script="Nkoo" typeface="Ebrima"/>
-        <a:font script="Olck" typeface="Nirmala UI"/>
-        <a:font script="Osma" typeface="Ebrima"/>
-        <a:font script="Phag" typeface="Phagspa"/>
-        <a:font script="Syrn" typeface="Estrangelo Edessa"/>
-        <a:font script="Syrj" typeface="Estrangelo Edessa"/>
-        <a:font script="Syre" typeface="Estrangelo Edessa"/>
-        <a:font script="Sora" typeface="Nirmala UI"/>
-        <a:font script="Tale" typeface="Microsoft Tai Le"/>
-        <a:font script="Talu" typeface="Microsoft New Tai Lue"/>
-        <a:font script="Tfng" typeface="Ebrima"/>
-      </a:majorFont>
-      <a:minorFont>
-        <a:latin typeface="Aptos" panose="02110004020202020204"/>
-        <a:ea typeface=""/>
-        <a:cs typeface=""/>
-        <a:font script="Jpan" typeface="游ゴシック"/>
-        <a:font script="Hang" typeface="맑은 고딕"/>
-        <a:font script="Hans" typeface="等线"/>
-        <a:font script="Hant" typeface="新細明體"/>
-        <a:font script="Arab" typeface="Arial"/>
-        <a:font script="Hebr" typeface="Arial"/>
-        <a:font script="Thai" typeface="Cordia New"/>
-        <a:font script="Ethi" typeface="Nyala"/>
-        <a:font script="Beng" typeface="Vrinda"/>
-        <a:font script="Gujr" typeface="Shruti"/>
-        <a:font script="Khmr" typeface="DaunPenh"/>
-        <a:font script="Knda" typeface="Tunga"/>
-        <a:font script="Guru" typeface="Raavi"/>
-        <a:font script="Cans" typeface="Euphemia"/>
-        <a:font script="Cher" typeface="Plantagenet Cherokee"/>
-        <a:font script="Yiii" typeface="Microsoft Yi Baiti"/>
-        <a:font script="Tibt" typeface="Microsoft Himalaya"/>
-        <a:font script="Thaa" typeface="MV Boli"/>
-        <a:font script="Deva" typeface="Mangal"/>
-        <a:font script="Telu" typeface="Gautami"/>
-        <a:font script="Taml" typeface="Latha"/>
-        <a:font script="Syrc" typeface="Estrangelo Edessa"/>
-        <a:font script="Orya" typeface="Kalinga"/>
-        <a:font script="Mlym" typeface="Kartika"/>
-        <a:font script="Laoo" typeface="DokChampa"/>
-        <a:font script="Sinh" typeface="Iskoola Pota"/>
-        <a:font script="Mong" typeface="Mongolian Baiti"/>
-        <a:font script="Viet" typeface="Arial"/>
-        <a:font script="Uigh" typeface="Microsoft Uighur"/>
-        <a:font script="Geor" typeface="Sylfaen"/>
-        <a:font script="Armn" typeface="Arial"/>
-        <a:font script="Bugi" typeface="Leelawadee UI"/>
-        <a:font script="Bopo" typeface="Microsoft JhengHei"/>
-        <a:font script="Java" typeface="Javanese Text"/>
-        <a:font script="Lisu" typeface="Segoe UI"/>
-        <a:font script="Mymr" typeface="Myanmar Text"/>
-        <a:font script="Nkoo" typeface="Ebrima"/>
-        <a:font script="Olck" typeface="Nirmala UI"/>
-        <a:font script="Osma" typeface="Ebrima"/>
-        <a:font script="Phag" typeface="Phagspa"/>
-        <a:font script="Syrn" typeface="Estrangelo Edessa"/>
-        <a:font script="Syrj" typeface="Estrangelo Edessa"/>
-        <a:font script="Syre" typeface="Estrangelo Edessa"/>
-        <a:font script="Sora" typeface="Nirmala UI"/>
-        <a:font script="Tale" typeface="Microsoft Tai Le"/>
-        <a:font script="Talu" typeface="Microsoft New Tai Lue"/>
-        <a:font script="Tfng" typeface="Ebrima"/>
-      </a:minorFont>
-    </a:fontScheme>
-    <a:fmtScheme name="Office">
-      <a:fillStyleLst>
-        <a:solidFill>
-          <a:schemeClr val="phClr"/>
-        </a:solidFill>
-        <a:gradFill rotWithShape="1">
-          <a:gsLst>
-            <a:gs pos="0">
-              <a:schemeClr val="phClr">
-                <a:lumMod val="110000"/>
-                <a:satMod val="105000"/>
-                <a:tint val="67000"/>
-              </a:schemeClr>
-            </a:gs>
-            <a:gs pos="50000">
-              <a:schemeClr val="phClr">
-                <a:lumMod val="105000"/>
-                <a:satMod val="103000"/>
-                <a:tint val="73000"/>
-              </a:schemeClr>
-            </a:gs>
-            <a:gs pos="100000">
-              <a:schemeClr val="phClr">
-                <a:lumMod val="105000"/>
-                <a:satMod val="109000"/>
-                <a:tint val="81000"/>
-              </a:schemeClr>
-            </a:gs>
-          </a:gsLst>
-          <a:lin ang="5400000" scaled="0"/>
-        </a:gradFill>
-        <a:gradFill rotWithShape="1">
-          <a:gsLst>
-            <a:gs pos="0">
-              <a:schemeClr val="phClr">
-                <a:satMod val="103000"/>
-                <a:lumMod val="102000"/>
-                <a:tint val="94000"/>
-              </a:schemeClr>
-            </a:gs>
-            <a:gs pos="50000">
-              <a:schemeClr val="phClr">
-                <a:satMod val="110000"/>
-                <a:lumMod val="100000"/>
-                <a:shade val="100000"/>
-              </a:schemeClr>
-            </a:gs>
-            <a:gs pos="100000">
-              <a:schemeClr val="phClr">
-                <a:lumMod val="99000"/>
-                <a:satMod val="120000"/>
-                <a:shade val="78000"/>
-              </a:schemeClr>
-            </a:gs>
-          </a:gsLst>
-          <a:lin ang="5400000" scaled="0"/>
-        </a:gradFill>
-      </a:fillStyleLst>
-      <a:lnStyleLst>
-        <a:ln w="12700" cap="flat" cmpd="sng" algn="ctr">
-          <a:solidFill>
-            <a:schemeClr val="phClr"/>
-          </a:solidFill>
-          <a:prstDash val="solid"/>
-          <a:miter lim="800000"/>
-        </a:ln>
-        <a:ln w="19050" cap="flat" cmpd="sng" algn="ctr">
-          <a:solidFill>
-            <a:schemeClr val="phClr"/>
-          </a:solidFill>
-          <a:prstDash val="solid"/>
-          <a:miter lim="800000"/>
-        </a:ln>
-        <a:ln w="25400" cap="flat" cmpd="sng" algn="ctr">
-          <a:solidFill>
-            <a:schemeClr val="phClr"/>
-          </a:solidFill>
-          <a:prstDash val="solid"/>
-          <a:miter lim="800000"/>
-        </a:ln>
-      </a:lnStyleLst>
-      <a:effectStyleLst>
-        <a:effectStyle>
-          <a:effectLst/>
-        </a:effectStyle>
-        <a:effectStyle>
-          <a:effectLst/>
-        </a:effectStyle>
-        <a:effectStyle>
-          <a:effectLst>
-            <a:outerShdw blurRad="57150" dist="19050" dir="5400000" algn="ctr" rotWithShape="0">
-              <a:srgbClr val="000000">
-                <a:alpha val="63000"/>
-              </a:srgbClr>
-            </a:outerShdw>
-          </a:effectLst>
-        </a:effectStyle>
-      </a:effectStyleLst>
-      <a:bgFillStyleLst>
-        <a:solidFill>
-          <a:schemeClr val="phClr"/>
-        </a:solidFill>
-        <a:solidFill>
-          <a:schemeClr val="phClr">
-            <a:tint val="95000"/>
-            <a:satMod val="170000"/>
-          </a:schemeClr>
-        </a:solidFill>
-        <a:gradFill rotWithShape="1">
-          <a:gsLst>
-            <a:gs pos="0">
-              <a:schemeClr val="phClr">
-                <a:tint val="93000"/>
-                <a:satMod val="150000"/>
-                <a:shade val="98000"/>
-                <a:lumMod val="102000"/>
-              </a:schemeClr>
-            </a:gs>
-            <a:gs pos="50000">
-              <a:schemeClr val="phClr">
-                <a:tint val="98000"/>
-                <a:satMod val="130000"/>
-                <a:shade val="90000"/>
-                <a:lumMod val="103000"/>
-              </a:schemeClr>
-            </a:gs>
-            <a:gs pos="100000">
-              <a:schemeClr val="phClr">
-                <a:shade val="63000"/>
-                <a:satMod val="120000"/>
-              </a:schemeClr>
-            </a:gs>
-          </a:gsLst>
-          <a:lin ang="5400000" scaled="0"/>
-        </a:gradFill>
-      </a:bgFillStyleLst>
-    </a:fmtScheme>
-  </a:themeElements>
-  <a:objectDefaults>
-    <a:lnDef>
-      <a:spPr/>
-      <a:bodyPr/>
-      <a:lstStyle/>
-      <a:style>
-        <a:lnRef idx="2">
-          <a:schemeClr val="accent1"/>
-        </a:lnRef>
-        <a:fillRef idx="0">
-          <a:schemeClr val="accent1"/>
-        </a:fillRef>
-        <a:effectRef idx="1">
-          <a:schemeClr val="accent1"/>
-        </a:effectRef>
-        <a:fontRef idx="minor">
-          <a:schemeClr val="tx1"/>
-        </a:fontRef>
-      </a:style>
-    </a:lnDef>
-  </a:objectDefaults>
-  <a:extraClrSchemeLst/>
-  <a:extLst>
-    <a:ext uri="{05A4C25C-085E-4340-85A3-A5531E510DB2}">
-      <thm15:themeFamily xmlns:thm15="http://schemas.microsoft.com/office/thememl/2012/main" name="Office Theme" id="{2E142A2C-CD16-42D6-873A-C26D2A0506FA}" vid="{1BDDFF52-6CD6-40A5-AB3C-68EB2F1E4D0A}"/>
-    </a:ext>
-  </a:extLst>
-</a:theme>
 </file>